--- a/Rmarkdown/SERC_Rmarkdown.pptx
+++ b/Rmarkdown/SERC_Rmarkdown.pptx
@@ -12341,6 +12341,14 @@
 <file path=ppt/slides/slide1.xml><?xml version="1.0" encoding="utf-8"?>
 <p:sld xmlns:a="http://schemas.openxmlformats.org/drawingml/2006/main" xmlns:r="http://schemas.openxmlformats.org/officeDocument/2006/relationships" xmlns:p="http://schemas.openxmlformats.org/presentationml/2006/main">
   <p:cSld>
+    <p:bg>
+      <p:bgPr>
+        <a:solidFill>
+          <a:schemeClr val="bg2"/>
+        </a:solidFill>
+        <a:effectLst/>
+      </p:bgPr>
+    </p:bg>
     <p:spTree>
       <p:nvGrpSpPr>
         <p:cNvPr id="1" name=""/>
@@ -12357,6 +12365,5423 @@
       </p:grpSpPr>
       <p:sp>
         <p:nvSpPr>
+          <p:cNvPr id="8" name="Rectangle 7">
+            <a:extLst>
+              <a:ext uri="{FF2B5EF4-FFF2-40B4-BE49-F238E27FC236}">
+                <a16:creationId xmlns:a16="http://schemas.microsoft.com/office/drawing/2014/main" id="{4D6A640B-6684-4338-9199-6EE758735581}"/>
+              </a:ext>
+              <a:ext uri="{C183D7F6-B498-43B3-948B-1728B52AA6E4}">
+                <adec:decorative xmlns:adec="http://schemas.microsoft.com/office/drawing/2017/decorative" val="1"/>
+              </a:ext>
+            </a:extLst>
+          </p:cNvPr>
+          <p:cNvSpPr>
+            <a:spLocks noGrp="1" noRot="1" noChangeAspect="1" noMove="1" noResize="1" noEditPoints="1" noAdjustHandles="1" noChangeArrowheads="1" noChangeShapeType="1" noTextEdit="1"/>
+          </p:cNvSpPr>
+          <p:nvPr>
+            <p:extLst>
+              <p:ext uri="{386F3935-93C4-4BCD-93E2-E3B085C9AB24}">
+                <p16:designElem xmlns:p16="http://schemas.microsoft.com/office/powerpoint/2015/main" val="1"/>
+              </p:ext>
+            </p:extLst>
+          </p:nvPr>
+        </p:nvSpPr>
+        <p:spPr>
+          <a:xfrm>
+            <a:off x="0" y="0"/>
+            <a:ext cx="12192000" cy="6858000"/>
+          </a:xfrm>
+          <a:prstGeom prst="rect">
+            <a:avLst/>
+          </a:prstGeom>
+          <a:solidFill>
+            <a:schemeClr val="bg1">
+              <a:lumMod val="85000"/>
+              <a:lumOff val="15000"/>
+            </a:schemeClr>
+          </a:solidFill>
+          <a:ln>
+            <a:noFill/>
+          </a:ln>
+        </p:spPr>
+        <p:style>
+          <a:lnRef idx="2">
+            <a:schemeClr val="accent1">
+              <a:shade val="50000"/>
+            </a:schemeClr>
+          </a:lnRef>
+          <a:fillRef idx="1">
+            <a:schemeClr val="accent1"/>
+          </a:fillRef>
+          <a:effectRef idx="0">
+            <a:schemeClr val="accent1"/>
+          </a:effectRef>
+          <a:fontRef idx="minor">
+            <a:schemeClr val="lt1"/>
+          </a:fontRef>
+        </p:style>
+        <p:txBody>
+          <a:bodyPr rtlCol="0" anchor="ctr"/>
+          <a:lstStyle/>
+          <a:p>
+            <a:pPr algn="ctr"/>
+            <a:endParaRPr lang="en-US"/>
+          </a:p>
+        </p:txBody>
+      </p:sp>
+      <p:grpSp>
+        <p:nvGrpSpPr>
+          <p:cNvPr id="10" name="Group 9">
+            <a:extLst>
+              <a:ext uri="{FF2B5EF4-FFF2-40B4-BE49-F238E27FC236}">
+                <a16:creationId xmlns:a16="http://schemas.microsoft.com/office/drawing/2014/main" id="{5BAB052D-92E4-4715-895B-E423230754C2}"/>
+              </a:ext>
+              <a:ext uri="{C183D7F6-B498-43B3-948B-1728B52AA6E4}">
+                <adec:decorative xmlns:adec="http://schemas.microsoft.com/office/drawing/2017/decorative" val="1"/>
+              </a:ext>
+            </a:extLst>
+          </p:cNvPr>
+          <p:cNvGrpSpPr>
+            <a:grpSpLocks noGrp="1" noUngrp="1" noRot="1" noChangeAspect="1" noMove="1" noResize="1"/>
+          </p:cNvGrpSpPr>
+          <p:nvPr>
+            <p:extLst>
+              <p:ext uri="{386F3935-93C4-4BCD-93E2-E3B085C9AB24}">
+                <p16:designElem xmlns:p16="http://schemas.microsoft.com/office/powerpoint/2015/main" val="1"/>
+              </p:ext>
+            </p:extLst>
+          </p:nvPr>
+        </p:nvGrpSpPr>
+        <p:grpSpPr>
+          <a:xfrm>
+            <a:off x="0" y="-1"/>
+            <a:ext cx="2305051" cy="6858001"/>
+            <a:chOff x="0" y="0"/>
+            <a:chExt cx="2305051" cy="6858001"/>
+          </a:xfrm>
+          <a:solidFill>
+            <a:schemeClr val="bg2">
+              <a:lumMod val="60000"/>
+              <a:lumOff val="40000"/>
+              <a:alpha val="60000"/>
+            </a:schemeClr>
+          </a:solidFill>
+          <a:effectLst/>
+        </p:grpSpPr>
+        <p:sp>
+          <p:nvSpPr>
+            <p:cNvPr id="11" name="Rectangle 5">
+              <a:extLst>
+                <a:ext uri="{FF2B5EF4-FFF2-40B4-BE49-F238E27FC236}">
+                  <a16:creationId xmlns:a16="http://schemas.microsoft.com/office/drawing/2014/main" id="{F9792D54-14D4-44D6-A491-DEA72C26C373}"/>
+                </a:ext>
+                <a:ext uri="{C183D7F6-B498-43B3-948B-1728B52AA6E4}">
+                  <adec:decorative xmlns:adec="http://schemas.microsoft.com/office/drawing/2017/decorative" val="1"/>
+                </a:ext>
+              </a:extLst>
+            </p:cNvPr>
+            <p:cNvSpPr>
+              <a:spLocks noChangeArrowheads="1"/>
+            </p:cNvSpPr>
+            <p:nvPr>
+              <p:extLst>
+                <p:ext uri="{386F3935-93C4-4BCD-93E2-E3B085C9AB24}">
+                  <p16:designElem xmlns:p16="http://schemas.microsoft.com/office/powerpoint/2015/main" val="1"/>
+                </p:ext>
+              </p:extLst>
+            </p:nvPr>
+          </p:nvSpPr>
+          <p:spPr bwMode="auto">
+            <a:xfrm>
+              <a:off x="1209675" y="4763"/>
+              <a:ext cx="23813" cy="2181225"/>
+            </a:xfrm>
+            <a:prstGeom prst="rect">
+              <a:avLst/>
+            </a:prstGeom>
+            <a:grpFill/>
+            <a:ln>
+              <a:noFill/>
+            </a:ln>
+            <a:extLst>
+              <a:ext uri="{91240B29-F687-4f45-9708-019B960494DF}">
+                <a14:hiddenLine xmlns="" xmlns:a16="http://schemas.microsoft.com/office/drawing/2014/main" xmlns:p14="http://schemas.microsoft.com/office/powerpoint/2010/main" xmlns:a14="http://schemas.microsoft.com/office/drawing/2010/main" w="9525">
+                  <a:solidFill>
+                    <a:srgbClr val="000000"/>
+                  </a:solidFill>
+                  <a:miter lim="800000"/>
+                  <a:headEnd/>
+                  <a:tailEnd/>
+                </a14:hiddenLine>
+              </a:ext>
+            </a:extLst>
+          </p:spPr>
+          <p:txBody>
+            <a:bodyPr/>
+            <a:lstStyle/>
+            <a:p>
+              <a:endParaRPr lang="en-US"/>
+            </a:p>
+          </p:txBody>
+        </p:sp>
+        <p:sp>
+          <p:nvSpPr>
+            <p:cNvPr id="12" name="Freeform 6">
+              <a:extLst>
+                <a:ext uri="{FF2B5EF4-FFF2-40B4-BE49-F238E27FC236}">
+                  <a16:creationId xmlns:a16="http://schemas.microsoft.com/office/drawing/2014/main" id="{D3CB19E7-637B-4FA1-B5E7-E35CF50AD39C}"/>
+                </a:ext>
+                <a:ext uri="{C183D7F6-B498-43B3-948B-1728B52AA6E4}">
+                  <adec:decorative xmlns:adec="http://schemas.microsoft.com/office/drawing/2017/decorative" val="1"/>
+                </a:ext>
+              </a:extLst>
+            </p:cNvPr>
+            <p:cNvSpPr>
+              <a:spLocks noEditPoints="1"/>
+            </p:cNvSpPr>
+            <p:nvPr>
+              <p:extLst>
+                <p:ext uri="{386F3935-93C4-4BCD-93E2-E3B085C9AB24}">
+                  <p16:designElem xmlns:p16="http://schemas.microsoft.com/office/powerpoint/2015/main" val="1"/>
+                </p:ext>
+              </p:extLst>
+            </p:nvPr>
+          </p:nvSpPr>
+          <p:spPr bwMode="auto">
+            <a:xfrm>
+              <a:off x="1128713" y="2176463"/>
+              <a:ext cx="190500" cy="190500"/>
+            </a:xfrm>
+            <a:custGeom>
+              <a:avLst/>
+              <a:gdLst/>
+              <a:ahLst/>
+              <a:cxnLst/>
+              <a:rect l="0" t="0" r="r" b="b"/>
+              <a:pathLst>
+                <a:path w="40" h="40">
+                  <a:moveTo>
+                    <a:pt x="20" y="40"/>
+                  </a:moveTo>
+                  <a:cubicBezTo>
+                    <a:pt x="9" y="40"/>
+                    <a:pt x="0" y="31"/>
+                    <a:pt x="0" y="20"/>
+                  </a:cubicBezTo>
+                  <a:cubicBezTo>
+                    <a:pt x="0" y="9"/>
+                    <a:pt x="9" y="0"/>
+                    <a:pt x="20" y="0"/>
+                  </a:cubicBezTo>
+                  <a:cubicBezTo>
+                    <a:pt x="31" y="0"/>
+                    <a:pt x="40" y="9"/>
+                    <a:pt x="40" y="20"/>
+                  </a:cubicBezTo>
+                  <a:cubicBezTo>
+                    <a:pt x="40" y="31"/>
+                    <a:pt x="31" y="40"/>
+                    <a:pt x="20" y="40"/>
+                  </a:cubicBezTo>
+                  <a:close/>
+                  <a:moveTo>
+                    <a:pt x="20" y="4"/>
+                  </a:moveTo>
+                  <a:cubicBezTo>
+                    <a:pt x="11" y="4"/>
+                    <a:pt x="4" y="11"/>
+                    <a:pt x="4" y="20"/>
+                  </a:cubicBezTo>
+                  <a:cubicBezTo>
+                    <a:pt x="4" y="29"/>
+                    <a:pt x="11" y="36"/>
+                    <a:pt x="20" y="36"/>
+                  </a:cubicBezTo>
+                  <a:cubicBezTo>
+                    <a:pt x="28" y="36"/>
+                    <a:pt x="36" y="29"/>
+                    <a:pt x="36" y="20"/>
+                  </a:cubicBezTo>
+                  <a:cubicBezTo>
+                    <a:pt x="36" y="11"/>
+                    <a:pt x="28" y="4"/>
+                    <a:pt x="20" y="4"/>
+                  </a:cubicBezTo>
+                  <a:close/>
+                </a:path>
+              </a:pathLst>
+            </a:custGeom>
+            <a:grpFill/>
+            <a:ln>
+              <a:noFill/>
+            </a:ln>
+            <a:extLst>
+              <a:ext uri="{91240B29-F687-4f45-9708-019B960494DF}">
+                <a14:hiddenLine xmlns="" xmlns:a16="http://schemas.microsoft.com/office/drawing/2014/main" xmlns:p14="http://schemas.microsoft.com/office/powerpoint/2010/main" xmlns:a14="http://schemas.microsoft.com/office/drawing/2010/main" w="9525">
+                  <a:solidFill>
+                    <a:srgbClr val="000000"/>
+                  </a:solidFill>
+                  <a:round/>
+                  <a:headEnd/>
+                  <a:tailEnd/>
+                </a14:hiddenLine>
+              </a:ext>
+            </a:extLst>
+          </p:spPr>
+          <p:txBody>
+            <a:bodyPr/>
+            <a:lstStyle/>
+            <a:p>
+              <a:endParaRPr lang="en-US"/>
+            </a:p>
+          </p:txBody>
+        </p:sp>
+        <p:sp>
+          <p:nvSpPr>
+            <p:cNvPr id="13" name="Freeform 7">
+              <a:extLst>
+                <a:ext uri="{FF2B5EF4-FFF2-40B4-BE49-F238E27FC236}">
+                  <a16:creationId xmlns:a16="http://schemas.microsoft.com/office/drawing/2014/main" id="{B8CED72B-CBE7-450E-BE7C-247E884393A5}"/>
+                </a:ext>
+                <a:ext uri="{C183D7F6-B498-43B3-948B-1728B52AA6E4}">
+                  <adec:decorative xmlns:adec="http://schemas.microsoft.com/office/drawing/2017/decorative" val="1"/>
+                </a:ext>
+              </a:extLst>
+            </p:cNvPr>
+            <p:cNvSpPr>
+              <a:spLocks noEditPoints="1"/>
+            </p:cNvSpPr>
+            <p:nvPr>
+              <p:extLst>
+                <p:ext uri="{386F3935-93C4-4BCD-93E2-E3B085C9AB24}">
+                  <p16:designElem xmlns:p16="http://schemas.microsoft.com/office/powerpoint/2015/main" val="1"/>
+                </p:ext>
+              </p:extLst>
+            </p:nvPr>
+          </p:nvSpPr>
+          <p:spPr bwMode="auto">
+            <a:xfrm>
+              <a:off x="1123950" y="4021138"/>
+              <a:ext cx="190500" cy="188913"/>
+            </a:xfrm>
+            <a:custGeom>
+              <a:avLst/>
+              <a:gdLst/>
+              <a:ahLst/>
+              <a:cxnLst/>
+              <a:rect l="0" t="0" r="r" b="b"/>
+              <a:pathLst>
+                <a:path w="40" h="40">
+                  <a:moveTo>
+                    <a:pt x="20" y="40"/>
+                  </a:moveTo>
+                  <a:cubicBezTo>
+                    <a:pt x="9" y="40"/>
+                    <a:pt x="0" y="31"/>
+                    <a:pt x="0" y="20"/>
+                  </a:cubicBezTo>
+                  <a:cubicBezTo>
+                    <a:pt x="0" y="9"/>
+                    <a:pt x="9" y="0"/>
+                    <a:pt x="20" y="0"/>
+                  </a:cubicBezTo>
+                  <a:cubicBezTo>
+                    <a:pt x="31" y="0"/>
+                    <a:pt x="40" y="9"/>
+                    <a:pt x="40" y="20"/>
+                  </a:cubicBezTo>
+                  <a:cubicBezTo>
+                    <a:pt x="40" y="31"/>
+                    <a:pt x="31" y="40"/>
+                    <a:pt x="20" y="40"/>
+                  </a:cubicBezTo>
+                  <a:close/>
+                  <a:moveTo>
+                    <a:pt x="20" y="4"/>
+                  </a:moveTo>
+                  <a:cubicBezTo>
+                    <a:pt x="11" y="4"/>
+                    <a:pt x="4" y="11"/>
+                    <a:pt x="4" y="20"/>
+                  </a:cubicBezTo>
+                  <a:cubicBezTo>
+                    <a:pt x="4" y="29"/>
+                    <a:pt x="11" y="36"/>
+                    <a:pt x="20" y="36"/>
+                  </a:cubicBezTo>
+                  <a:cubicBezTo>
+                    <a:pt x="29" y="36"/>
+                    <a:pt x="36" y="29"/>
+                    <a:pt x="36" y="20"/>
+                  </a:cubicBezTo>
+                  <a:cubicBezTo>
+                    <a:pt x="36" y="11"/>
+                    <a:pt x="29" y="4"/>
+                    <a:pt x="20" y="4"/>
+                  </a:cubicBezTo>
+                  <a:close/>
+                </a:path>
+              </a:pathLst>
+            </a:custGeom>
+            <a:grpFill/>
+            <a:ln>
+              <a:noFill/>
+            </a:ln>
+            <a:extLst>
+              <a:ext uri="{91240B29-F687-4f45-9708-019B960494DF}">
+                <a14:hiddenLine xmlns="" xmlns:a16="http://schemas.microsoft.com/office/drawing/2014/main" xmlns:p14="http://schemas.microsoft.com/office/powerpoint/2010/main" xmlns:a14="http://schemas.microsoft.com/office/drawing/2010/main" w="9525">
+                  <a:solidFill>
+                    <a:srgbClr val="000000"/>
+                  </a:solidFill>
+                  <a:round/>
+                  <a:headEnd/>
+                  <a:tailEnd/>
+                </a14:hiddenLine>
+              </a:ext>
+            </a:extLst>
+          </p:spPr>
+          <p:txBody>
+            <a:bodyPr/>
+            <a:lstStyle/>
+            <a:p>
+              <a:endParaRPr lang="en-US"/>
+            </a:p>
+          </p:txBody>
+        </p:sp>
+        <p:sp>
+          <p:nvSpPr>
+            <p:cNvPr id="14" name="Rectangle 8">
+              <a:extLst>
+                <a:ext uri="{FF2B5EF4-FFF2-40B4-BE49-F238E27FC236}">
+                  <a16:creationId xmlns:a16="http://schemas.microsoft.com/office/drawing/2014/main" id="{3BBD7465-3665-40AE-98E8-F8503EE2096A}"/>
+                </a:ext>
+                <a:ext uri="{C183D7F6-B498-43B3-948B-1728B52AA6E4}">
+                  <adec:decorative xmlns:adec="http://schemas.microsoft.com/office/drawing/2017/decorative" val="1"/>
+                </a:ext>
+              </a:extLst>
+            </p:cNvPr>
+            <p:cNvSpPr>
+              <a:spLocks noChangeArrowheads="1"/>
+            </p:cNvSpPr>
+            <p:nvPr>
+              <p:extLst>
+                <p:ext uri="{386F3935-93C4-4BCD-93E2-E3B085C9AB24}">
+                  <p16:designElem xmlns:p16="http://schemas.microsoft.com/office/powerpoint/2015/main" val="1"/>
+                </p:ext>
+              </p:extLst>
+            </p:nvPr>
+          </p:nvSpPr>
+          <p:spPr bwMode="auto">
+            <a:xfrm>
+              <a:off x="414338" y="9525"/>
+              <a:ext cx="28575" cy="4481513"/>
+            </a:xfrm>
+            <a:prstGeom prst="rect">
+              <a:avLst/>
+            </a:prstGeom>
+            <a:grpFill/>
+            <a:ln>
+              <a:noFill/>
+            </a:ln>
+            <a:extLst>
+              <a:ext uri="{91240B29-F687-4f45-9708-019B960494DF}">
+                <a14:hiddenLine xmlns="" xmlns:a16="http://schemas.microsoft.com/office/drawing/2014/main" xmlns:p14="http://schemas.microsoft.com/office/powerpoint/2010/main" xmlns:a14="http://schemas.microsoft.com/office/drawing/2010/main" w="9525">
+                  <a:solidFill>
+                    <a:srgbClr val="000000"/>
+                  </a:solidFill>
+                  <a:miter lim="800000"/>
+                  <a:headEnd/>
+                  <a:tailEnd/>
+                </a14:hiddenLine>
+              </a:ext>
+            </a:extLst>
+          </p:spPr>
+          <p:txBody>
+            <a:bodyPr/>
+            <a:lstStyle/>
+            <a:p>
+              <a:endParaRPr lang="en-US"/>
+            </a:p>
+          </p:txBody>
+        </p:sp>
+        <p:sp>
+          <p:nvSpPr>
+            <p:cNvPr id="15" name="Freeform 9">
+              <a:extLst>
+                <a:ext uri="{FF2B5EF4-FFF2-40B4-BE49-F238E27FC236}">
+                  <a16:creationId xmlns:a16="http://schemas.microsoft.com/office/drawing/2014/main" id="{86CB6F49-3080-4A29-860D-F8F1AC4AC305}"/>
+                </a:ext>
+                <a:ext uri="{C183D7F6-B498-43B3-948B-1728B52AA6E4}">
+                  <adec:decorative xmlns:adec="http://schemas.microsoft.com/office/drawing/2017/decorative" val="1"/>
+                </a:ext>
+              </a:extLst>
+            </p:cNvPr>
+            <p:cNvSpPr>
+              <a:spLocks noEditPoints="1"/>
+            </p:cNvSpPr>
+            <p:nvPr>
+              <p:extLst>
+                <p:ext uri="{386F3935-93C4-4BCD-93E2-E3B085C9AB24}">
+                  <p16:designElem xmlns:p16="http://schemas.microsoft.com/office/powerpoint/2015/main" val="1"/>
+                </p:ext>
+              </p:extLst>
+            </p:nvPr>
+          </p:nvSpPr>
+          <p:spPr bwMode="auto">
+            <a:xfrm>
+              <a:off x="333375" y="4481513"/>
+              <a:ext cx="190500" cy="190500"/>
+            </a:xfrm>
+            <a:custGeom>
+              <a:avLst/>
+              <a:gdLst/>
+              <a:ahLst/>
+              <a:cxnLst/>
+              <a:rect l="0" t="0" r="r" b="b"/>
+              <a:pathLst>
+                <a:path w="40" h="40">
+                  <a:moveTo>
+                    <a:pt x="20" y="40"/>
+                  </a:moveTo>
+                  <a:cubicBezTo>
+                    <a:pt x="9" y="40"/>
+                    <a:pt x="0" y="31"/>
+                    <a:pt x="0" y="20"/>
+                  </a:cubicBezTo>
+                  <a:cubicBezTo>
+                    <a:pt x="0" y="9"/>
+                    <a:pt x="9" y="0"/>
+                    <a:pt x="20" y="0"/>
+                  </a:cubicBezTo>
+                  <a:cubicBezTo>
+                    <a:pt x="31" y="0"/>
+                    <a:pt x="40" y="9"/>
+                    <a:pt x="40" y="20"/>
+                  </a:cubicBezTo>
+                  <a:cubicBezTo>
+                    <a:pt x="40" y="31"/>
+                    <a:pt x="31" y="40"/>
+                    <a:pt x="20" y="40"/>
+                  </a:cubicBezTo>
+                  <a:close/>
+                  <a:moveTo>
+                    <a:pt x="20" y="4"/>
+                  </a:moveTo>
+                  <a:cubicBezTo>
+                    <a:pt x="11" y="4"/>
+                    <a:pt x="4" y="11"/>
+                    <a:pt x="4" y="20"/>
+                  </a:cubicBezTo>
+                  <a:cubicBezTo>
+                    <a:pt x="4" y="29"/>
+                    <a:pt x="11" y="36"/>
+                    <a:pt x="20" y="36"/>
+                  </a:cubicBezTo>
+                  <a:cubicBezTo>
+                    <a:pt x="29" y="36"/>
+                    <a:pt x="36" y="29"/>
+                    <a:pt x="36" y="20"/>
+                  </a:cubicBezTo>
+                  <a:cubicBezTo>
+                    <a:pt x="36" y="11"/>
+                    <a:pt x="29" y="4"/>
+                    <a:pt x="20" y="4"/>
+                  </a:cubicBezTo>
+                  <a:close/>
+                </a:path>
+              </a:pathLst>
+            </a:custGeom>
+            <a:grpFill/>
+            <a:ln>
+              <a:noFill/>
+            </a:ln>
+            <a:extLst>
+              <a:ext uri="{91240B29-F687-4f45-9708-019B960494DF}">
+                <a14:hiddenLine xmlns="" xmlns:a16="http://schemas.microsoft.com/office/drawing/2014/main" xmlns:p14="http://schemas.microsoft.com/office/powerpoint/2010/main" xmlns:a14="http://schemas.microsoft.com/office/drawing/2010/main" w="9525">
+                  <a:solidFill>
+                    <a:srgbClr val="000000"/>
+                  </a:solidFill>
+                  <a:round/>
+                  <a:headEnd/>
+                  <a:tailEnd/>
+                </a14:hiddenLine>
+              </a:ext>
+            </a:extLst>
+          </p:spPr>
+          <p:txBody>
+            <a:bodyPr/>
+            <a:lstStyle/>
+            <a:p>
+              <a:endParaRPr lang="en-US"/>
+            </a:p>
+          </p:txBody>
+        </p:sp>
+        <p:sp>
+          <p:nvSpPr>
+            <p:cNvPr id="16" name="Freeform 10">
+              <a:extLst>
+                <a:ext uri="{FF2B5EF4-FFF2-40B4-BE49-F238E27FC236}">
+                  <a16:creationId xmlns:a16="http://schemas.microsoft.com/office/drawing/2014/main" id="{EA3A8EBB-EC1C-42C6-B409-E065ACD0EF56}"/>
+                </a:ext>
+                <a:ext uri="{C183D7F6-B498-43B3-948B-1728B52AA6E4}">
+                  <adec:decorative xmlns:adec="http://schemas.microsoft.com/office/drawing/2017/decorative" val="1"/>
+                </a:ext>
+              </a:extLst>
+            </p:cNvPr>
+            <p:cNvSpPr/>
+            <p:nvPr>
+              <p:extLst>
+                <p:ext uri="{386F3935-93C4-4BCD-93E2-E3B085C9AB24}">
+                  <p16:designElem xmlns:p16="http://schemas.microsoft.com/office/powerpoint/2015/main" val="1"/>
+                </p:ext>
+              </p:extLst>
+            </p:nvPr>
+          </p:nvSpPr>
+          <p:spPr bwMode="auto">
+            <a:xfrm>
+              <a:off x="190500" y="9525"/>
+              <a:ext cx="152400" cy="908050"/>
+            </a:xfrm>
+            <a:custGeom>
+              <a:avLst/>
+              <a:gdLst/>
+              <a:ahLst/>
+              <a:cxnLst/>
+              <a:rect l="0" t="0" r="r" b="b"/>
+              <a:pathLst>
+                <a:path w="96" h="572">
+                  <a:moveTo>
+                    <a:pt x="15" y="572"/>
+                  </a:moveTo>
+                  <a:lnTo>
+                    <a:pt x="0" y="566"/>
+                  </a:lnTo>
+                  <a:lnTo>
+                    <a:pt x="81" y="380"/>
+                  </a:lnTo>
+                  <a:lnTo>
+                    <a:pt x="81" y="0"/>
+                  </a:lnTo>
+                  <a:lnTo>
+                    <a:pt x="96" y="0"/>
+                  </a:lnTo>
+                  <a:lnTo>
+                    <a:pt x="96" y="383"/>
+                  </a:lnTo>
+                  <a:lnTo>
+                    <a:pt x="15" y="572"/>
+                  </a:lnTo>
+                  <a:close/>
+                </a:path>
+              </a:pathLst>
+            </a:custGeom>
+            <a:grpFill/>
+            <a:ln>
+              <a:noFill/>
+            </a:ln>
+            <a:extLst>
+              <a:ext uri="{91240B29-F687-4f45-9708-019B960494DF}">
+                <a14:hiddenLine xmlns="" xmlns:a16="http://schemas.microsoft.com/office/drawing/2014/main" xmlns:p14="http://schemas.microsoft.com/office/powerpoint/2010/main" xmlns:a14="http://schemas.microsoft.com/office/drawing/2010/main" w="9525">
+                  <a:solidFill>
+                    <a:srgbClr val="000000"/>
+                  </a:solidFill>
+                  <a:round/>
+                  <a:headEnd/>
+                  <a:tailEnd/>
+                </a14:hiddenLine>
+              </a:ext>
+            </a:extLst>
+          </p:spPr>
+          <p:txBody>
+            <a:bodyPr/>
+            <a:lstStyle/>
+            <a:p>
+              <a:endParaRPr lang="en-US"/>
+            </a:p>
+          </p:txBody>
+        </p:sp>
+        <p:sp>
+          <p:nvSpPr>
+            <p:cNvPr id="17" name="Freeform 11">
+              <a:extLst>
+                <a:ext uri="{FF2B5EF4-FFF2-40B4-BE49-F238E27FC236}">
+                  <a16:creationId xmlns:a16="http://schemas.microsoft.com/office/drawing/2014/main" id="{0F0AAA08-BD9A-4F88-A60C-F2ECB84CEEFF}"/>
+                </a:ext>
+                <a:ext uri="{C183D7F6-B498-43B3-948B-1728B52AA6E4}">
+                  <adec:decorative xmlns:adec="http://schemas.microsoft.com/office/drawing/2017/decorative" val="1"/>
+                </a:ext>
+              </a:extLst>
+            </p:cNvPr>
+            <p:cNvSpPr/>
+            <p:nvPr>
+              <p:extLst>
+                <p:ext uri="{386F3935-93C4-4BCD-93E2-E3B085C9AB24}">
+                  <p16:designElem xmlns:p16="http://schemas.microsoft.com/office/powerpoint/2015/main" val="1"/>
+                </p:ext>
+              </p:extLst>
+            </p:nvPr>
+          </p:nvSpPr>
+          <p:spPr bwMode="auto">
+            <a:xfrm>
+              <a:off x="1290638" y="14288"/>
+              <a:ext cx="376238" cy="1801813"/>
+            </a:xfrm>
+            <a:custGeom>
+              <a:avLst/>
+              <a:gdLst/>
+              <a:ahLst/>
+              <a:cxnLst/>
+              <a:rect l="0" t="0" r="r" b="b"/>
+              <a:pathLst>
+                <a:path w="237" h="1135">
+                  <a:moveTo>
+                    <a:pt x="222" y="1135"/>
+                  </a:moveTo>
+                  <a:lnTo>
+                    <a:pt x="0" y="620"/>
+                  </a:lnTo>
+                  <a:lnTo>
+                    <a:pt x="0" y="0"/>
+                  </a:lnTo>
+                  <a:lnTo>
+                    <a:pt x="18" y="0"/>
+                  </a:lnTo>
+                  <a:lnTo>
+                    <a:pt x="18" y="617"/>
+                  </a:lnTo>
+                  <a:lnTo>
+                    <a:pt x="237" y="1129"/>
+                  </a:lnTo>
+                  <a:lnTo>
+                    <a:pt x="222" y="1135"/>
+                  </a:lnTo>
+                  <a:close/>
+                </a:path>
+              </a:pathLst>
+            </a:custGeom>
+            <a:grpFill/>
+            <a:ln>
+              <a:noFill/>
+            </a:ln>
+            <a:extLst>
+              <a:ext uri="{91240B29-F687-4f45-9708-019B960494DF}">
+                <a14:hiddenLine xmlns="" xmlns:a16="http://schemas.microsoft.com/office/drawing/2014/main" xmlns:p14="http://schemas.microsoft.com/office/powerpoint/2010/main" xmlns:a14="http://schemas.microsoft.com/office/drawing/2010/main" w="9525">
+                  <a:solidFill>
+                    <a:srgbClr val="000000"/>
+                  </a:solidFill>
+                  <a:round/>
+                  <a:headEnd/>
+                  <a:tailEnd/>
+                </a14:hiddenLine>
+              </a:ext>
+            </a:extLst>
+          </p:spPr>
+          <p:txBody>
+            <a:bodyPr/>
+            <a:lstStyle/>
+            <a:p>
+              <a:endParaRPr lang="en-US"/>
+            </a:p>
+          </p:txBody>
+        </p:sp>
+        <p:sp>
+          <p:nvSpPr>
+            <p:cNvPr id="18" name="Freeform 12">
+              <a:extLst>
+                <a:ext uri="{FF2B5EF4-FFF2-40B4-BE49-F238E27FC236}">
+                  <a16:creationId xmlns:a16="http://schemas.microsoft.com/office/drawing/2014/main" id="{44ACFC6E-01EE-4A01-8C39-0C4BC6B4EFFF}"/>
+                </a:ext>
+                <a:ext uri="{C183D7F6-B498-43B3-948B-1728B52AA6E4}">
+                  <adec:decorative xmlns:adec="http://schemas.microsoft.com/office/drawing/2017/decorative" val="1"/>
+                </a:ext>
+              </a:extLst>
+            </p:cNvPr>
+            <p:cNvSpPr>
+              <a:spLocks noEditPoints="1"/>
+            </p:cNvSpPr>
+            <p:nvPr>
+              <p:extLst>
+                <p:ext uri="{386F3935-93C4-4BCD-93E2-E3B085C9AB24}">
+                  <p16:designElem xmlns:p16="http://schemas.microsoft.com/office/powerpoint/2015/main" val="1"/>
+                </p:ext>
+              </p:extLst>
+            </p:nvPr>
+          </p:nvSpPr>
+          <p:spPr bwMode="auto">
+            <a:xfrm>
+              <a:off x="1600200" y="1801813"/>
+              <a:ext cx="190500" cy="188913"/>
+            </a:xfrm>
+            <a:custGeom>
+              <a:avLst/>
+              <a:gdLst/>
+              <a:ahLst/>
+              <a:cxnLst/>
+              <a:rect l="0" t="0" r="r" b="b"/>
+              <a:pathLst>
+                <a:path w="40" h="40">
+                  <a:moveTo>
+                    <a:pt x="20" y="40"/>
+                  </a:moveTo>
+                  <a:cubicBezTo>
+                    <a:pt x="9" y="40"/>
+                    <a:pt x="0" y="31"/>
+                    <a:pt x="0" y="20"/>
+                  </a:cubicBezTo>
+                  <a:cubicBezTo>
+                    <a:pt x="0" y="9"/>
+                    <a:pt x="9" y="0"/>
+                    <a:pt x="20" y="0"/>
+                  </a:cubicBezTo>
+                  <a:cubicBezTo>
+                    <a:pt x="31" y="0"/>
+                    <a:pt x="40" y="9"/>
+                    <a:pt x="40" y="20"/>
+                  </a:cubicBezTo>
+                  <a:cubicBezTo>
+                    <a:pt x="40" y="31"/>
+                    <a:pt x="31" y="40"/>
+                    <a:pt x="20" y="40"/>
+                  </a:cubicBezTo>
+                  <a:close/>
+                  <a:moveTo>
+                    <a:pt x="20" y="4"/>
+                  </a:moveTo>
+                  <a:cubicBezTo>
+                    <a:pt x="11" y="4"/>
+                    <a:pt x="4" y="11"/>
+                    <a:pt x="4" y="20"/>
+                  </a:cubicBezTo>
+                  <a:cubicBezTo>
+                    <a:pt x="4" y="29"/>
+                    <a:pt x="11" y="36"/>
+                    <a:pt x="20" y="36"/>
+                  </a:cubicBezTo>
+                  <a:cubicBezTo>
+                    <a:pt x="28" y="36"/>
+                    <a:pt x="36" y="29"/>
+                    <a:pt x="36" y="20"/>
+                  </a:cubicBezTo>
+                  <a:cubicBezTo>
+                    <a:pt x="36" y="11"/>
+                    <a:pt x="28" y="4"/>
+                    <a:pt x="20" y="4"/>
+                  </a:cubicBezTo>
+                  <a:close/>
+                </a:path>
+              </a:pathLst>
+            </a:custGeom>
+            <a:grpFill/>
+            <a:ln>
+              <a:noFill/>
+            </a:ln>
+            <a:extLst>
+              <a:ext uri="{91240B29-F687-4f45-9708-019B960494DF}">
+                <a14:hiddenLine xmlns="" xmlns:a16="http://schemas.microsoft.com/office/drawing/2014/main" xmlns:p14="http://schemas.microsoft.com/office/powerpoint/2010/main" xmlns:a14="http://schemas.microsoft.com/office/drawing/2010/main" w="9525">
+                  <a:solidFill>
+                    <a:srgbClr val="000000"/>
+                  </a:solidFill>
+                  <a:round/>
+                  <a:headEnd/>
+                  <a:tailEnd/>
+                </a14:hiddenLine>
+              </a:ext>
+            </a:extLst>
+          </p:spPr>
+          <p:txBody>
+            <a:bodyPr/>
+            <a:lstStyle/>
+            <a:p>
+              <a:endParaRPr lang="en-US"/>
+            </a:p>
+          </p:txBody>
+        </p:sp>
+        <p:sp>
+          <p:nvSpPr>
+            <p:cNvPr id="19" name="Freeform 13">
+              <a:extLst>
+                <a:ext uri="{FF2B5EF4-FFF2-40B4-BE49-F238E27FC236}">
+                  <a16:creationId xmlns:a16="http://schemas.microsoft.com/office/drawing/2014/main" id="{DDE8B861-702A-45C6-A7C5-D20764B55D80}"/>
+                </a:ext>
+                <a:ext uri="{C183D7F6-B498-43B3-948B-1728B52AA6E4}">
+                  <adec:decorative xmlns:adec="http://schemas.microsoft.com/office/drawing/2017/decorative" val="1"/>
+                </a:ext>
+              </a:extLst>
+            </p:cNvPr>
+            <p:cNvSpPr/>
+            <p:nvPr>
+              <p:extLst>
+                <p:ext uri="{386F3935-93C4-4BCD-93E2-E3B085C9AB24}">
+                  <p16:designElem xmlns:p16="http://schemas.microsoft.com/office/powerpoint/2015/main" val="1"/>
+                </p:ext>
+              </p:extLst>
+            </p:nvPr>
+          </p:nvSpPr>
+          <p:spPr bwMode="auto">
+            <a:xfrm>
+              <a:off x="1381125" y="9525"/>
+              <a:ext cx="371475" cy="1425575"/>
+            </a:xfrm>
+            <a:custGeom>
+              <a:avLst/>
+              <a:gdLst/>
+              <a:ahLst/>
+              <a:cxnLst/>
+              <a:rect l="0" t="0" r="r" b="b"/>
+              <a:pathLst>
+                <a:path w="234" h="898">
+                  <a:moveTo>
+                    <a:pt x="219" y="898"/>
+                  </a:moveTo>
+                  <a:lnTo>
+                    <a:pt x="0" y="383"/>
+                  </a:lnTo>
+                  <a:lnTo>
+                    <a:pt x="0" y="0"/>
+                  </a:lnTo>
+                  <a:lnTo>
+                    <a:pt x="15" y="0"/>
+                  </a:lnTo>
+                  <a:lnTo>
+                    <a:pt x="15" y="380"/>
+                  </a:lnTo>
+                  <a:lnTo>
+                    <a:pt x="234" y="892"/>
+                  </a:lnTo>
+                  <a:lnTo>
+                    <a:pt x="219" y="898"/>
+                  </a:lnTo>
+                  <a:close/>
+                </a:path>
+              </a:pathLst>
+            </a:custGeom>
+            <a:grpFill/>
+            <a:ln>
+              <a:noFill/>
+            </a:ln>
+            <a:extLst>
+              <a:ext uri="{91240B29-F687-4f45-9708-019B960494DF}">
+                <a14:hiddenLine xmlns="" xmlns:a16="http://schemas.microsoft.com/office/drawing/2014/main" xmlns:p14="http://schemas.microsoft.com/office/powerpoint/2010/main" xmlns:a14="http://schemas.microsoft.com/office/drawing/2010/main" w="9525">
+                  <a:solidFill>
+                    <a:srgbClr val="000000"/>
+                  </a:solidFill>
+                  <a:round/>
+                  <a:headEnd/>
+                  <a:tailEnd/>
+                </a14:hiddenLine>
+              </a:ext>
+            </a:extLst>
+          </p:spPr>
+          <p:txBody>
+            <a:bodyPr/>
+            <a:lstStyle/>
+            <a:p>
+              <a:endParaRPr lang="en-US"/>
+            </a:p>
+          </p:txBody>
+        </p:sp>
+        <p:sp>
+          <p:nvSpPr>
+            <p:cNvPr id="20" name="Freeform 14">
+              <a:extLst>
+                <a:ext uri="{FF2B5EF4-FFF2-40B4-BE49-F238E27FC236}">
+                  <a16:creationId xmlns:a16="http://schemas.microsoft.com/office/drawing/2014/main" id="{28DFAFFC-4BAC-4606-8F45-47284ED217D4}"/>
+                </a:ext>
+                <a:ext uri="{C183D7F6-B498-43B3-948B-1728B52AA6E4}">
+                  <adec:decorative xmlns:adec="http://schemas.microsoft.com/office/drawing/2017/decorative" val="1"/>
+                </a:ext>
+              </a:extLst>
+            </p:cNvPr>
+            <p:cNvSpPr/>
+            <p:nvPr>
+              <p:extLst>
+                <p:ext uri="{386F3935-93C4-4BCD-93E2-E3B085C9AB24}">
+                  <p16:designElem xmlns:p16="http://schemas.microsoft.com/office/powerpoint/2015/main" val="1"/>
+                </p:ext>
+              </p:extLst>
+            </p:nvPr>
+          </p:nvSpPr>
+          <p:spPr bwMode="auto">
+            <a:xfrm>
+              <a:off x="1643063" y="0"/>
+              <a:ext cx="152400" cy="912813"/>
+            </a:xfrm>
+            <a:custGeom>
+              <a:avLst/>
+              <a:gdLst/>
+              <a:ahLst/>
+              <a:cxnLst/>
+              <a:rect l="0" t="0" r="r" b="b"/>
+              <a:pathLst>
+                <a:path w="96" h="575">
+                  <a:moveTo>
+                    <a:pt x="96" y="575"/>
+                  </a:moveTo>
+                  <a:lnTo>
+                    <a:pt x="78" y="575"/>
+                  </a:lnTo>
+                  <a:lnTo>
+                    <a:pt x="78" y="192"/>
+                  </a:lnTo>
+                  <a:lnTo>
+                    <a:pt x="0" y="6"/>
+                  </a:lnTo>
+                  <a:lnTo>
+                    <a:pt x="15" y="0"/>
+                  </a:lnTo>
+                  <a:lnTo>
+                    <a:pt x="96" y="189"/>
+                  </a:lnTo>
+                  <a:lnTo>
+                    <a:pt x="96" y="575"/>
+                  </a:lnTo>
+                  <a:close/>
+                </a:path>
+              </a:pathLst>
+            </a:custGeom>
+            <a:grpFill/>
+            <a:ln>
+              <a:noFill/>
+            </a:ln>
+            <a:extLst>
+              <a:ext uri="{91240B29-F687-4f45-9708-019B960494DF}">
+                <a14:hiddenLine xmlns="" xmlns:a16="http://schemas.microsoft.com/office/drawing/2014/main" xmlns:p14="http://schemas.microsoft.com/office/powerpoint/2010/main" xmlns:a14="http://schemas.microsoft.com/office/drawing/2010/main" w="9525">
+                  <a:solidFill>
+                    <a:srgbClr val="000000"/>
+                  </a:solidFill>
+                  <a:round/>
+                  <a:headEnd/>
+                  <a:tailEnd/>
+                </a14:hiddenLine>
+              </a:ext>
+            </a:extLst>
+          </p:spPr>
+          <p:txBody>
+            <a:bodyPr/>
+            <a:lstStyle/>
+            <a:p>
+              <a:endParaRPr lang="en-US"/>
+            </a:p>
+          </p:txBody>
+        </p:sp>
+        <p:sp>
+          <p:nvSpPr>
+            <p:cNvPr id="21" name="Freeform 15">
+              <a:extLst>
+                <a:ext uri="{FF2B5EF4-FFF2-40B4-BE49-F238E27FC236}">
+                  <a16:creationId xmlns:a16="http://schemas.microsoft.com/office/drawing/2014/main" id="{B141C913-8CB4-4E5B-B684-BD4036777538}"/>
+                </a:ext>
+                <a:ext uri="{C183D7F6-B498-43B3-948B-1728B52AA6E4}">
+                  <adec:decorative xmlns:adec="http://schemas.microsoft.com/office/drawing/2017/decorative" val="1"/>
+                </a:ext>
+              </a:extLst>
+            </p:cNvPr>
+            <p:cNvSpPr>
+              <a:spLocks noEditPoints="1"/>
+            </p:cNvSpPr>
+            <p:nvPr>
+              <p:extLst>
+                <p:ext uri="{386F3935-93C4-4BCD-93E2-E3B085C9AB24}">
+                  <p16:designElem xmlns:p16="http://schemas.microsoft.com/office/powerpoint/2015/main" val="1"/>
+                </p:ext>
+              </p:extLst>
+            </p:nvPr>
+          </p:nvSpPr>
+          <p:spPr bwMode="auto">
+            <a:xfrm>
+              <a:off x="1685925" y="1420813"/>
+              <a:ext cx="190500" cy="190500"/>
+            </a:xfrm>
+            <a:custGeom>
+              <a:avLst/>
+              <a:gdLst/>
+              <a:ahLst/>
+              <a:cxnLst/>
+              <a:rect l="0" t="0" r="r" b="b"/>
+              <a:pathLst>
+                <a:path w="40" h="40">
+                  <a:moveTo>
+                    <a:pt x="20" y="40"/>
+                  </a:moveTo>
+                  <a:cubicBezTo>
+                    <a:pt x="9" y="40"/>
+                    <a:pt x="0" y="31"/>
+                    <a:pt x="0" y="20"/>
+                  </a:cubicBezTo>
+                  <a:cubicBezTo>
+                    <a:pt x="0" y="9"/>
+                    <a:pt x="9" y="0"/>
+                    <a:pt x="20" y="0"/>
+                  </a:cubicBezTo>
+                  <a:cubicBezTo>
+                    <a:pt x="31" y="0"/>
+                    <a:pt x="40" y="9"/>
+                    <a:pt x="40" y="20"/>
+                  </a:cubicBezTo>
+                  <a:cubicBezTo>
+                    <a:pt x="40" y="31"/>
+                    <a:pt x="31" y="40"/>
+                    <a:pt x="20" y="40"/>
+                  </a:cubicBezTo>
+                  <a:close/>
+                  <a:moveTo>
+                    <a:pt x="20" y="4"/>
+                  </a:moveTo>
+                  <a:cubicBezTo>
+                    <a:pt x="11" y="4"/>
+                    <a:pt x="4" y="11"/>
+                    <a:pt x="4" y="20"/>
+                  </a:cubicBezTo>
+                  <a:cubicBezTo>
+                    <a:pt x="4" y="29"/>
+                    <a:pt x="11" y="36"/>
+                    <a:pt x="20" y="36"/>
+                  </a:cubicBezTo>
+                  <a:cubicBezTo>
+                    <a:pt x="29" y="36"/>
+                    <a:pt x="36" y="29"/>
+                    <a:pt x="36" y="20"/>
+                  </a:cubicBezTo>
+                  <a:cubicBezTo>
+                    <a:pt x="36" y="11"/>
+                    <a:pt x="29" y="4"/>
+                    <a:pt x="20" y="4"/>
+                  </a:cubicBezTo>
+                  <a:close/>
+                </a:path>
+              </a:pathLst>
+            </a:custGeom>
+            <a:grpFill/>
+            <a:ln>
+              <a:noFill/>
+            </a:ln>
+            <a:extLst>
+              <a:ext uri="{91240B29-F687-4f45-9708-019B960494DF}">
+                <a14:hiddenLine xmlns="" xmlns:a16="http://schemas.microsoft.com/office/drawing/2014/main" xmlns:p14="http://schemas.microsoft.com/office/powerpoint/2010/main" xmlns:a14="http://schemas.microsoft.com/office/drawing/2010/main" w="9525">
+                  <a:solidFill>
+                    <a:srgbClr val="000000"/>
+                  </a:solidFill>
+                  <a:round/>
+                  <a:headEnd/>
+                  <a:tailEnd/>
+                </a14:hiddenLine>
+              </a:ext>
+            </a:extLst>
+          </p:spPr>
+          <p:txBody>
+            <a:bodyPr/>
+            <a:lstStyle/>
+            <a:p>
+              <a:endParaRPr lang="en-US"/>
+            </a:p>
+          </p:txBody>
+        </p:sp>
+        <p:sp>
+          <p:nvSpPr>
+            <p:cNvPr id="22" name="Freeform 16">
+              <a:extLst>
+                <a:ext uri="{FF2B5EF4-FFF2-40B4-BE49-F238E27FC236}">
+                  <a16:creationId xmlns:a16="http://schemas.microsoft.com/office/drawing/2014/main" id="{81E80ADE-DC6D-491B-BAC4-A90D44FD458A}"/>
+                </a:ext>
+                <a:ext uri="{C183D7F6-B498-43B3-948B-1728B52AA6E4}">
+                  <adec:decorative xmlns:adec="http://schemas.microsoft.com/office/drawing/2017/decorative" val="1"/>
+                </a:ext>
+              </a:extLst>
+            </p:cNvPr>
+            <p:cNvSpPr>
+              <a:spLocks noEditPoints="1"/>
+            </p:cNvSpPr>
+            <p:nvPr>
+              <p:extLst>
+                <p:ext uri="{386F3935-93C4-4BCD-93E2-E3B085C9AB24}">
+                  <p16:designElem xmlns:p16="http://schemas.microsoft.com/office/powerpoint/2015/main" val="1"/>
+                </p:ext>
+              </p:extLst>
+            </p:nvPr>
+          </p:nvSpPr>
+          <p:spPr bwMode="auto">
+            <a:xfrm>
+              <a:off x="1685925" y="903288"/>
+              <a:ext cx="190500" cy="190500"/>
+            </a:xfrm>
+            <a:custGeom>
+              <a:avLst/>
+              <a:gdLst/>
+              <a:ahLst/>
+              <a:cxnLst/>
+              <a:rect l="0" t="0" r="r" b="b"/>
+              <a:pathLst>
+                <a:path w="40" h="40">
+                  <a:moveTo>
+                    <a:pt x="20" y="40"/>
+                  </a:moveTo>
+                  <a:cubicBezTo>
+                    <a:pt x="9" y="40"/>
+                    <a:pt x="0" y="31"/>
+                    <a:pt x="0" y="20"/>
+                  </a:cubicBezTo>
+                  <a:cubicBezTo>
+                    <a:pt x="0" y="9"/>
+                    <a:pt x="9" y="0"/>
+                    <a:pt x="20" y="0"/>
+                  </a:cubicBezTo>
+                  <a:cubicBezTo>
+                    <a:pt x="31" y="0"/>
+                    <a:pt x="40" y="9"/>
+                    <a:pt x="40" y="20"/>
+                  </a:cubicBezTo>
+                  <a:cubicBezTo>
+                    <a:pt x="40" y="31"/>
+                    <a:pt x="31" y="40"/>
+                    <a:pt x="20" y="40"/>
+                  </a:cubicBezTo>
+                  <a:close/>
+                  <a:moveTo>
+                    <a:pt x="20" y="4"/>
+                  </a:moveTo>
+                  <a:cubicBezTo>
+                    <a:pt x="11" y="4"/>
+                    <a:pt x="4" y="11"/>
+                    <a:pt x="4" y="20"/>
+                  </a:cubicBezTo>
+                  <a:cubicBezTo>
+                    <a:pt x="4" y="29"/>
+                    <a:pt x="11" y="36"/>
+                    <a:pt x="20" y="36"/>
+                  </a:cubicBezTo>
+                  <a:cubicBezTo>
+                    <a:pt x="29" y="36"/>
+                    <a:pt x="36" y="29"/>
+                    <a:pt x="36" y="20"/>
+                  </a:cubicBezTo>
+                  <a:cubicBezTo>
+                    <a:pt x="36" y="11"/>
+                    <a:pt x="29" y="4"/>
+                    <a:pt x="20" y="4"/>
+                  </a:cubicBezTo>
+                  <a:close/>
+                </a:path>
+              </a:pathLst>
+            </a:custGeom>
+            <a:grpFill/>
+            <a:ln>
+              <a:noFill/>
+            </a:ln>
+            <a:extLst>
+              <a:ext uri="{91240B29-F687-4f45-9708-019B960494DF}">
+                <a14:hiddenLine xmlns="" xmlns:a16="http://schemas.microsoft.com/office/drawing/2014/main" xmlns:p14="http://schemas.microsoft.com/office/powerpoint/2010/main" xmlns:a14="http://schemas.microsoft.com/office/drawing/2010/main" w="9525">
+                  <a:solidFill>
+                    <a:srgbClr val="000000"/>
+                  </a:solidFill>
+                  <a:round/>
+                  <a:headEnd/>
+                  <a:tailEnd/>
+                </a14:hiddenLine>
+              </a:ext>
+            </a:extLst>
+          </p:spPr>
+          <p:txBody>
+            <a:bodyPr/>
+            <a:lstStyle/>
+            <a:p>
+              <a:endParaRPr lang="en-US"/>
+            </a:p>
+          </p:txBody>
+        </p:sp>
+        <p:sp>
+          <p:nvSpPr>
+            <p:cNvPr id="23" name="Freeform 17">
+              <a:extLst>
+                <a:ext uri="{FF2B5EF4-FFF2-40B4-BE49-F238E27FC236}">
+                  <a16:creationId xmlns:a16="http://schemas.microsoft.com/office/drawing/2014/main" id="{4A425A61-47B5-41CA-A1D6-21C358B89DB8}"/>
+                </a:ext>
+                <a:ext uri="{C183D7F6-B498-43B3-948B-1728B52AA6E4}">
+                  <adec:decorative xmlns:adec="http://schemas.microsoft.com/office/drawing/2017/decorative" val="1"/>
+                </a:ext>
+              </a:extLst>
+            </p:cNvPr>
+            <p:cNvSpPr/>
+            <p:nvPr>
+              <p:extLst>
+                <p:ext uri="{386F3935-93C4-4BCD-93E2-E3B085C9AB24}">
+                  <p16:designElem xmlns:p16="http://schemas.microsoft.com/office/powerpoint/2015/main" val="1"/>
+                </p:ext>
+              </p:extLst>
+            </p:nvPr>
+          </p:nvSpPr>
+          <p:spPr bwMode="auto">
+            <a:xfrm>
+              <a:off x="1743075" y="4763"/>
+              <a:ext cx="419100" cy="522288"/>
+            </a:xfrm>
+            <a:custGeom>
+              <a:avLst/>
+              <a:gdLst/>
+              <a:ahLst/>
+              <a:cxnLst/>
+              <a:rect l="0" t="0" r="r" b="b"/>
+              <a:pathLst>
+                <a:path w="264" h="329">
+                  <a:moveTo>
+                    <a:pt x="252" y="329"/>
+                  </a:moveTo>
+                  <a:lnTo>
+                    <a:pt x="45" y="120"/>
+                  </a:lnTo>
+                  <a:lnTo>
+                    <a:pt x="0" y="6"/>
+                  </a:lnTo>
+                  <a:lnTo>
+                    <a:pt x="15" y="0"/>
+                  </a:lnTo>
+                  <a:lnTo>
+                    <a:pt x="60" y="111"/>
+                  </a:lnTo>
+                  <a:lnTo>
+                    <a:pt x="264" y="317"/>
+                  </a:lnTo>
+                  <a:lnTo>
+                    <a:pt x="252" y="329"/>
+                  </a:lnTo>
+                  <a:close/>
+                </a:path>
+              </a:pathLst>
+            </a:custGeom>
+            <a:grpFill/>
+            <a:ln>
+              <a:noFill/>
+            </a:ln>
+            <a:extLst>
+              <a:ext uri="{91240B29-F687-4f45-9708-019B960494DF}">
+                <a14:hiddenLine xmlns="" xmlns:a16="http://schemas.microsoft.com/office/drawing/2014/main" xmlns:p14="http://schemas.microsoft.com/office/powerpoint/2010/main" xmlns:a14="http://schemas.microsoft.com/office/drawing/2010/main" w="9525">
+                  <a:solidFill>
+                    <a:srgbClr val="000000"/>
+                  </a:solidFill>
+                  <a:round/>
+                  <a:headEnd/>
+                  <a:tailEnd/>
+                </a14:hiddenLine>
+              </a:ext>
+            </a:extLst>
+          </p:spPr>
+          <p:txBody>
+            <a:bodyPr/>
+            <a:lstStyle/>
+            <a:p>
+              <a:endParaRPr lang="en-US"/>
+            </a:p>
+          </p:txBody>
+        </p:sp>
+        <p:sp>
+          <p:nvSpPr>
+            <p:cNvPr id="24" name="Freeform 18">
+              <a:extLst>
+                <a:ext uri="{FF2B5EF4-FFF2-40B4-BE49-F238E27FC236}">
+                  <a16:creationId xmlns:a16="http://schemas.microsoft.com/office/drawing/2014/main" id="{B44D4532-40A1-4CEB-8A1C-711180D58612}"/>
+                </a:ext>
+                <a:ext uri="{C183D7F6-B498-43B3-948B-1728B52AA6E4}">
+                  <adec:decorative xmlns:adec="http://schemas.microsoft.com/office/drawing/2017/decorative" val="1"/>
+                </a:ext>
+              </a:extLst>
+            </p:cNvPr>
+            <p:cNvSpPr>
+              <a:spLocks noEditPoints="1"/>
+            </p:cNvSpPr>
+            <p:nvPr>
+              <p:extLst>
+                <p:ext uri="{386F3935-93C4-4BCD-93E2-E3B085C9AB24}">
+                  <p16:designElem xmlns:p16="http://schemas.microsoft.com/office/powerpoint/2015/main" val="1"/>
+                </p:ext>
+              </p:extLst>
+            </p:nvPr>
+          </p:nvSpPr>
+          <p:spPr bwMode="auto">
+            <a:xfrm>
+              <a:off x="2119313" y="488950"/>
+              <a:ext cx="161925" cy="147638"/>
+            </a:xfrm>
+            <a:custGeom>
+              <a:avLst/>
+              <a:gdLst/>
+              <a:ahLst/>
+              <a:cxnLst/>
+              <a:rect l="0" t="0" r="r" b="b"/>
+              <a:pathLst>
+                <a:path w="34" h="31">
+                  <a:moveTo>
+                    <a:pt x="17" y="31"/>
+                  </a:moveTo>
+                  <a:cubicBezTo>
+                    <a:pt x="13" y="31"/>
+                    <a:pt x="9" y="30"/>
+                    <a:pt x="6" y="27"/>
+                  </a:cubicBezTo>
+                  <a:cubicBezTo>
+                    <a:pt x="0" y="20"/>
+                    <a:pt x="0" y="10"/>
+                    <a:pt x="6" y="4"/>
+                  </a:cubicBezTo>
+                  <a:cubicBezTo>
+                    <a:pt x="9" y="1"/>
+                    <a:pt x="13" y="0"/>
+                    <a:pt x="17" y="0"/>
+                  </a:cubicBezTo>
+                  <a:cubicBezTo>
+                    <a:pt x="21" y="0"/>
+                    <a:pt x="25" y="1"/>
+                    <a:pt x="28" y="4"/>
+                  </a:cubicBezTo>
+                  <a:cubicBezTo>
+                    <a:pt x="34" y="10"/>
+                    <a:pt x="34" y="20"/>
+                    <a:pt x="28" y="27"/>
+                  </a:cubicBezTo>
+                  <a:cubicBezTo>
+                    <a:pt x="25" y="30"/>
+                    <a:pt x="21" y="31"/>
+                    <a:pt x="17" y="31"/>
+                  </a:cubicBezTo>
+                  <a:close/>
+                  <a:moveTo>
+                    <a:pt x="17" y="4"/>
+                  </a:moveTo>
+                  <a:cubicBezTo>
+                    <a:pt x="14" y="4"/>
+                    <a:pt x="11" y="5"/>
+                    <a:pt x="9" y="7"/>
+                  </a:cubicBezTo>
+                  <a:cubicBezTo>
+                    <a:pt x="4" y="12"/>
+                    <a:pt x="4" y="19"/>
+                    <a:pt x="9" y="24"/>
+                  </a:cubicBezTo>
+                  <a:cubicBezTo>
+                    <a:pt x="11" y="26"/>
+                    <a:pt x="14" y="27"/>
+                    <a:pt x="17" y="27"/>
+                  </a:cubicBezTo>
+                  <a:cubicBezTo>
+                    <a:pt x="20" y="27"/>
+                    <a:pt x="23" y="26"/>
+                    <a:pt x="25" y="24"/>
+                  </a:cubicBezTo>
+                  <a:cubicBezTo>
+                    <a:pt x="30" y="19"/>
+                    <a:pt x="30" y="12"/>
+                    <a:pt x="25" y="7"/>
+                  </a:cubicBezTo>
+                  <a:cubicBezTo>
+                    <a:pt x="23" y="5"/>
+                    <a:pt x="20" y="4"/>
+                    <a:pt x="17" y="4"/>
+                  </a:cubicBezTo>
+                  <a:close/>
+                </a:path>
+              </a:pathLst>
+            </a:custGeom>
+            <a:grpFill/>
+            <a:ln>
+              <a:noFill/>
+            </a:ln>
+            <a:extLst>
+              <a:ext uri="{91240B29-F687-4f45-9708-019B960494DF}">
+                <a14:hiddenLine xmlns="" xmlns:a16="http://schemas.microsoft.com/office/drawing/2014/main" xmlns:p14="http://schemas.microsoft.com/office/powerpoint/2010/main" xmlns:a14="http://schemas.microsoft.com/office/drawing/2010/main" w="9525">
+                  <a:solidFill>
+                    <a:srgbClr val="000000"/>
+                  </a:solidFill>
+                  <a:round/>
+                  <a:headEnd/>
+                  <a:tailEnd/>
+                </a14:hiddenLine>
+              </a:ext>
+            </a:extLst>
+          </p:spPr>
+          <p:txBody>
+            <a:bodyPr/>
+            <a:lstStyle/>
+            <a:p>
+              <a:endParaRPr lang="en-US"/>
+            </a:p>
+          </p:txBody>
+        </p:sp>
+        <p:sp>
+          <p:nvSpPr>
+            <p:cNvPr id="25" name="Freeform 19">
+              <a:extLst>
+                <a:ext uri="{FF2B5EF4-FFF2-40B4-BE49-F238E27FC236}">
+                  <a16:creationId xmlns:a16="http://schemas.microsoft.com/office/drawing/2014/main" id="{31056221-3B7D-4E0B-A366-3E03523EF541}"/>
+                </a:ext>
+                <a:ext uri="{C183D7F6-B498-43B3-948B-1728B52AA6E4}">
+                  <adec:decorative xmlns:adec="http://schemas.microsoft.com/office/drawing/2017/decorative" val="1"/>
+                </a:ext>
+              </a:extLst>
+            </p:cNvPr>
+            <p:cNvSpPr/>
+            <p:nvPr>
+              <p:extLst>
+                <p:ext uri="{386F3935-93C4-4BCD-93E2-E3B085C9AB24}">
+                  <p16:designElem xmlns:p16="http://schemas.microsoft.com/office/powerpoint/2015/main" val="1"/>
+                </p:ext>
+              </p:extLst>
+            </p:nvPr>
+          </p:nvSpPr>
+          <p:spPr bwMode="auto">
+            <a:xfrm>
+              <a:off x="952500" y="4763"/>
+              <a:ext cx="152400" cy="908050"/>
+            </a:xfrm>
+            <a:custGeom>
+              <a:avLst/>
+              <a:gdLst/>
+              <a:ahLst/>
+              <a:cxnLst/>
+              <a:rect l="0" t="0" r="r" b="b"/>
+              <a:pathLst>
+                <a:path w="96" h="572">
+                  <a:moveTo>
+                    <a:pt x="15" y="572"/>
+                  </a:moveTo>
+                  <a:lnTo>
+                    <a:pt x="0" y="572"/>
+                  </a:lnTo>
+                  <a:lnTo>
+                    <a:pt x="0" y="189"/>
+                  </a:lnTo>
+                  <a:lnTo>
+                    <a:pt x="81" y="0"/>
+                  </a:lnTo>
+                  <a:lnTo>
+                    <a:pt x="96" y="6"/>
+                  </a:lnTo>
+                  <a:lnTo>
+                    <a:pt x="15" y="192"/>
+                  </a:lnTo>
+                  <a:lnTo>
+                    <a:pt x="15" y="572"/>
+                  </a:lnTo>
+                  <a:close/>
+                </a:path>
+              </a:pathLst>
+            </a:custGeom>
+            <a:grpFill/>
+            <a:ln>
+              <a:noFill/>
+            </a:ln>
+            <a:extLst>
+              <a:ext uri="{91240B29-F687-4f45-9708-019B960494DF}">
+                <a14:hiddenLine xmlns="" xmlns:a16="http://schemas.microsoft.com/office/drawing/2014/main" xmlns:p14="http://schemas.microsoft.com/office/powerpoint/2010/main" xmlns:a14="http://schemas.microsoft.com/office/drawing/2010/main" w="9525">
+                  <a:solidFill>
+                    <a:srgbClr val="000000"/>
+                  </a:solidFill>
+                  <a:round/>
+                  <a:headEnd/>
+                  <a:tailEnd/>
+                </a14:hiddenLine>
+              </a:ext>
+            </a:extLst>
+          </p:spPr>
+          <p:txBody>
+            <a:bodyPr/>
+            <a:lstStyle/>
+            <a:p>
+              <a:endParaRPr lang="en-US"/>
+            </a:p>
+          </p:txBody>
+        </p:sp>
+        <p:sp>
+          <p:nvSpPr>
+            <p:cNvPr id="26" name="Freeform 20">
+              <a:extLst>
+                <a:ext uri="{FF2B5EF4-FFF2-40B4-BE49-F238E27FC236}">
+                  <a16:creationId xmlns:a16="http://schemas.microsoft.com/office/drawing/2014/main" id="{0F4CE988-2CA1-4875-8419-BC9914E7A90D}"/>
+                </a:ext>
+                <a:ext uri="{C183D7F6-B498-43B3-948B-1728B52AA6E4}">
+                  <adec:decorative xmlns:adec="http://schemas.microsoft.com/office/drawing/2017/decorative" val="1"/>
+                </a:ext>
+              </a:extLst>
+            </p:cNvPr>
+            <p:cNvSpPr>
+              <a:spLocks noEditPoints="1"/>
+            </p:cNvSpPr>
+            <p:nvPr>
+              <p:extLst>
+                <p:ext uri="{386F3935-93C4-4BCD-93E2-E3B085C9AB24}">
+                  <p16:designElem xmlns:p16="http://schemas.microsoft.com/office/powerpoint/2015/main" val="1"/>
+                </p:ext>
+              </p:extLst>
+            </p:nvPr>
+          </p:nvSpPr>
+          <p:spPr bwMode="auto">
+            <a:xfrm>
+              <a:off x="866775" y="903288"/>
+              <a:ext cx="190500" cy="190500"/>
+            </a:xfrm>
+            <a:custGeom>
+              <a:avLst/>
+              <a:gdLst/>
+              <a:ahLst/>
+              <a:cxnLst/>
+              <a:rect l="0" t="0" r="r" b="b"/>
+              <a:pathLst>
+                <a:path w="40" h="40">
+                  <a:moveTo>
+                    <a:pt x="20" y="40"/>
+                  </a:moveTo>
+                  <a:cubicBezTo>
+                    <a:pt x="9" y="40"/>
+                    <a:pt x="0" y="31"/>
+                    <a:pt x="0" y="20"/>
+                  </a:cubicBezTo>
+                  <a:cubicBezTo>
+                    <a:pt x="0" y="9"/>
+                    <a:pt x="9" y="0"/>
+                    <a:pt x="20" y="0"/>
+                  </a:cubicBezTo>
+                  <a:cubicBezTo>
+                    <a:pt x="31" y="0"/>
+                    <a:pt x="40" y="9"/>
+                    <a:pt x="40" y="20"/>
+                  </a:cubicBezTo>
+                  <a:cubicBezTo>
+                    <a:pt x="40" y="31"/>
+                    <a:pt x="31" y="40"/>
+                    <a:pt x="20" y="40"/>
+                  </a:cubicBezTo>
+                  <a:close/>
+                  <a:moveTo>
+                    <a:pt x="20" y="4"/>
+                  </a:moveTo>
+                  <a:cubicBezTo>
+                    <a:pt x="11" y="4"/>
+                    <a:pt x="4" y="12"/>
+                    <a:pt x="4" y="20"/>
+                  </a:cubicBezTo>
+                  <a:cubicBezTo>
+                    <a:pt x="4" y="29"/>
+                    <a:pt x="11" y="36"/>
+                    <a:pt x="20" y="36"/>
+                  </a:cubicBezTo>
+                  <a:cubicBezTo>
+                    <a:pt x="29" y="36"/>
+                    <a:pt x="36" y="29"/>
+                    <a:pt x="36" y="20"/>
+                  </a:cubicBezTo>
+                  <a:cubicBezTo>
+                    <a:pt x="36" y="12"/>
+                    <a:pt x="29" y="4"/>
+                    <a:pt x="20" y="4"/>
+                  </a:cubicBezTo>
+                  <a:close/>
+                </a:path>
+              </a:pathLst>
+            </a:custGeom>
+            <a:grpFill/>
+            <a:ln>
+              <a:noFill/>
+            </a:ln>
+            <a:extLst>
+              <a:ext uri="{91240B29-F687-4f45-9708-019B960494DF}">
+                <a14:hiddenLine xmlns="" xmlns:a16="http://schemas.microsoft.com/office/drawing/2014/main" xmlns:p14="http://schemas.microsoft.com/office/powerpoint/2010/main" xmlns:a14="http://schemas.microsoft.com/office/drawing/2010/main" w="9525">
+                  <a:solidFill>
+                    <a:srgbClr val="000000"/>
+                  </a:solidFill>
+                  <a:round/>
+                  <a:headEnd/>
+                  <a:tailEnd/>
+                </a14:hiddenLine>
+              </a:ext>
+            </a:extLst>
+          </p:spPr>
+          <p:txBody>
+            <a:bodyPr/>
+            <a:lstStyle/>
+            <a:p>
+              <a:endParaRPr lang="en-US"/>
+            </a:p>
+          </p:txBody>
+        </p:sp>
+        <p:sp>
+          <p:nvSpPr>
+            <p:cNvPr id="27" name="Freeform 21">
+              <a:extLst>
+                <a:ext uri="{FF2B5EF4-FFF2-40B4-BE49-F238E27FC236}">
+                  <a16:creationId xmlns:a16="http://schemas.microsoft.com/office/drawing/2014/main" id="{D5E11DED-8522-4839-A2C5-9D64FBB03123}"/>
+                </a:ext>
+                <a:ext uri="{C183D7F6-B498-43B3-948B-1728B52AA6E4}">
+                  <adec:decorative xmlns:adec="http://schemas.microsoft.com/office/drawing/2017/decorative" val="1"/>
+                </a:ext>
+              </a:extLst>
+            </p:cNvPr>
+            <p:cNvSpPr>
+              <a:spLocks noEditPoints="1"/>
+            </p:cNvSpPr>
+            <p:nvPr>
+              <p:extLst>
+                <p:ext uri="{386F3935-93C4-4BCD-93E2-E3B085C9AB24}">
+                  <p16:designElem xmlns:p16="http://schemas.microsoft.com/office/powerpoint/2015/main" val="1"/>
+                </p:ext>
+              </p:extLst>
+            </p:nvPr>
+          </p:nvSpPr>
+          <p:spPr bwMode="auto">
+            <a:xfrm>
+              <a:off x="890588" y="1554163"/>
+              <a:ext cx="190500" cy="190500"/>
+            </a:xfrm>
+            <a:custGeom>
+              <a:avLst/>
+              <a:gdLst/>
+              <a:ahLst/>
+              <a:cxnLst/>
+              <a:rect l="0" t="0" r="r" b="b"/>
+              <a:pathLst>
+                <a:path w="40" h="40">
+                  <a:moveTo>
+                    <a:pt x="20" y="40"/>
+                  </a:moveTo>
+                  <a:cubicBezTo>
+                    <a:pt x="9" y="40"/>
+                    <a:pt x="0" y="31"/>
+                    <a:pt x="0" y="20"/>
+                  </a:cubicBezTo>
+                  <a:cubicBezTo>
+                    <a:pt x="0" y="9"/>
+                    <a:pt x="9" y="0"/>
+                    <a:pt x="20" y="0"/>
+                  </a:cubicBezTo>
+                  <a:cubicBezTo>
+                    <a:pt x="31" y="0"/>
+                    <a:pt x="40" y="9"/>
+                    <a:pt x="40" y="20"/>
+                  </a:cubicBezTo>
+                  <a:cubicBezTo>
+                    <a:pt x="40" y="31"/>
+                    <a:pt x="31" y="40"/>
+                    <a:pt x="20" y="40"/>
+                  </a:cubicBezTo>
+                  <a:close/>
+                  <a:moveTo>
+                    <a:pt x="20" y="4"/>
+                  </a:moveTo>
+                  <a:cubicBezTo>
+                    <a:pt x="11" y="4"/>
+                    <a:pt x="4" y="11"/>
+                    <a:pt x="4" y="20"/>
+                  </a:cubicBezTo>
+                  <a:cubicBezTo>
+                    <a:pt x="4" y="28"/>
+                    <a:pt x="11" y="36"/>
+                    <a:pt x="20" y="36"/>
+                  </a:cubicBezTo>
+                  <a:cubicBezTo>
+                    <a:pt x="29" y="36"/>
+                    <a:pt x="36" y="28"/>
+                    <a:pt x="36" y="20"/>
+                  </a:cubicBezTo>
+                  <a:cubicBezTo>
+                    <a:pt x="36" y="11"/>
+                    <a:pt x="29" y="4"/>
+                    <a:pt x="20" y="4"/>
+                  </a:cubicBezTo>
+                  <a:close/>
+                </a:path>
+              </a:pathLst>
+            </a:custGeom>
+            <a:grpFill/>
+            <a:ln>
+              <a:noFill/>
+            </a:ln>
+            <a:extLst>
+              <a:ext uri="{91240B29-F687-4f45-9708-019B960494DF}">
+                <a14:hiddenLine xmlns="" xmlns:a16="http://schemas.microsoft.com/office/drawing/2014/main" xmlns:p14="http://schemas.microsoft.com/office/powerpoint/2010/main" xmlns:a14="http://schemas.microsoft.com/office/drawing/2010/main" w="9525">
+                  <a:solidFill>
+                    <a:srgbClr val="000000"/>
+                  </a:solidFill>
+                  <a:round/>
+                  <a:headEnd/>
+                  <a:tailEnd/>
+                </a14:hiddenLine>
+              </a:ext>
+            </a:extLst>
+          </p:spPr>
+          <p:txBody>
+            <a:bodyPr/>
+            <a:lstStyle/>
+            <a:p>
+              <a:endParaRPr lang="en-US"/>
+            </a:p>
+          </p:txBody>
+        </p:sp>
+        <p:sp>
+          <p:nvSpPr>
+            <p:cNvPr id="28" name="Freeform 22">
+              <a:extLst>
+                <a:ext uri="{FF2B5EF4-FFF2-40B4-BE49-F238E27FC236}">
+                  <a16:creationId xmlns:a16="http://schemas.microsoft.com/office/drawing/2014/main" id="{3A1EE55C-F160-4A56-ABFE-5EE18FE219C5}"/>
+                </a:ext>
+                <a:ext uri="{C183D7F6-B498-43B3-948B-1728B52AA6E4}">
+                  <adec:decorative xmlns:adec="http://schemas.microsoft.com/office/drawing/2017/decorative" val="1"/>
+                </a:ext>
+              </a:extLst>
+            </p:cNvPr>
+            <p:cNvSpPr/>
+            <p:nvPr>
+              <p:extLst>
+                <p:ext uri="{386F3935-93C4-4BCD-93E2-E3B085C9AB24}">
+                  <p16:designElem xmlns:p16="http://schemas.microsoft.com/office/powerpoint/2015/main" val="1"/>
+                </p:ext>
+              </p:extLst>
+            </p:nvPr>
+          </p:nvSpPr>
+          <p:spPr bwMode="auto">
+            <a:xfrm>
+              <a:off x="738188" y="5622925"/>
+              <a:ext cx="338138" cy="1216025"/>
+            </a:xfrm>
+            <a:custGeom>
+              <a:avLst/>
+              <a:gdLst/>
+              <a:ahLst/>
+              <a:cxnLst/>
+              <a:rect l="0" t="0" r="r" b="b"/>
+              <a:pathLst>
+                <a:path w="213" h="766">
+                  <a:moveTo>
+                    <a:pt x="213" y="766"/>
+                  </a:moveTo>
+                  <a:lnTo>
+                    <a:pt x="195" y="766"/>
+                  </a:lnTo>
+                  <a:lnTo>
+                    <a:pt x="195" y="464"/>
+                  </a:lnTo>
+                  <a:lnTo>
+                    <a:pt x="0" y="6"/>
+                  </a:lnTo>
+                  <a:lnTo>
+                    <a:pt x="12" y="0"/>
+                  </a:lnTo>
+                  <a:lnTo>
+                    <a:pt x="213" y="461"/>
+                  </a:lnTo>
+                  <a:lnTo>
+                    <a:pt x="213" y="766"/>
+                  </a:lnTo>
+                  <a:close/>
+                </a:path>
+              </a:pathLst>
+            </a:custGeom>
+            <a:grpFill/>
+            <a:ln>
+              <a:noFill/>
+            </a:ln>
+            <a:extLst>
+              <a:ext uri="{91240B29-F687-4f45-9708-019B960494DF}">
+                <a14:hiddenLine xmlns="" xmlns:a16="http://schemas.microsoft.com/office/drawing/2014/main" xmlns:p14="http://schemas.microsoft.com/office/powerpoint/2010/main" xmlns:a14="http://schemas.microsoft.com/office/drawing/2010/main" w="9525">
+                  <a:solidFill>
+                    <a:srgbClr val="000000"/>
+                  </a:solidFill>
+                  <a:round/>
+                  <a:headEnd/>
+                  <a:tailEnd/>
+                </a14:hiddenLine>
+              </a:ext>
+            </a:extLst>
+          </p:spPr>
+          <p:txBody>
+            <a:bodyPr/>
+            <a:lstStyle/>
+            <a:p>
+              <a:endParaRPr lang="en-US"/>
+            </a:p>
+          </p:txBody>
+        </p:sp>
+        <p:sp>
+          <p:nvSpPr>
+            <p:cNvPr id="29" name="Freeform 23">
+              <a:extLst>
+                <a:ext uri="{FF2B5EF4-FFF2-40B4-BE49-F238E27FC236}">
+                  <a16:creationId xmlns:a16="http://schemas.microsoft.com/office/drawing/2014/main" id="{519A9CFB-FBD5-4742-9228-976E852BCC6D}"/>
+                </a:ext>
+                <a:ext uri="{C183D7F6-B498-43B3-948B-1728B52AA6E4}">
+                  <adec:decorative xmlns:adec="http://schemas.microsoft.com/office/drawing/2017/decorative" val="1"/>
+                </a:ext>
+              </a:extLst>
+            </p:cNvPr>
+            <p:cNvSpPr>
+              <a:spLocks noEditPoints="1"/>
+            </p:cNvSpPr>
+            <p:nvPr>
+              <p:extLst>
+                <p:ext uri="{386F3935-93C4-4BCD-93E2-E3B085C9AB24}">
+                  <p16:designElem xmlns:p16="http://schemas.microsoft.com/office/powerpoint/2015/main" val="1"/>
+                </p:ext>
+              </p:extLst>
+            </p:nvPr>
+          </p:nvSpPr>
+          <p:spPr bwMode="auto">
+            <a:xfrm>
+              <a:off x="647700" y="5480050"/>
+              <a:ext cx="157163" cy="157163"/>
+            </a:xfrm>
+            <a:custGeom>
+              <a:avLst/>
+              <a:gdLst/>
+              <a:ahLst/>
+              <a:cxnLst/>
+              <a:rect l="0" t="0" r="r" b="b"/>
+              <a:pathLst>
+                <a:path w="33" h="33">
+                  <a:moveTo>
+                    <a:pt x="17" y="33"/>
+                  </a:moveTo>
+                  <a:cubicBezTo>
+                    <a:pt x="8" y="33"/>
+                    <a:pt x="0" y="26"/>
+                    <a:pt x="0" y="17"/>
+                  </a:cubicBezTo>
+                  <a:cubicBezTo>
+                    <a:pt x="0" y="8"/>
+                    <a:pt x="8" y="0"/>
+                    <a:pt x="17" y="0"/>
+                  </a:cubicBezTo>
+                  <a:cubicBezTo>
+                    <a:pt x="26" y="0"/>
+                    <a:pt x="33" y="8"/>
+                    <a:pt x="33" y="17"/>
+                  </a:cubicBezTo>
+                  <a:cubicBezTo>
+                    <a:pt x="33" y="26"/>
+                    <a:pt x="26" y="33"/>
+                    <a:pt x="17" y="33"/>
+                  </a:cubicBezTo>
+                  <a:close/>
+                  <a:moveTo>
+                    <a:pt x="17" y="4"/>
+                  </a:moveTo>
+                  <a:cubicBezTo>
+                    <a:pt x="10" y="4"/>
+                    <a:pt x="4" y="10"/>
+                    <a:pt x="4" y="17"/>
+                  </a:cubicBezTo>
+                  <a:cubicBezTo>
+                    <a:pt x="4" y="24"/>
+                    <a:pt x="10" y="29"/>
+                    <a:pt x="17" y="29"/>
+                  </a:cubicBezTo>
+                  <a:cubicBezTo>
+                    <a:pt x="23" y="29"/>
+                    <a:pt x="29" y="24"/>
+                    <a:pt x="29" y="17"/>
+                  </a:cubicBezTo>
+                  <a:cubicBezTo>
+                    <a:pt x="29" y="10"/>
+                    <a:pt x="23" y="4"/>
+                    <a:pt x="17" y="4"/>
+                  </a:cubicBezTo>
+                  <a:close/>
+                </a:path>
+              </a:pathLst>
+            </a:custGeom>
+            <a:grpFill/>
+            <a:ln>
+              <a:noFill/>
+            </a:ln>
+            <a:extLst>
+              <a:ext uri="{91240B29-F687-4f45-9708-019B960494DF}">
+                <a14:hiddenLine xmlns="" xmlns:a16="http://schemas.microsoft.com/office/drawing/2014/main" xmlns:p14="http://schemas.microsoft.com/office/powerpoint/2010/main" xmlns:a14="http://schemas.microsoft.com/office/drawing/2010/main" w="9525">
+                  <a:solidFill>
+                    <a:srgbClr val="000000"/>
+                  </a:solidFill>
+                  <a:round/>
+                  <a:headEnd/>
+                  <a:tailEnd/>
+                </a14:hiddenLine>
+              </a:ext>
+            </a:extLst>
+          </p:spPr>
+          <p:txBody>
+            <a:bodyPr/>
+            <a:lstStyle/>
+            <a:p>
+              <a:endParaRPr lang="en-US"/>
+            </a:p>
+          </p:txBody>
+        </p:sp>
+        <p:sp>
+          <p:nvSpPr>
+            <p:cNvPr id="30" name="Freeform 24">
+              <a:extLst>
+                <a:ext uri="{FF2B5EF4-FFF2-40B4-BE49-F238E27FC236}">
+                  <a16:creationId xmlns:a16="http://schemas.microsoft.com/office/drawing/2014/main" id="{E808A3F5-6663-49E0-B6BB-AFBBCD50874F}"/>
+                </a:ext>
+                <a:ext uri="{C183D7F6-B498-43B3-948B-1728B52AA6E4}">
+                  <adec:decorative xmlns:adec="http://schemas.microsoft.com/office/drawing/2017/decorative" val="1"/>
+                </a:ext>
+              </a:extLst>
+            </p:cNvPr>
+            <p:cNvSpPr>
+              <a:spLocks noEditPoints="1"/>
+            </p:cNvSpPr>
+            <p:nvPr>
+              <p:extLst>
+                <p:ext uri="{386F3935-93C4-4BCD-93E2-E3B085C9AB24}">
+                  <p16:designElem xmlns:p16="http://schemas.microsoft.com/office/powerpoint/2015/main" val="1"/>
+                </p:ext>
+              </p:extLst>
+            </p:nvPr>
+          </p:nvSpPr>
+          <p:spPr bwMode="auto">
+            <a:xfrm>
+              <a:off x="66675" y="903288"/>
+              <a:ext cx="190500" cy="190500"/>
+            </a:xfrm>
+            <a:custGeom>
+              <a:avLst/>
+              <a:gdLst/>
+              <a:ahLst/>
+              <a:cxnLst/>
+              <a:rect l="0" t="0" r="r" b="b"/>
+              <a:pathLst>
+                <a:path w="40" h="40">
+                  <a:moveTo>
+                    <a:pt x="20" y="40"/>
+                  </a:moveTo>
+                  <a:cubicBezTo>
+                    <a:pt x="9" y="40"/>
+                    <a:pt x="0" y="31"/>
+                    <a:pt x="0" y="20"/>
+                  </a:cubicBezTo>
+                  <a:cubicBezTo>
+                    <a:pt x="0" y="9"/>
+                    <a:pt x="9" y="0"/>
+                    <a:pt x="20" y="0"/>
+                  </a:cubicBezTo>
+                  <a:cubicBezTo>
+                    <a:pt x="32" y="0"/>
+                    <a:pt x="40" y="9"/>
+                    <a:pt x="40" y="20"/>
+                  </a:cubicBezTo>
+                  <a:cubicBezTo>
+                    <a:pt x="40" y="31"/>
+                    <a:pt x="32" y="40"/>
+                    <a:pt x="20" y="40"/>
+                  </a:cubicBezTo>
+                  <a:close/>
+                  <a:moveTo>
+                    <a:pt x="20" y="4"/>
+                  </a:moveTo>
+                  <a:cubicBezTo>
+                    <a:pt x="12" y="4"/>
+                    <a:pt x="4" y="12"/>
+                    <a:pt x="4" y="20"/>
+                  </a:cubicBezTo>
+                  <a:cubicBezTo>
+                    <a:pt x="4" y="29"/>
+                    <a:pt x="12" y="36"/>
+                    <a:pt x="20" y="36"/>
+                  </a:cubicBezTo>
+                  <a:cubicBezTo>
+                    <a:pt x="29" y="36"/>
+                    <a:pt x="36" y="29"/>
+                    <a:pt x="36" y="20"/>
+                  </a:cubicBezTo>
+                  <a:cubicBezTo>
+                    <a:pt x="36" y="12"/>
+                    <a:pt x="29" y="4"/>
+                    <a:pt x="20" y="4"/>
+                  </a:cubicBezTo>
+                  <a:close/>
+                </a:path>
+              </a:pathLst>
+            </a:custGeom>
+            <a:grpFill/>
+            <a:ln>
+              <a:noFill/>
+            </a:ln>
+            <a:extLst>
+              <a:ext uri="{91240B29-F687-4f45-9708-019B960494DF}">
+                <a14:hiddenLine xmlns="" xmlns:a16="http://schemas.microsoft.com/office/drawing/2014/main" xmlns:p14="http://schemas.microsoft.com/office/powerpoint/2010/main" xmlns:a14="http://schemas.microsoft.com/office/drawing/2010/main" w="9525">
+                  <a:solidFill>
+                    <a:srgbClr val="000000"/>
+                  </a:solidFill>
+                  <a:round/>
+                  <a:headEnd/>
+                  <a:tailEnd/>
+                </a14:hiddenLine>
+              </a:ext>
+            </a:extLst>
+          </p:spPr>
+          <p:txBody>
+            <a:bodyPr/>
+            <a:lstStyle/>
+            <a:p>
+              <a:endParaRPr lang="en-US"/>
+            </a:p>
+          </p:txBody>
+        </p:sp>
+        <p:sp>
+          <p:nvSpPr>
+            <p:cNvPr id="31" name="Freeform 25">
+              <a:extLst>
+                <a:ext uri="{FF2B5EF4-FFF2-40B4-BE49-F238E27FC236}">
+                  <a16:creationId xmlns:a16="http://schemas.microsoft.com/office/drawing/2014/main" id="{33A492F1-3A43-47FE-8E3E-4BF2B7864946}"/>
+                </a:ext>
+                <a:ext uri="{C183D7F6-B498-43B3-948B-1728B52AA6E4}">
+                  <adec:decorative xmlns:adec="http://schemas.microsoft.com/office/drawing/2017/decorative" val="1"/>
+                </a:ext>
+              </a:extLst>
+            </p:cNvPr>
+            <p:cNvSpPr/>
+            <p:nvPr>
+              <p:extLst>
+                <p:ext uri="{386F3935-93C4-4BCD-93E2-E3B085C9AB24}">
+                  <p16:designElem xmlns:p16="http://schemas.microsoft.com/office/powerpoint/2015/main" val="1"/>
+                </p:ext>
+              </p:extLst>
+            </p:nvPr>
+          </p:nvSpPr>
+          <p:spPr bwMode="auto">
+            <a:xfrm>
+              <a:off x="0" y="3897313"/>
+              <a:ext cx="133350" cy="266700"/>
+            </a:xfrm>
+            <a:custGeom>
+              <a:avLst/>
+              <a:gdLst/>
+              <a:ahLst/>
+              <a:cxnLst/>
+              <a:rect l="0" t="0" r="r" b="b"/>
+              <a:pathLst>
+                <a:path w="84" h="168">
+                  <a:moveTo>
+                    <a:pt x="69" y="168"/>
+                  </a:moveTo>
+                  <a:lnTo>
+                    <a:pt x="0" y="6"/>
+                  </a:lnTo>
+                  <a:lnTo>
+                    <a:pt x="12" y="0"/>
+                  </a:lnTo>
+                  <a:lnTo>
+                    <a:pt x="84" y="162"/>
+                  </a:lnTo>
+                  <a:lnTo>
+                    <a:pt x="69" y="168"/>
+                  </a:lnTo>
+                  <a:close/>
+                </a:path>
+              </a:pathLst>
+            </a:custGeom>
+            <a:grpFill/>
+            <a:ln>
+              <a:noFill/>
+            </a:ln>
+            <a:extLst>
+              <a:ext uri="{91240B29-F687-4f45-9708-019B960494DF}">
+                <a14:hiddenLine xmlns="" xmlns:a16="http://schemas.microsoft.com/office/drawing/2014/main" xmlns:p14="http://schemas.microsoft.com/office/powerpoint/2010/main" xmlns:a14="http://schemas.microsoft.com/office/drawing/2010/main" w="9525">
+                  <a:solidFill>
+                    <a:srgbClr val="000000"/>
+                  </a:solidFill>
+                  <a:round/>
+                  <a:headEnd/>
+                  <a:tailEnd/>
+                </a14:hiddenLine>
+              </a:ext>
+            </a:extLst>
+          </p:spPr>
+          <p:txBody>
+            <a:bodyPr/>
+            <a:lstStyle/>
+            <a:p>
+              <a:endParaRPr lang="en-US"/>
+            </a:p>
+          </p:txBody>
+        </p:sp>
+        <p:sp>
+          <p:nvSpPr>
+            <p:cNvPr id="32" name="Freeform 26">
+              <a:extLst>
+                <a:ext uri="{FF2B5EF4-FFF2-40B4-BE49-F238E27FC236}">
+                  <a16:creationId xmlns:a16="http://schemas.microsoft.com/office/drawing/2014/main" id="{2ED7DF23-0B1F-4E17-8EC2-1B74D318FB5F}"/>
+                </a:ext>
+                <a:ext uri="{C183D7F6-B498-43B3-948B-1728B52AA6E4}">
+                  <adec:decorative xmlns:adec="http://schemas.microsoft.com/office/drawing/2017/decorative" val="1"/>
+                </a:ext>
+              </a:extLst>
+            </p:cNvPr>
+            <p:cNvSpPr>
+              <a:spLocks noEditPoints="1"/>
+            </p:cNvSpPr>
+            <p:nvPr>
+              <p:extLst>
+                <p:ext uri="{386F3935-93C4-4BCD-93E2-E3B085C9AB24}">
+                  <p16:designElem xmlns:p16="http://schemas.microsoft.com/office/powerpoint/2015/main" val="1"/>
+                </p:ext>
+              </p:extLst>
+            </p:nvPr>
+          </p:nvSpPr>
+          <p:spPr bwMode="auto">
+            <a:xfrm>
+              <a:off x="66675" y="4149725"/>
+              <a:ext cx="190500" cy="188913"/>
+            </a:xfrm>
+            <a:custGeom>
+              <a:avLst/>
+              <a:gdLst/>
+              <a:ahLst/>
+              <a:cxnLst/>
+              <a:rect l="0" t="0" r="r" b="b"/>
+              <a:pathLst>
+                <a:path w="40" h="40">
+                  <a:moveTo>
+                    <a:pt x="20" y="40"/>
+                  </a:moveTo>
+                  <a:cubicBezTo>
+                    <a:pt x="9" y="40"/>
+                    <a:pt x="0" y="31"/>
+                    <a:pt x="0" y="20"/>
+                  </a:cubicBezTo>
+                  <a:cubicBezTo>
+                    <a:pt x="0" y="9"/>
+                    <a:pt x="9" y="0"/>
+                    <a:pt x="20" y="0"/>
+                  </a:cubicBezTo>
+                  <a:cubicBezTo>
+                    <a:pt x="31" y="0"/>
+                    <a:pt x="40" y="9"/>
+                    <a:pt x="40" y="20"/>
+                  </a:cubicBezTo>
+                  <a:cubicBezTo>
+                    <a:pt x="40" y="31"/>
+                    <a:pt x="31" y="40"/>
+                    <a:pt x="20" y="40"/>
+                  </a:cubicBezTo>
+                  <a:close/>
+                  <a:moveTo>
+                    <a:pt x="20" y="4"/>
+                  </a:moveTo>
+                  <a:cubicBezTo>
+                    <a:pt x="11" y="4"/>
+                    <a:pt x="4" y="11"/>
+                    <a:pt x="4" y="20"/>
+                  </a:cubicBezTo>
+                  <a:cubicBezTo>
+                    <a:pt x="4" y="28"/>
+                    <a:pt x="11" y="36"/>
+                    <a:pt x="20" y="36"/>
+                  </a:cubicBezTo>
+                  <a:cubicBezTo>
+                    <a:pt x="29" y="36"/>
+                    <a:pt x="36" y="28"/>
+                    <a:pt x="36" y="20"/>
+                  </a:cubicBezTo>
+                  <a:cubicBezTo>
+                    <a:pt x="36" y="11"/>
+                    <a:pt x="29" y="4"/>
+                    <a:pt x="20" y="4"/>
+                  </a:cubicBezTo>
+                  <a:close/>
+                </a:path>
+              </a:pathLst>
+            </a:custGeom>
+            <a:grpFill/>
+            <a:ln>
+              <a:noFill/>
+            </a:ln>
+            <a:extLst>
+              <a:ext uri="{91240B29-F687-4f45-9708-019B960494DF}">
+                <a14:hiddenLine xmlns="" xmlns:a16="http://schemas.microsoft.com/office/drawing/2014/main" xmlns:p14="http://schemas.microsoft.com/office/powerpoint/2010/main" xmlns:a14="http://schemas.microsoft.com/office/drawing/2010/main" w="9525">
+                  <a:solidFill>
+                    <a:srgbClr val="000000"/>
+                  </a:solidFill>
+                  <a:round/>
+                  <a:headEnd/>
+                  <a:tailEnd/>
+                </a14:hiddenLine>
+              </a:ext>
+            </a:extLst>
+          </p:spPr>
+          <p:txBody>
+            <a:bodyPr/>
+            <a:lstStyle/>
+            <a:p>
+              <a:endParaRPr lang="en-US"/>
+            </a:p>
+          </p:txBody>
+        </p:sp>
+        <p:sp>
+          <p:nvSpPr>
+            <p:cNvPr id="33" name="Freeform 27">
+              <a:extLst>
+                <a:ext uri="{FF2B5EF4-FFF2-40B4-BE49-F238E27FC236}">
+                  <a16:creationId xmlns:a16="http://schemas.microsoft.com/office/drawing/2014/main" id="{FE1204BD-7481-4989-957D-B61AEA964A5D}"/>
+                </a:ext>
+                <a:ext uri="{C183D7F6-B498-43B3-948B-1728B52AA6E4}">
+                  <adec:decorative xmlns:adec="http://schemas.microsoft.com/office/drawing/2017/decorative" val="1"/>
+                </a:ext>
+              </a:extLst>
+            </p:cNvPr>
+            <p:cNvSpPr/>
+            <p:nvPr>
+              <p:extLst>
+                <p:ext uri="{386F3935-93C4-4BCD-93E2-E3B085C9AB24}">
+                  <p16:designElem xmlns:p16="http://schemas.microsoft.com/office/powerpoint/2015/main" val="1"/>
+                </p:ext>
+              </p:extLst>
+            </p:nvPr>
+          </p:nvSpPr>
+          <p:spPr bwMode="auto">
+            <a:xfrm>
+              <a:off x="0" y="1644650"/>
+              <a:ext cx="133350" cy="269875"/>
+            </a:xfrm>
+            <a:custGeom>
+              <a:avLst/>
+              <a:gdLst/>
+              <a:ahLst/>
+              <a:cxnLst/>
+              <a:rect l="0" t="0" r="r" b="b"/>
+              <a:pathLst>
+                <a:path w="84" h="170">
+                  <a:moveTo>
+                    <a:pt x="12" y="170"/>
+                  </a:moveTo>
+                  <a:lnTo>
+                    <a:pt x="0" y="164"/>
+                  </a:lnTo>
+                  <a:lnTo>
+                    <a:pt x="69" y="0"/>
+                  </a:lnTo>
+                  <a:lnTo>
+                    <a:pt x="84" y="6"/>
+                  </a:lnTo>
+                  <a:lnTo>
+                    <a:pt x="12" y="170"/>
+                  </a:lnTo>
+                  <a:close/>
+                </a:path>
+              </a:pathLst>
+            </a:custGeom>
+            <a:grpFill/>
+            <a:ln>
+              <a:noFill/>
+            </a:ln>
+            <a:extLst>
+              <a:ext uri="{91240B29-F687-4f45-9708-019B960494DF}">
+                <a14:hiddenLine xmlns="" xmlns:a16="http://schemas.microsoft.com/office/drawing/2014/main" xmlns:p14="http://schemas.microsoft.com/office/powerpoint/2010/main" xmlns:a14="http://schemas.microsoft.com/office/drawing/2010/main" w="9525">
+                  <a:solidFill>
+                    <a:srgbClr val="000000"/>
+                  </a:solidFill>
+                  <a:round/>
+                  <a:headEnd/>
+                  <a:tailEnd/>
+                </a14:hiddenLine>
+              </a:ext>
+            </a:extLst>
+          </p:spPr>
+          <p:txBody>
+            <a:bodyPr/>
+            <a:lstStyle/>
+            <a:p>
+              <a:endParaRPr lang="en-US"/>
+            </a:p>
+          </p:txBody>
+        </p:sp>
+        <p:sp>
+          <p:nvSpPr>
+            <p:cNvPr id="34" name="Freeform 28">
+              <a:extLst>
+                <a:ext uri="{FF2B5EF4-FFF2-40B4-BE49-F238E27FC236}">
+                  <a16:creationId xmlns:a16="http://schemas.microsoft.com/office/drawing/2014/main" id="{DD3C5673-1874-477D-AE35-B37A91974146}"/>
+                </a:ext>
+                <a:ext uri="{C183D7F6-B498-43B3-948B-1728B52AA6E4}">
+                  <adec:decorative xmlns:adec="http://schemas.microsoft.com/office/drawing/2017/decorative" val="1"/>
+                </a:ext>
+              </a:extLst>
+            </p:cNvPr>
+            <p:cNvSpPr>
+              <a:spLocks noEditPoints="1"/>
+            </p:cNvSpPr>
+            <p:nvPr>
+              <p:extLst>
+                <p:ext uri="{386F3935-93C4-4BCD-93E2-E3B085C9AB24}">
+                  <p16:designElem xmlns:p16="http://schemas.microsoft.com/office/powerpoint/2015/main" val="1"/>
+                </p:ext>
+              </p:extLst>
+            </p:nvPr>
+          </p:nvSpPr>
+          <p:spPr bwMode="auto">
+            <a:xfrm>
+              <a:off x="66675" y="1468438"/>
+              <a:ext cx="190500" cy="190500"/>
+            </a:xfrm>
+            <a:custGeom>
+              <a:avLst/>
+              <a:gdLst/>
+              <a:ahLst/>
+              <a:cxnLst/>
+              <a:rect l="0" t="0" r="r" b="b"/>
+              <a:pathLst>
+                <a:path w="40" h="40">
+                  <a:moveTo>
+                    <a:pt x="20" y="40"/>
+                  </a:moveTo>
+                  <a:cubicBezTo>
+                    <a:pt x="9" y="40"/>
+                    <a:pt x="0" y="31"/>
+                    <a:pt x="0" y="20"/>
+                  </a:cubicBezTo>
+                  <a:cubicBezTo>
+                    <a:pt x="0" y="9"/>
+                    <a:pt x="9" y="0"/>
+                    <a:pt x="20" y="0"/>
+                  </a:cubicBezTo>
+                  <a:cubicBezTo>
+                    <a:pt x="31" y="0"/>
+                    <a:pt x="40" y="9"/>
+                    <a:pt x="40" y="20"/>
+                  </a:cubicBezTo>
+                  <a:cubicBezTo>
+                    <a:pt x="40" y="31"/>
+                    <a:pt x="31" y="40"/>
+                    <a:pt x="20" y="40"/>
+                  </a:cubicBezTo>
+                  <a:close/>
+                  <a:moveTo>
+                    <a:pt x="20" y="4"/>
+                  </a:moveTo>
+                  <a:cubicBezTo>
+                    <a:pt x="11" y="4"/>
+                    <a:pt x="4" y="11"/>
+                    <a:pt x="4" y="20"/>
+                  </a:cubicBezTo>
+                  <a:cubicBezTo>
+                    <a:pt x="4" y="28"/>
+                    <a:pt x="11" y="36"/>
+                    <a:pt x="20" y="36"/>
+                  </a:cubicBezTo>
+                  <a:cubicBezTo>
+                    <a:pt x="29" y="36"/>
+                    <a:pt x="36" y="28"/>
+                    <a:pt x="36" y="20"/>
+                  </a:cubicBezTo>
+                  <a:cubicBezTo>
+                    <a:pt x="36" y="11"/>
+                    <a:pt x="29" y="4"/>
+                    <a:pt x="20" y="4"/>
+                  </a:cubicBezTo>
+                  <a:close/>
+                </a:path>
+              </a:pathLst>
+            </a:custGeom>
+            <a:grpFill/>
+            <a:ln>
+              <a:noFill/>
+            </a:ln>
+            <a:extLst>
+              <a:ext uri="{91240B29-F687-4f45-9708-019B960494DF}">
+                <a14:hiddenLine xmlns="" xmlns:a16="http://schemas.microsoft.com/office/drawing/2014/main" xmlns:p14="http://schemas.microsoft.com/office/powerpoint/2010/main" xmlns:a14="http://schemas.microsoft.com/office/drawing/2010/main" w="9525">
+                  <a:solidFill>
+                    <a:srgbClr val="000000"/>
+                  </a:solidFill>
+                  <a:round/>
+                  <a:headEnd/>
+                  <a:tailEnd/>
+                </a14:hiddenLine>
+              </a:ext>
+            </a:extLst>
+          </p:spPr>
+          <p:txBody>
+            <a:bodyPr/>
+            <a:lstStyle/>
+            <a:p>
+              <a:endParaRPr lang="en-US"/>
+            </a:p>
+          </p:txBody>
+        </p:sp>
+        <p:sp>
+          <p:nvSpPr>
+            <p:cNvPr id="35" name="Freeform 29">
+              <a:extLst>
+                <a:ext uri="{FF2B5EF4-FFF2-40B4-BE49-F238E27FC236}">
+                  <a16:creationId xmlns:a16="http://schemas.microsoft.com/office/drawing/2014/main" id="{DA963A0C-386F-4A9E-89E8-67081094B921}"/>
+                </a:ext>
+                <a:ext uri="{C183D7F6-B498-43B3-948B-1728B52AA6E4}">
+                  <adec:decorative xmlns:adec="http://schemas.microsoft.com/office/drawing/2017/decorative" val="1"/>
+                </a:ext>
+              </a:extLst>
+            </p:cNvPr>
+            <p:cNvSpPr/>
+            <p:nvPr>
+              <p:extLst>
+                <p:ext uri="{386F3935-93C4-4BCD-93E2-E3B085C9AB24}">
+                  <p16:designElem xmlns:p16="http://schemas.microsoft.com/office/powerpoint/2015/main" val="1"/>
+                </p:ext>
+              </p:extLst>
+            </p:nvPr>
+          </p:nvSpPr>
+          <p:spPr bwMode="auto">
+            <a:xfrm>
+              <a:off x="695325" y="4763"/>
+              <a:ext cx="309563" cy="1558925"/>
+            </a:xfrm>
+            <a:custGeom>
+              <a:avLst/>
+              <a:gdLst/>
+              <a:ahLst/>
+              <a:cxnLst/>
+              <a:rect l="0" t="0" r="r" b="b"/>
+              <a:pathLst>
+                <a:path w="195" h="982">
+                  <a:moveTo>
+                    <a:pt x="195" y="982"/>
+                  </a:moveTo>
+                  <a:lnTo>
+                    <a:pt x="177" y="982"/>
+                  </a:lnTo>
+                  <a:lnTo>
+                    <a:pt x="177" y="805"/>
+                  </a:lnTo>
+                  <a:lnTo>
+                    <a:pt x="0" y="629"/>
+                  </a:lnTo>
+                  <a:lnTo>
+                    <a:pt x="0" y="0"/>
+                  </a:lnTo>
+                  <a:lnTo>
+                    <a:pt x="18" y="0"/>
+                  </a:lnTo>
+                  <a:lnTo>
+                    <a:pt x="18" y="623"/>
+                  </a:lnTo>
+                  <a:lnTo>
+                    <a:pt x="195" y="796"/>
+                  </a:lnTo>
+                  <a:lnTo>
+                    <a:pt x="195" y="982"/>
+                  </a:lnTo>
+                  <a:close/>
+                </a:path>
+              </a:pathLst>
+            </a:custGeom>
+            <a:grpFill/>
+            <a:ln>
+              <a:noFill/>
+            </a:ln>
+            <a:extLst>
+              <a:ext uri="{91240B29-F687-4f45-9708-019B960494DF}">
+                <a14:hiddenLine xmlns="" xmlns:a16="http://schemas.microsoft.com/office/drawing/2014/main" xmlns:p14="http://schemas.microsoft.com/office/powerpoint/2010/main" xmlns:a14="http://schemas.microsoft.com/office/drawing/2010/main" w="9525">
+                  <a:solidFill>
+                    <a:srgbClr val="000000"/>
+                  </a:solidFill>
+                  <a:round/>
+                  <a:headEnd/>
+                  <a:tailEnd/>
+                </a14:hiddenLine>
+              </a:ext>
+            </a:extLst>
+          </p:spPr>
+          <p:txBody>
+            <a:bodyPr/>
+            <a:lstStyle/>
+            <a:p>
+              <a:endParaRPr lang="en-US"/>
+            </a:p>
+          </p:txBody>
+        </p:sp>
+        <p:sp>
+          <p:nvSpPr>
+            <p:cNvPr id="36" name="Freeform 30">
+              <a:extLst>
+                <a:ext uri="{FF2B5EF4-FFF2-40B4-BE49-F238E27FC236}">
+                  <a16:creationId xmlns:a16="http://schemas.microsoft.com/office/drawing/2014/main" id="{D527BB52-D4EE-4CAA-A8A0-53A27DC7FFD9}"/>
+                </a:ext>
+                <a:ext uri="{C183D7F6-B498-43B3-948B-1728B52AA6E4}">
+                  <adec:decorative xmlns:adec="http://schemas.microsoft.com/office/drawing/2017/decorative" val="1"/>
+                </a:ext>
+              </a:extLst>
+            </p:cNvPr>
+            <p:cNvSpPr>
+              <a:spLocks noEditPoints="1"/>
+            </p:cNvSpPr>
+            <p:nvPr>
+              <p:extLst>
+                <p:ext uri="{386F3935-93C4-4BCD-93E2-E3B085C9AB24}">
+                  <p16:designElem xmlns:p16="http://schemas.microsoft.com/office/powerpoint/2015/main" val="1"/>
+                </p:ext>
+              </p:extLst>
+            </p:nvPr>
+          </p:nvSpPr>
+          <p:spPr bwMode="auto">
+            <a:xfrm>
+              <a:off x="57150" y="4881563"/>
+              <a:ext cx="190500" cy="188913"/>
+            </a:xfrm>
+            <a:custGeom>
+              <a:avLst/>
+              <a:gdLst/>
+              <a:ahLst/>
+              <a:cxnLst/>
+              <a:rect l="0" t="0" r="r" b="b"/>
+              <a:pathLst>
+                <a:path w="40" h="40">
+                  <a:moveTo>
+                    <a:pt x="20" y="40"/>
+                  </a:moveTo>
+                  <a:cubicBezTo>
+                    <a:pt x="9" y="40"/>
+                    <a:pt x="0" y="31"/>
+                    <a:pt x="0" y="20"/>
+                  </a:cubicBezTo>
+                  <a:cubicBezTo>
+                    <a:pt x="0" y="9"/>
+                    <a:pt x="9" y="0"/>
+                    <a:pt x="20" y="0"/>
+                  </a:cubicBezTo>
+                  <a:cubicBezTo>
+                    <a:pt x="31" y="0"/>
+                    <a:pt x="40" y="9"/>
+                    <a:pt x="40" y="20"/>
+                  </a:cubicBezTo>
+                  <a:cubicBezTo>
+                    <a:pt x="40" y="31"/>
+                    <a:pt x="31" y="40"/>
+                    <a:pt x="20" y="40"/>
+                  </a:cubicBezTo>
+                  <a:close/>
+                  <a:moveTo>
+                    <a:pt x="20" y="4"/>
+                  </a:moveTo>
+                  <a:cubicBezTo>
+                    <a:pt x="12" y="4"/>
+                    <a:pt x="4" y="11"/>
+                    <a:pt x="4" y="20"/>
+                  </a:cubicBezTo>
+                  <a:cubicBezTo>
+                    <a:pt x="4" y="29"/>
+                    <a:pt x="12" y="36"/>
+                    <a:pt x="20" y="36"/>
+                  </a:cubicBezTo>
+                  <a:cubicBezTo>
+                    <a:pt x="29" y="36"/>
+                    <a:pt x="36" y="29"/>
+                    <a:pt x="36" y="20"/>
+                  </a:cubicBezTo>
+                  <a:cubicBezTo>
+                    <a:pt x="36" y="11"/>
+                    <a:pt x="29" y="4"/>
+                    <a:pt x="20" y="4"/>
+                  </a:cubicBezTo>
+                  <a:close/>
+                </a:path>
+              </a:pathLst>
+            </a:custGeom>
+            <a:grpFill/>
+            <a:ln>
+              <a:noFill/>
+            </a:ln>
+            <a:extLst>
+              <a:ext uri="{91240B29-F687-4f45-9708-019B960494DF}">
+                <a14:hiddenLine xmlns="" xmlns:a16="http://schemas.microsoft.com/office/drawing/2014/main" xmlns:p14="http://schemas.microsoft.com/office/powerpoint/2010/main" xmlns:a14="http://schemas.microsoft.com/office/drawing/2010/main" w="9525">
+                  <a:solidFill>
+                    <a:srgbClr val="000000"/>
+                  </a:solidFill>
+                  <a:round/>
+                  <a:headEnd/>
+                  <a:tailEnd/>
+                </a14:hiddenLine>
+              </a:ext>
+            </a:extLst>
+          </p:spPr>
+          <p:txBody>
+            <a:bodyPr/>
+            <a:lstStyle/>
+            <a:p>
+              <a:endParaRPr lang="en-US"/>
+            </a:p>
+          </p:txBody>
+        </p:sp>
+        <p:sp>
+          <p:nvSpPr>
+            <p:cNvPr id="37" name="Freeform 31">
+              <a:extLst>
+                <a:ext uri="{FF2B5EF4-FFF2-40B4-BE49-F238E27FC236}">
+                  <a16:creationId xmlns:a16="http://schemas.microsoft.com/office/drawing/2014/main" id="{2A037511-5E0A-4293-81AB-28C5DC96BF96}"/>
+                </a:ext>
+                <a:ext uri="{C183D7F6-B498-43B3-948B-1728B52AA6E4}">
+                  <adec:decorative xmlns:adec="http://schemas.microsoft.com/office/drawing/2017/decorative" val="1"/>
+                </a:ext>
+              </a:extLst>
+            </p:cNvPr>
+            <p:cNvSpPr/>
+            <p:nvPr>
+              <p:extLst>
+                <p:ext uri="{386F3935-93C4-4BCD-93E2-E3B085C9AB24}">
+                  <p16:designElem xmlns:p16="http://schemas.microsoft.com/office/powerpoint/2015/main" val="1"/>
+                </p:ext>
+              </p:extLst>
+            </p:nvPr>
+          </p:nvSpPr>
+          <p:spPr bwMode="auto">
+            <a:xfrm>
+              <a:off x="138113" y="5060950"/>
+              <a:ext cx="304800" cy="1778000"/>
+            </a:xfrm>
+            <a:custGeom>
+              <a:avLst/>
+              <a:gdLst/>
+              <a:ahLst/>
+              <a:cxnLst/>
+              <a:rect l="0" t="0" r="r" b="b"/>
+              <a:pathLst>
+                <a:path w="192" h="1120">
+                  <a:moveTo>
+                    <a:pt x="192" y="1120"/>
+                  </a:moveTo>
+                  <a:lnTo>
+                    <a:pt x="177" y="1120"/>
+                  </a:lnTo>
+                  <a:lnTo>
+                    <a:pt x="177" y="360"/>
+                  </a:lnTo>
+                  <a:lnTo>
+                    <a:pt x="0" y="183"/>
+                  </a:lnTo>
+                  <a:lnTo>
+                    <a:pt x="0" y="0"/>
+                  </a:lnTo>
+                  <a:lnTo>
+                    <a:pt x="15" y="0"/>
+                  </a:lnTo>
+                  <a:lnTo>
+                    <a:pt x="15" y="177"/>
+                  </a:lnTo>
+                  <a:lnTo>
+                    <a:pt x="192" y="354"/>
+                  </a:lnTo>
+                  <a:lnTo>
+                    <a:pt x="192" y="1120"/>
+                  </a:lnTo>
+                  <a:close/>
+                </a:path>
+              </a:pathLst>
+            </a:custGeom>
+            <a:grpFill/>
+            <a:ln>
+              <a:noFill/>
+            </a:ln>
+            <a:extLst>
+              <a:ext uri="{91240B29-F687-4f45-9708-019B960494DF}">
+                <a14:hiddenLine xmlns="" xmlns:a16="http://schemas.microsoft.com/office/drawing/2014/main" xmlns:p14="http://schemas.microsoft.com/office/powerpoint/2010/main" xmlns:a14="http://schemas.microsoft.com/office/drawing/2010/main" w="9525">
+                  <a:solidFill>
+                    <a:srgbClr val="000000"/>
+                  </a:solidFill>
+                  <a:round/>
+                  <a:headEnd/>
+                  <a:tailEnd/>
+                </a14:hiddenLine>
+              </a:ext>
+            </a:extLst>
+          </p:spPr>
+          <p:txBody>
+            <a:bodyPr/>
+            <a:lstStyle/>
+            <a:p>
+              <a:endParaRPr lang="en-US"/>
+            </a:p>
+          </p:txBody>
+        </p:sp>
+        <p:sp>
+          <p:nvSpPr>
+            <p:cNvPr id="38" name="Freeform 32">
+              <a:extLst>
+                <a:ext uri="{FF2B5EF4-FFF2-40B4-BE49-F238E27FC236}">
+                  <a16:creationId xmlns:a16="http://schemas.microsoft.com/office/drawing/2014/main" id="{42A7FE1C-EF14-483B-B5FC-FDC150282A2E}"/>
+                </a:ext>
+                <a:ext uri="{C183D7F6-B498-43B3-948B-1728B52AA6E4}">
+                  <adec:decorative xmlns:adec="http://schemas.microsoft.com/office/drawing/2017/decorative" val="1"/>
+                </a:ext>
+              </a:extLst>
+            </p:cNvPr>
+            <p:cNvSpPr>
+              <a:spLocks noEditPoints="1"/>
+            </p:cNvSpPr>
+            <p:nvPr>
+              <p:extLst>
+                <p:ext uri="{386F3935-93C4-4BCD-93E2-E3B085C9AB24}">
+                  <p16:designElem xmlns:p16="http://schemas.microsoft.com/office/powerpoint/2015/main" val="1"/>
+                </p:ext>
+              </p:extLst>
+            </p:nvPr>
+          </p:nvSpPr>
+          <p:spPr bwMode="auto">
+            <a:xfrm>
+              <a:off x="561975" y="6430963"/>
+              <a:ext cx="190500" cy="188913"/>
+            </a:xfrm>
+            <a:custGeom>
+              <a:avLst/>
+              <a:gdLst/>
+              <a:ahLst/>
+              <a:cxnLst/>
+              <a:rect l="0" t="0" r="r" b="b"/>
+              <a:pathLst>
+                <a:path w="40" h="40">
+                  <a:moveTo>
+                    <a:pt x="20" y="40"/>
+                  </a:moveTo>
+                  <a:cubicBezTo>
+                    <a:pt x="9" y="40"/>
+                    <a:pt x="0" y="31"/>
+                    <a:pt x="0" y="20"/>
+                  </a:cubicBezTo>
+                  <a:cubicBezTo>
+                    <a:pt x="0" y="9"/>
+                    <a:pt x="9" y="0"/>
+                    <a:pt x="20" y="0"/>
+                  </a:cubicBezTo>
+                  <a:cubicBezTo>
+                    <a:pt x="31" y="0"/>
+                    <a:pt x="40" y="9"/>
+                    <a:pt x="40" y="20"/>
+                  </a:cubicBezTo>
+                  <a:cubicBezTo>
+                    <a:pt x="40" y="31"/>
+                    <a:pt x="31" y="40"/>
+                    <a:pt x="20" y="40"/>
+                  </a:cubicBezTo>
+                  <a:close/>
+                  <a:moveTo>
+                    <a:pt x="20" y="4"/>
+                  </a:moveTo>
+                  <a:cubicBezTo>
+                    <a:pt x="12" y="4"/>
+                    <a:pt x="4" y="11"/>
+                    <a:pt x="4" y="20"/>
+                  </a:cubicBezTo>
+                  <a:cubicBezTo>
+                    <a:pt x="4" y="29"/>
+                    <a:pt x="12" y="36"/>
+                    <a:pt x="20" y="36"/>
+                  </a:cubicBezTo>
+                  <a:cubicBezTo>
+                    <a:pt x="29" y="36"/>
+                    <a:pt x="36" y="29"/>
+                    <a:pt x="36" y="20"/>
+                  </a:cubicBezTo>
+                  <a:cubicBezTo>
+                    <a:pt x="36" y="11"/>
+                    <a:pt x="29" y="4"/>
+                    <a:pt x="20" y="4"/>
+                  </a:cubicBezTo>
+                  <a:close/>
+                </a:path>
+              </a:pathLst>
+            </a:custGeom>
+            <a:grpFill/>
+            <a:ln>
+              <a:noFill/>
+            </a:ln>
+            <a:extLst>
+              <a:ext uri="{91240B29-F687-4f45-9708-019B960494DF}">
+                <a14:hiddenLine xmlns="" xmlns:a16="http://schemas.microsoft.com/office/drawing/2014/main" xmlns:p14="http://schemas.microsoft.com/office/powerpoint/2010/main" xmlns:a14="http://schemas.microsoft.com/office/drawing/2010/main" w="9525">
+                  <a:solidFill>
+                    <a:srgbClr val="000000"/>
+                  </a:solidFill>
+                  <a:round/>
+                  <a:headEnd/>
+                  <a:tailEnd/>
+                </a14:hiddenLine>
+              </a:ext>
+            </a:extLst>
+          </p:spPr>
+          <p:txBody>
+            <a:bodyPr/>
+            <a:lstStyle/>
+            <a:p>
+              <a:endParaRPr lang="en-US"/>
+            </a:p>
+          </p:txBody>
+        </p:sp>
+        <p:sp>
+          <p:nvSpPr>
+            <p:cNvPr id="39" name="Rectangle 33">
+              <a:extLst>
+                <a:ext uri="{FF2B5EF4-FFF2-40B4-BE49-F238E27FC236}">
+                  <a16:creationId xmlns:a16="http://schemas.microsoft.com/office/drawing/2014/main" id="{45A82D49-825B-47BC-8622-A1D54C5C212C}"/>
+                </a:ext>
+                <a:ext uri="{C183D7F6-B498-43B3-948B-1728B52AA6E4}">
+                  <adec:decorative xmlns:adec="http://schemas.microsoft.com/office/drawing/2017/decorative" val="1"/>
+                </a:ext>
+              </a:extLst>
+            </p:cNvPr>
+            <p:cNvSpPr>
+              <a:spLocks noChangeArrowheads="1"/>
+            </p:cNvSpPr>
+            <p:nvPr>
+              <p:extLst>
+                <p:ext uri="{386F3935-93C4-4BCD-93E2-E3B085C9AB24}">
+                  <p16:designElem xmlns:p16="http://schemas.microsoft.com/office/powerpoint/2015/main" val="1"/>
+                </p:ext>
+              </p:extLst>
+            </p:nvPr>
+          </p:nvSpPr>
+          <p:spPr bwMode="auto">
+            <a:xfrm>
+              <a:off x="642938" y="6610350"/>
+              <a:ext cx="23813" cy="242888"/>
+            </a:xfrm>
+            <a:prstGeom prst="rect">
+              <a:avLst/>
+            </a:prstGeom>
+            <a:grpFill/>
+            <a:ln>
+              <a:noFill/>
+            </a:ln>
+            <a:extLst>
+              <a:ext uri="{91240B29-F687-4f45-9708-019B960494DF}">
+                <a14:hiddenLine xmlns="" xmlns:a16="http://schemas.microsoft.com/office/drawing/2014/main" xmlns:p14="http://schemas.microsoft.com/office/powerpoint/2010/main" xmlns:a14="http://schemas.microsoft.com/office/drawing/2010/main" w="9525">
+                  <a:solidFill>
+                    <a:srgbClr val="000000"/>
+                  </a:solidFill>
+                  <a:miter lim="800000"/>
+                  <a:headEnd/>
+                  <a:tailEnd/>
+                </a14:hiddenLine>
+              </a:ext>
+            </a:extLst>
+          </p:spPr>
+          <p:txBody>
+            <a:bodyPr/>
+            <a:lstStyle/>
+            <a:p>
+              <a:endParaRPr lang="en-US"/>
+            </a:p>
+          </p:txBody>
+        </p:sp>
+        <p:sp>
+          <p:nvSpPr>
+            <p:cNvPr id="40" name="Freeform 34">
+              <a:extLst>
+                <a:ext uri="{FF2B5EF4-FFF2-40B4-BE49-F238E27FC236}">
+                  <a16:creationId xmlns:a16="http://schemas.microsoft.com/office/drawing/2014/main" id="{039D74A5-B4AF-4800-B941-E5F8CD44E770}"/>
+                </a:ext>
+                <a:ext uri="{C183D7F6-B498-43B3-948B-1728B52AA6E4}">
+                  <adec:decorative xmlns:adec="http://schemas.microsoft.com/office/drawing/2017/decorative" val="1"/>
+                </a:ext>
+              </a:extLst>
+            </p:cNvPr>
+            <p:cNvSpPr>
+              <a:spLocks noEditPoints="1"/>
+            </p:cNvSpPr>
+            <p:nvPr>
+              <p:extLst>
+                <p:ext uri="{386F3935-93C4-4BCD-93E2-E3B085C9AB24}">
+                  <p16:designElem xmlns:p16="http://schemas.microsoft.com/office/powerpoint/2015/main" val="1"/>
+                </p:ext>
+              </p:extLst>
+            </p:nvPr>
+          </p:nvSpPr>
+          <p:spPr bwMode="auto">
+            <a:xfrm>
+              <a:off x="76200" y="6430963"/>
+              <a:ext cx="190500" cy="188913"/>
+            </a:xfrm>
+            <a:custGeom>
+              <a:avLst/>
+              <a:gdLst/>
+              <a:ahLst/>
+              <a:cxnLst/>
+              <a:rect l="0" t="0" r="r" b="b"/>
+              <a:pathLst>
+                <a:path w="40" h="40">
+                  <a:moveTo>
+                    <a:pt x="20" y="40"/>
+                  </a:moveTo>
+                  <a:cubicBezTo>
+                    <a:pt x="9" y="40"/>
+                    <a:pt x="0" y="31"/>
+                    <a:pt x="0" y="20"/>
+                  </a:cubicBezTo>
+                  <a:cubicBezTo>
+                    <a:pt x="0" y="9"/>
+                    <a:pt x="9" y="0"/>
+                    <a:pt x="20" y="0"/>
+                  </a:cubicBezTo>
+                  <a:cubicBezTo>
+                    <a:pt x="32" y="0"/>
+                    <a:pt x="40" y="9"/>
+                    <a:pt x="40" y="20"/>
+                  </a:cubicBezTo>
+                  <a:cubicBezTo>
+                    <a:pt x="40" y="31"/>
+                    <a:pt x="32" y="40"/>
+                    <a:pt x="20" y="40"/>
+                  </a:cubicBezTo>
+                  <a:close/>
+                  <a:moveTo>
+                    <a:pt x="20" y="4"/>
+                  </a:moveTo>
+                  <a:cubicBezTo>
+                    <a:pt x="12" y="4"/>
+                    <a:pt x="4" y="11"/>
+                    <a:pt x="4" y="20"/>
+                  </a:cubicBezTo>
+                  <a:cubicBezTo>
+                    <a:pt x="4" y="29"/>
+                    <a:pt x="12" y="36"/>
+                    <a:pt x="20" y="36"/>
+                  </a:cubicBezTo>
+                  <a:cubicBezTo>
+                    <a:pt x="29" y="36"/>
+                    <a:pt x="36" y="29"/>
+                    <a:pt x="36" y="20"/>
+                  </a:cubicBezTo>
+                  <a:cubicBezTo>
+                    <a:pt x="36" y="11"/>
+                    <a:pt x="29" y="4"/>
+                    <a:pt x="20" y="4"/>
+                  </a:cubicBezTo>
+                  <a:close/>
+                </a:path>
+              </a:pathLst>
+            </a:custGeom>
+            <a:grpFill/>
+            <a:ln>
+              <a:noFill/>
+            </a:ln>
+            <a:extLst>
+              <a:ext uri="{91240B29-F687-4f45-9708-019B960494DF}">
+                <a14:hiddenLine xmlns="" xmlns:a16="http://schemas.microsoft.com/office/drawing/2014/main" xmlns:p14="http://schemas.microsoft.com/office/powerpoint/2010/main" xmlns:a14="http://schemas.microsoft.com/office/drawing/2010/main" w="9525">
+                  <a:solidFill>
+                    <a:srgbClr val="000000"/>
+                  </a:solidFill>
+                  <a:round/>
+                  <a:headEnd/>
+                  <a:tailEnd/>
+                </a14:hiddenLine>
+              </a:ext>
+            </a:extLst>
+          </p:spPr>
+          <p:txBody>
+            <a:bodyPr/>
+            <a:lstStyle/>
+            <a:p>
+              <a:endParaRPr lang="en-US"/>
+            </a:p>
+          </p:txBody>
+        </p:sp>
+        <p:sp>
+          <p:nvSpPr>
+            <p:cNvPr id="41" name="Freeform 35">
+              <a:extLst>
+                <a:ext uri="{FF2B5EF4-FFF2-40B4-BE49-F238E27FC236}">
+                  <a16:creationId xmlns:a16="http://schemas.microsoft.com/office/drawing/2014/main" id="{70B5D059-1472-474F-BDE6-881B5D1CD7BF}"/>
+                </a:ext>
+                <a:ext uri="{C183D7F6-B498-43B3-948B-1728B52AA6E4}">
+                  <adec:decorative xmlns:adec="http://schemas.microsoft.com/office/drawing/2017/decorative" val="1"/>
+                </a:ext>
+              </a:extLst>
+            </p:cNvPr>
+            <p:cNvSpPr/>
+            <p:nvPr>
+              <p:extLst>
+                <p:ext uri="{386F3935-93C4-4BCD-93E2-E3B085C9AB24}">
+                  <p16:designElem xmlns:p16="http://schemas.microsoft.com/office/powerpoint/2015/main" val="1"/>
+                </p:ext>
+              </p:extLst>
+            </p:nvPr>
+          </p:nvSpPr>
+          <p:spPr bwMode="auto">
+            <a:xfrm>
+              <a:off x="0" y="5978525"/>
+              <a:ext cx="190500" cy="461963"/>
+            </a:xfrm>
+            <a:custGeom>
+              <a:avLst/>
+              <a:gdLst/>
+              <a:ahLst/>
+              <a:cxnLst/>
+              <a:rect l="0" t="0" r="r" b="b"/>
+              <a:pathLst>
+                <a:path w="120" h="291">
+                  <a:moveTo>
+                    <a:pt x="120" y="291"/>
+                  </a:moveTo>
+                  <a:lnTo>
+                    <a:pt x="105" y="291"/>
+                  </a:lnTo>
+                  <a:lnTo>
+                    <a:pt x="105" y="114"/>
+                  </a:lnTo>
+                  <a:lnTo>
+                    <a:pt x="0" y="9"/>
+                  </a:lnTo>
+                  <a:lnTo>
+                    <a:pt x="12" y="0"/>
+                  </a:lnTo>
+                  <a:lnTo>
+                    <a:pt x="120" y="108"/>
+                  </a:lnTo>
+                  <a:lnTo>
+                    <a:pt x="120" y="291"/>
+                  </a:lnTo>
+                  <a:close/>
+                </a:path>
+              </a:pathLst>
+            </a:custGeom>
+            <a:grpFill/>
+            <a:ln>
+              <a:noFill/>
+            </a:ln>
+            <a:extLst>
+              <a:ext uri="{91240B29-F687-4f45-9708-019B960494DF}">
+                <a14:hiddenLine xmlns="" xmlns:a16="http://schemas.microsoft.com/office/drawing/2014/main" xmlns:p14="http://schemas.microsoft.com/office/powerpoint/2010/main" xmlns:a14="http://schemas.microsoft.com/office/drawing/2010/main" w="9525">
+                  <a:solidFill>
+                    <a:srgbClr val="000000"/>
+                  </a:solidFill>
+                  <a:round/>
+                  <a:headEnd/>
+                  <a:tailEnd/>
+                </a14:hiddenLine>
+              </a:ext>
+            </a:extLst>
+          </p:spPr>
+          <p:txBody>
+            <a:bodyPr/>
+            <a:lstStyle/>
+            <a:p>
+              <a:endParaRPr lang="en-US"/>
+            </a:p>
+          </p:txBody>
+        </p:sp>
+        <p:sp>
+          <p:nvSpPr>
+            <p:cNvPr id="42" name="Freeform 36">
+              <a:extLst>
+                <a:ext uri="{FF2B5EF4-FFF2-40B4-BE49-F238E27FC236}">
+                  <a16:creationId xmlns:a16="http://schemas.microsoft.com/office/drawing/2014/main" id="{736D79CC-81E0-4C87-ABAC-58197ADBDA33}"/>
+                </a:ext>
+                <a:ext uri="{C183D7F6-B498-43B3-948B-1728B52AA6E4}">
+                  <adec:decorative xmlns:adec="http://schemas.microsoft.com/office/drawing/2017/decorative" val="1"/>
+                </a:ext>
+              </a:extLst>
+            </p:cNvPr>
+            <p:cNvSpPr/>
+            <p:nvPr>
+              <p:extLst>
+                <p:ext uri="{386F3935-93C4-4BCD-93E2-E3B085C9AB24}">
+                  <p16:designElem xmlns:p16="http://schemas.microsoft.com/office/powerpoint/2015/main" val="1"/>
+                </p:ext>
+              </p:extLst>
+            </p:nvPr>
+          </p:nvSpPr>
+          <p:spPr bwMode="auto">
+            <a:xfrm>
+              <a:off x="1014413" y="1801813"/>
+              <a:ext cx="214313" cy="755650"/>
+            </a:xfrm>
+            <a:custGeom>
+              <a:avLst/>
+              <a:gdLst/>
+              <a:ahLst/>
+              <a:cxnLst/>
+              <a:rect l="0" t="0" r="r" b="b"/>
+              <a:pathLst>
+                <a:path w="135" h="476">
+                  <a:moveTo>
+                    <a:pt x="12" y="476"/>
+                  </a:moveTo>
+                  <a:lnTo>
+                    <a:pt x="0" y="476"/>
+                  </a:lnTo>
+                  <a:lnTo>
+                    <a:pt x="0" y="128"/>
+                  </a:lnTo>
+                  <a:lnTo>
+                    <a:pt x="126" y="0"/>
+                  </a:lnTo>
+                  <a:lnTo>
+                    <a:pt x="135" y="9"/>
+                  </a:lnTo>
+                  <a:lnTo>
+                    <a:pt x="12" y="131"/>
+                  </a:lnTo>
+                  <a:lnTo>
+                    <a:pt x="12" y="476"/>
+                  </a:lnTo>
+                  <a:close/>
+                </a:path>
+              </a:pathLst>
+            </a:custGeom>
+            <a:grpFill/>
+            <a:ln>
+              <a:noFill/>
+            </a:ln>
+            <a:extLst>
+              <a:ext uri="{91240B29-F687-4f45-9708-019B960494DF}">
+                <a14:hiddenLine xmlns="" xmlns:a16="http://schemas.microsoft.com/office/drawing/2014/main" xmlns:p14="http://schemas.microsoft.com/office/powerpoint/2010/main" xmlns:a14="http://schemas.microsoft.com/office/drawing/2010/main" w="9525">
+                  <a:solidFill>
+                    <a:srgbClr val="000000"/>
+                  </a:solidFill>
+                  <a:round/>
+                  <a:headEnd/>
+                  <a:tailEnd/>
+                </a14:hiddenLine>
+              </a:ext>
+            </a:extLst>
+          </p:spPr>
+          <p:txBody>
+            <a:bodyPr/>
+            <a:lstStyle/>
+            <a:p>
+              <a:endParaRPr lang="en-US"/>
+            </a:p>
+          </p:txBody>
+        </p:sp>
+        <p:sp>
+          <p:nvSpPr>
+            <p:cNvPr id="43" name="Freeform 37">
+              <a:extLst>
+                <a:ext uri="{FF2B5EF4-FFF2-40B4-BE49-F238E27FC236}">
+                  <a16:creationId xmlns:a16="http://schemas.microsoft.com/office/drawing/2014/main" id="{7E72BA97-1228-4006-B095-8D9FB45FB141}"/>
+                </a:ext>
+                <a:ext uri="{C183D7F6-B498-43B3-948B-1728B52AA6E4}">
+                  <adec:decorative xmlns:adec="http://schemas.microsoft.com/office/drawing/2017/decorative" val="1"/>
+                </a:ext>
+              </a:extLst>
+            </p:cNvPr>
+            <p:cNvSpPr>
+              <a:spLocks noEditPoints="1"/>
+            </p:cNvSpPr>
+            <p:nvPr>
+              <p:extLst>
+                <p:ext uri="{386F3935-93C4-4BCD-93E2-E3B085C9AB24}">
+                  <p16:designElem xmlns:p16="http://schemas.microsoft.com/office/powerpoint/2015/main" val="1"/>
+                </p:ext>
+              </p:extLst>
+            </p:nvPr>
+          </p:nvSpPr>
+          <p:spPr bwMode="auto">
+            <a:xfrm>
+              <a:off x="938213" y="2547938"/>
+              <a:ext cx="166688" cy="160338"/>
+            </a:xfrm>
+            <a:custGeom>
+              <a:avLst/>
+              <a:gdLst/>
+              <a:ahLst/>
+              <a:cxnLst/>
+              <a:rect l="0" t="0" r="r" b="b"/>
+              <a:pathLst>
+                <a:path w="35" h="34">
+                  <a:moveTo>
+                    <a:pt x="18" y="34"/>
+                  </a:moveTo>
+                  <a:cubicBezTo>
+                    <a:pt x="8" y="34"/>
+                    <a:pt x="0" y="26"/>
+                    <a:pt x="0" y="17"/>
+                  </a:cubicBezTo>
+                  <a:cubicBezTo>
+                    <a:pt x="0" y="7"/>
+                    <a:pt x="8" y="0"/>
+                    <a:pt x="18" y="0"/>
+                  </a:cubicBezTo>
+                  <a:cubicBezTo>
+                    <a:pt x="27" y="0"/>
+                    <a:pt x="35" y="7"/>
+                    <a:pt x="35" y="17"/>
+                  </a:cubicBezTo>
+                  <a:cubicBezTo>
+                    <a:pt x="35" y="26"/>
+                    <a:pt x="27" y="34"/>
+                    <a:pt x="18" y="34"/>
+                  </a:cubicBezTo>
+                  <a:close/>
+                  <a:moveTo>
+                    <a:pt x="18" y="4"/>
+                  </a:moveTo>
+                  <a:cubicBezTo>
+                    <a:pt x="10" y="4"/>
+                    <a:pt x="4" y="10"/>
+                    <a:pt x="4" y="17"/>
+                  </a:cubicBezTo>
+                  <a:cubicBezTo>
+                    <a:pt x="4" y="24"/>
+                    <a:pt x="10" y="30"/>
+                    <a:pt x="18" y="30"/>
+                  </a:cubicBezTo>
+                  <a:cubicBezTo>
+                    <a:pt x="25" y="30"/>
+                    <a:pt x="31" y="24"/>
+                    <a:pt x="31" y="17"/>
+                  </a:cubicBezTo>
+                  <a:cubicBezTo>
+                    <a:pt x="31" y="10"/>
+                    <a:pt x="25" y="4"/>
+                    <a:pt x="18" y="4"/>
+                  </a:cubicBezTo>
+                  <a:close/>
+                </a:path>
+              </a:pathLst>
+            </a:custGeom>
+            <a:grpFill/>
+            <a:ln>
+              <a:noFill/>
+            </a:ln>
+            <a:extLst>
+              <a:ext uri="{91240B29-F687-4f45-9708-019B960494DF}">
+                <a14:hiddenLine xmlns="" xmlns:a16="http://schemas.microsoft.com/office/drawing/2014/main" xmlns:p14="http://schemas.microsoft.com/office/powerpoint/2010/main" xmlns:a14="http://schemas.microsoft.com/office/drawing/2010/main" w="9525">
+                  <a:solidFill>
+                    <a:srgbClr val="000000"/>
+                  </a:solidFill>
+                  <a:round/>
+                  <a:headEnd/>
+                  <a:tailEnd/>
+                </a14:hiddenLine>
+              </a:ext>
+            </a:extLst>
+          </p:spPr>
+          <p:txBody>
+            <a:bodyPr/>
+            <a:lstStyle/>
+            <a:p>
+              <a:endParaRPr lang="en-US"/>
+            </a:p>
+          </p:txBody>
+        </p:sp>
+        <p:sp>
+          <p:nvSpPr>
+            <p:cNvPr id="44" name="Freeform 38">
+              <a:extLst>
+                <a:ext uri="{FF2B5EF4-FFF2-40B4-BE49-F238E27FC236}">
+                  <a16:creationId xmlns:a16="http://schemas.microsoft.com/office/drawing/2014/main" id="{36FA3A99-37FB-4B03-A810-425BC9B37933}"/>
+                </a:ext>
+                <a:ext uri="{C183D7F6-B498-43B3-948B-1728B52AA6E4}">
+                  <adec:decorative xmlns:adec="http://schemas.microsoft.com/office/drawing/2017/decorative" val="1"/>
+                </a:ext>
+              </a:extLst>
+            </p:cNvPr>
+            <p:cNvSpPr/>
+            <p:nvPr>
+              <p:extLst>
+                <p:ext uri="{386F3935-93C4-4BCD-93E2-E3B085C9AB24}">
+                  <p16:designElem xmlns:p16="http://schemas.microsoft.com/office/powerpoint/2015/main" val="1"/>
+                </p:ext>
+              </p:extLst>
+            </p:nvPr>
+          </p:nvSpPr>
+          <p:spPr bwMode="auto">
+            <a:xfrm>
+              <a:off x="595313" y="4763"/>
+              <a:ext cx="638175" cy="4025900"/>
+            </a:xfrm>
+            <a:custGeom>
+              <a:avLst/>
+              <a:gdLst/>
+              <a:ahLst/>
+              <a:cxnLst/>
+              <a:rect l="0" t="0" r="r" b="b"/>
+              <a:pathLst>
+                <a:path w="402" h="2536">
+                  <a:moveTo>
+                    <a:pt x="402" y="2536"/>
+                  </a:moveTo>
+                  <a:lnTo>
+                    <a:pt x="387" y="2536"/>
+                  </a:lnTo>
+                  <a:lnTo>
+                    <a:pt x="387" y="2311"/>
+                  </a:lnTo>
+                  <a:lnTo>
+                    <a:pt x="0" y="1925"/>
+                  </a:lnTo>
+                  <a:lnTo>
+                    <a:pt x="0" y="0"/>
+                  </a:lnTo>
+                  <a:lnTo>
+                    <a:pt x="15" y="0"/>
+                  </a:lnTo>
+                  <a:lnTo>
+                    <a:pt x="15" y="1916"/>
+                  </a:lnTo>
+                  <a:lnTo>
+                    <a:pt x="402" y="2302"/>
+                  </a:lnTo>
+                  <a:lnTo>
+                    <a:pt x="402" y="2536"/>
+                  </a:lnTo>
+                  <a:close/>
+                </a:path>
+              </a:pathLst>
+            </a:custGeom>
+            <a:grpFill/>
+            <a:ln>
+              <a:noFill/>
+            </a:ln>
+            <a:extLst>
+              <a:ext uri="{91240B29-F687-4f45-9708-019B960494DF}">
+                <a14:hiddenLine xmlns="" xmlns:a16="http://schemas.microsoft.com/office/drawing/2014/main" xmlns:p14="http://schemas.microsoft.com/office/powerpoint/2010/main" xmlns:a14="http://schemas.microsoft.com/office/drawing/2010/main" w="9525">
+                  <a:solidFill>
+                    <a:srgbClr val="000000"/>
+                  </a:solidFill>
+                  <a:round/>
+                  <a:headEnd/>
+                  <a:tailEnd/>
+                </a14:hiddenLine>
+              </a:ext>
+            </a:extLst>
+          </p:spPr>
+          <p:txBody>
+            <a:bodyPr/>
+            <a:lstStyle/>
+            <a:p>
+              <a:endParaRPr lang="en-US"/>
+            </a:p>
+          </p:txBody>
+        </p:sp>
+        <p:sp>
+          <p:nvSpPr>
+            <p:cNvPr id="45" name="Freeform 39">
+              <a:extLst>
+                <a:ext uri="{FF2B5EF4-FFF2-40B4-BE49-F238E27FC236}">
+                  <a16:creationId xmlns:a16="http://schemas.microsoft.com/office/drawing/2014/main" id="{2E45B959-2AD5-4FE4-BF6A-4F011011CFAA}"/>
+                </a:ext>
+                <a:ext uri="{C183D7F6-B498-43B3-948B-1728B52AA6E4}">
+                  <adec:decorative xmlns:adec="http://schemas.microsoft.com/office/drawing/2017/decorative" val="1"/>
+                </a:ext>
+              </a:extLst>
+            </p:cNvPr>
+            <p:cNvSpPr/>
+            <p:nvPr>
+              <p:extLst>
+                <p:ext uri="{386F3935-93C4-4BCD-93E2-E3B085C9AB24}">
+                  <p16:designElem xmlns:p16="http://schemas.microsoft.com/office/powerpoint/2015/main" val="1"/>
+                </p:ext>
+              </p:extLst>
+            </p:nvPr>
+          </p:nvSpPr>
+          <p:spPr bwMode="auto">
+            <a:xfrm>
+              <a:off x="1223963" y="1382713"/>
+              <a:ext cx="142875" cy="476250"/>
+            </a:xfrm>
+            <a:custGeom>
+              <a:avLst/>
+              <a:gdLst/>
+              <a:ahLst/>
+              <a:cxnLst/>
+              <a:rect l="0" t="0" r="r" b="b"/>
+              <a:pathLst>
+                <a:path w="90" h="300">
+                  <a:moveTo>
+                    <a:pt x="90" y="300"/>
+                  </a:moveTo>
+                  <a:lnTo>
+                    <a:pt x="78" y="300"/>
+                  </a:lnTo>
+                  <a:lnTo>
+                    <a:pt x="78" y="84"/>
+                  </a:lnTo>
+                  <a:lnTo>
+                    <a:pt x="0" y="9"/>
+                  </a:lnTo>
+                  <a:lnTo>
+                    <a:pt x="9" y="0"/>
+                  </a:lnTo>
+                  <a:lnTo>
+                    <a:pt x="90" y="81"/>
+                  </a:lnTo>
+                  <a:lnTo>
+                    <a:pt x="90" y="300"/>
+                  </a:lnTo>
+                  <a:close/>
+                </a:path>
+              </a:pathLst>
+            </a:custGeom>
+            <a:grpFill/>
+            <a:ln>
+              <a:noFill/>
+            </a:ln>
+            <a:extLst>
+              <a:ext uri="{91240B29-F687-4f45-9708-019B960494DF}">
+                <a14:hiddenLine xmlns="" xmlns:a16="http://schemas.microsoft.com/office/drawing/2014/main" xmlns:p14="http://schemas.microsoft.com/office/powerpoint/2010/main" xmlns:a14="http://schemas.microsoft.com/office/drawing/2010/main" w="9525">
+                  <a:solidFill>
+                    <a:srgbClr val="000000"/>
+                  </a:solidFill>
+                  <a:round/>
+                  <a:headEnd/>
+                  <a:tailEnd/>
+                </a14:hiddenLine>
+              </a:ext>
+            </a:extLst>
+          </p:spPr>
+          <p:txBody>
+            <a:bodyPr/>
+            <a:lstStyle/>
+            <a:p>
+              <a:endParaRPr lang="en-US"/>
+            </a:p>
+          </p:txBody>
+        </p:sp>
+        <p:sp>
+          <p:nvSpPr>
+            <p:cNvPr id="46" name="Freeform 40">
+              <a:extLst>
+                <a:ext uri="{FF2B5EF4-FFF2-40B4-BE49-F238E27FC236}">
+                  <a16:creationId xmlns:a16="http://schemas.microsoft.com/office/drawing/2014/main" id="{CEE29A17-924F-4EED-A18C-E6A0137E52EB}"/>
+                </a:ext>
+                <a:ext uri="{C183D7F6-B498-43B3-948B-1728B52AA6E4}">
+                  <adec:decorative xmlns:adec="http://schemas.microsoft.com/office/drawing/2017/decorative" val="1"/>
+                </a:ext>
+              </a:extLst>
+            </p:cNvPr>
+            <p:cNvSpPr>
+              <a:spLocks noEditPoints="1"/>
+            </p:cNvSpPr>
+            <p:nvPr>
+              <p:extLst>
+                <p:ext uri="{386F3935-93C4-4BCD-93E2-E3B085C9AB24}">
+                  <p16:designElem xmlns:p16="http://schemas.microsoft.com/office/powerpoint/2015/main" val="1"/>
+                </p:ext>
+              </p:extLst>
+            </p:nvPr>
+          </p:nvSpPr>
+          <p:spPr bwMode="auto">
+            <a:xfrm>
+              <a:off x="1300163" y="1849438"/>
+              <a:ext cx="109538" cy="107950"/>
+            </a:xfrm>
+            <a:custGeom>
+              <a:avLst/>
+              <a:gdLst/>
+              <a:ahLst/>
+              <a:cxnLst/>
+              <a:rect l="0" t="0" r="r" b="b"/>
+              <a:pathLst>
+                <a:path w="23" h="23">
+                  <a:moveTo>
+                    <a:pt x="12" y="23"/>
+                  </a:moveTo>
+                  <a:cubicBezTo>
+                    <a:pt x="5" y="23"/>
+                    <a:pt x="0" y="18"/>
+                    <a:pt x="0" y="12"/>
+                  </a:cubicBezTo>
+                  <a:cubicBezTo>
+                    <a:pt x="0" y="5"/>
+                    <a:pt x="5" y="0"/>
+                    <a:pt x="12" y="0"/>
+                  </a:cubicBezTo>
+                  <a:cubicBezTo>
+                    <a:pt x="18" y="0"/>
+                    <a:pt x="23" y="5"/>
+                    <a:pt x="23" y="12"/>
+                  </a:cubicBezTo>
+                  <a:cubicBezTo>
+                    <a:pt x="23" y="18"/>
+                    <a:pt x="18" y="23"/>
+                    <a:pt x="12" y="23"/>
+                  </a:cubicBezTo>
+                  <a:close/>
+                  <a:moveTo>
+                    <a:pt x="12" y="4"/>
+                  </a:moveTo>
+                  <a:cubicBezTo>
+                    <a:pt x="8" y="4"/>
+                    <a:pt x="4" y="8"/>
+                    <a:pt x="4" y="12"/>
+                  </a:cubicBezTo>
+                  <a:cubicBezTo>
+                    <a:pt x="4" y="16"/>
+                    <a:pt x="8" y="19"/>
+                    <a:pt x="12" y="19"/>
+                  </a:cubicBezTo>
+                  <a:cubicBezTo>
+                    <a:pt x="16" y="19"/>
+                    <a:pt x="19" y="16"/>
+                    <a:pt x="19" y="12"/>
+                  </a:cubicBezTo>
+                  <a:cubicBezTo>
+                    <a:pt x="19" y="8"/>
+                    <a:pt x="16" y="4"/>
+                    <a:pt x="12" y="4"/>
+                  </a:cubicBezTo>
+                  <a:close/>
+                </a:path>
+              </a:pathLst>
+            </a:custGeom>
+            <a:grpFill/>
+            <a:ln>
+              <a:noFill/>
+            </a:ln>
+            <a:extLst>
+              <a:ext uri="{91240B29-F687-4f45-9708-019B960494DF}">
+                <a14:hiddenLine xmlns="" xmlns:a16="http://schemas.microsoft.com/office/drawing/2014/main" xmlns:p14="http://schemas.microsoft.com/office/powerpoint/2010/main" xmlns:a14="http://schemas.microsoft.com/office/drawing/2010/main" w="9525">
+                  <a:solidFill>
+                    <a:srgbClr val="000000"/>
+                  </a:solidFill>
+                  <a:round/>
+                  <a:headEnd/>
+                  <a:tailEnd/>
+                </a14:hiddenLine>
+              </a:ext>
+            </a:extLst>
+          </p:spPr>
+          <p:txBody>
+            <a:bodyPr/>
+            <a:lstStyle/>
+            <a:p>
+              <a:endParaRPr lang="en-US"/>
+            </a:p>
+          </p:txBody>
+        </p:sp>
+        <p:sp>
+          <p:nvSpPr>
+            <p:cNvPr id="47" name="Freeform 41">
+              <a:extLst>
+                <a:ext uri="{FF2B5EF4-FFF2-40B4-BE49-F238E27FC236}">
+                  <a16:creationId xmlns:a16="http://schemas.microsoft.com/office/drawing/2014/main" id="{EFB8BDF1-3A59-4EE5-BFAB-4F4B301E37C9}"/>
+                </a:ext>
+                <a:ext uri="{C183D7F6-B498-43B3-948B-1728B52AA6E4}">
+                  <adec:decorative xmlns:adec="http://schemas.microsoft.com/office/drawing/2017/decorative" val="1"/>
+                </a:ext>
+              </a:extLst>
+            </p:cNvPr>
+            <p:cNvSpPr/>
+            <p:nvPr>
+              <p:extLst>
+                <p:ext uri="{386F3935-93C4-4BCD-93E2-E3B085C9AB24}">
+                  <p16:designElem xmlns:p16="http://schemas.microsoft.com/office/powerpoint/2015/main" val="1"/>
+                </p:ext>
+              </p:extLst>
+            </p:nvPr>
+          </p:nvSpPr>
+          <p:spPr bwMode="auto">
+            <a:xfrm>
+              <a:off x="280988" y="3417888"/>
+              <a:ext cx="142875" cy="474663"/>
+            </a:xfrm>
+            <a:custGeom>
+              <a:avLst/>
+              <a:gdLst/>
+              <a:ahLst/>
+              <a:cxnLst/>
+              <a:rect l="0" t="0" r="r" b="b"/>
+              <a:pathLst>
+                <a:path w="90" h="299">
+                  <a:moveTo>
+                    <a:pt x="12" y="299"/>
+                  </a:moveTo>
+                  <a:lnTo>
+                    <a:pt x="0" y="299"/>
+                  </a:lnTo>
+                  <a:lnTo>
+                    <a:pt x="0" y="80"/>
+                  </a:lnTo>
+                  <a:lnTo>
+                    <a:pt x="81" y="0"/>
+                  </a:lnTo>
+                  <a:lnTo>
+                    <a:pt x="90" y="8"/>
+                  </a:lnTo>
+                  <a:lnTo>
+                    <a:pt x="12" y="83"/>
+                  </a:lnTo>
+                  <a:lnTo>
+                    <a:pt x="12" y="299"/>
+                  </a:lnTo>
+                  <a:close/>
+                </a:path>
+              </a:pathLst>
+            </a:custGeom>
+            <a:grpFill/>
+            <a:ln>
+              <a:noFill/>
+            </a:ln>
+            <a:extLst>
+              <a:ext uri="{91240B29-F687-4f45-9708-019B960494DF}">
+                <a14:hiddenLine xmlns="" xmlns:a16="http://schemas.microsoft.com/office/drawing/2014/main" xmlns:p14="http://schemas.microsoft.com/office/powerpoint/2010/main" xmlns:a14="http://schemas.microsoft.com/office/drawing/2010/main" w="9525">
+                  <a:solidFill>
+                    <a:srgbClr val="000000"/>
+                  </a:solidFill>
+                  <a:round/>
+                  <a:headEnd/>
+                  <a:tailEnd/>
+                </a14:hiddenLine>
+              </a:ext>
+            </a:extLst>
+          </p:spPr>
+          <p:txBody>
+            <a:bodyPr/>
+            <a:lstStyle/>
+            <a:p>
+              <a:endParaRPr lang="en-US"/>
+            </a:p>
+          </p:txBody>
+        </p:sp>
+        <p:sp>
+          <p:nvSpPr>
+            <p:cNvPr id="48" name="Freeform 42">
+              <a:extLst>
+                <a:ext uri="{FF2B5EF4-FFF2-40B4-BE49-F238E27FC236}">
+                  <a16:creationId xmlns:a16="http://schemas.microsoft.com/office/drawing/2014/main" id="{8F94E417-93B4-4071-A6D1-AE66CA68229A}"/>
+                </a:ext>
+                <a:ext uri="{C183D7F6-B498-43B3-948B-1728B52AA6E4}">
+                  <adec:decorative xmlns:adec="http://schemas.microsoft.com/office/drawing/2017/decorative" val="1"/>
+                </a:ext>
+              </a:extLst>
+            </p:cNvPr>
+            <p:cNvSpPr>
+              <a:spLocks noEditPoints="1"/>
+            </p:cNvSpPr>
+            <p:nvPr>
+              <p:extLst>
+                <p:ext uri="{386F3935-93C4-4BCD-93E2-E3B085C9AB24}">
+                  <p16:designElem xmlns:p16="http://schemas.microsoft.com/office/powerpoint/2015/main" val="1"/>
+                </p:ext>
+              </p:extLst>
+            </p:nvPr>
+          </p:nvSpPr>
+          <p:spPr bwMode="auto">
+            <a:xfrm>
+              <a:off x="238125" y="3883025"/>
+              <a:ext cx="109538" cy="109538"/>
+            </a:xfrm>
+            <a:custGeom>
+              <a:avLst/>
+              <a:gdLst/>
+              <a:ahLst/>
+              <a:cxnLst/>
+              <a:rect l="0" t="0" r="r" b="b"/>
+              <a:pathLst>
+                <a:path w="23" h="23">
+                  <a:moveTo>
+                    <a:pt x="11" y="23"/>
+                  </a:moveTo>
+                  <a:cubicBezTo>
+                    <a:pt x="5" y="23"/>
+                    <a:pt x="0" y="18"/>
+                    <a:pt x="0" y="12"/>
+                  </a:cubicBezTo>
+                  <a:cubicBezTo>
+                    <a:pt x="0" y="5"/>
+                    <a:pt x="5" y="0"/>
+                    <a:pt x="11" y="0"/>
+                  </a:cubicBezTo>
+                  <a:cubicBezTo>
+                    <a:pt x="17" y="0"/>
+                    <a:pt x="23" y="5"/>
+                    <a:pt x="23" y="12"/>
+                  </a:cubicBezTo>
+                  <a:cubicBezTo>
+                    <a:pt x="23" y="18"/>
+                    <a:pt x="17" y="23"/>
+                    <a:pt x="11" y="23"/>
+                  </a:cubicBezTo>
+                  <a:close/>
+                  <a:moveTo>
+                    <a:pt x="11" y="4"/>
+                  </a:moveTo>
+                  <a:cubicBezTo>
+                    <a:pt x="7" y="4"/>
+                    <a:pt x="4" y="8"/>
+                    <a:pt x="4" y="12"/>
+                  </a:cubicBezTo>
+                  <a:cubicBezTo>
+                    <a:pt x="4" y="16"/>
+                    <a:pt x="7" y="19"/>
+                    <a:pt x="11" y="19"/>
+                  </a:cubicBezTo>
+                  <a:cubicBezTo>
+                    <a:pt x="15" y="19"/>
+                    <a:pt x="19" y="16"/>
+                    <a:pt x="19" y="12"/>
+                  </a:cubicBezTo>
+                  <a:cubicBezTo>
+                    <a:pt x="19" y="8"/>
+                    <a:pt x="15" y="4"/>
+                    <a:pt x="11" y="4"/>
+                  </a:cubicBezTo>
+                  <a:close/>
+                </a:path>
+              </a:pathLst>
+            </a:custGeom>
+            <a:grpFill/>
+            <a:ln>
+              <a:noFill/>
+            </a:ln>
+            <a:extLst>
+              <a:ext uri="{91240B29-F687-4f45-9708-019B960494DF}">
+                <a14:hiddenLine xmlns="" xmlns:a16="http://schemas.microsoft.com/office/drawing/2014/main" xmlns:p14="http://schemas.microsoft.com/office/powerpoint/2010/main" xmlns:a14="http://schemas.microsoft.com/office/drawing/2010/main" w="9525">
+                  <a:solidFill>
+                    <a:srgbClr val="000000"/>
+                  </a:solidFill>
+                  <a:round/>
+                  <a:headEnd/>
+                  <a:tailEnd/>
+                </a14:hiddenLine>
+              </a:ext>
+            </a:extLst>
+          </p:spPr>
+          <p:txBody>
+            <a:bodyPr/>
+            <a:lstStyle/>
+            <a:p>
+              <a:endParaRPr lang="en-US"/>
+            </a:p>
+          </p:txBody>
+        </p:sp>
+        <p:sp>
+          <p:nvSpPr>
+            <p:cNvPr id="49" name="Freeform 43">
+              <a:extLst>
+                <a:ext uri="{FF2B5EF4-FFF2-40B4-BE49-F238E27FC236}">
+                  <a16:creationId xmlns:a16="http://schemas.microsoft.com/office/drawing/2014/main" id="{A18F44A8-385D-4EB4-A013-7EB252A275EE}"/>
+                </a:ext>
+                <a:ext uri="{C183D7F6-B498-43B3-948B-1728B52AA6E4}">
+                  <adec:decorative xmlns:adec="http://schemas.microsoft.com/office/drawing/2017/decorative" val="1"/>
+                </a:ext>
+              </a:extLst>
+            </p:cNvPr>
+            <p:cNvSpPr/>
+            <p:nvPr>
+              <p:extLst>
+                <p:ext uri="{386F3935-93C4-4BCD-93E2-E3B085C9AB24}">
+                  <p16:designElem xmlns:p16="http://schemas.microsoft.com/office/powerpoint/2015/main" val="1"/>
+                </p:ext>
+              </p:extLst>
+            </p:nvPr>
+          </p:nvSpPr>
+          <p:spPr bwMode="auto">
+            <a:xfrm>
+              <a:off x="4763" y="2166938"/>
+              <a:ext cx="114300" cy="452438"/>
+            </a:xfrm>
+            <a:custGeom>
+              <a:avLst/>
+              <a:gdLst/>
+              <a:ahLst/>
+              <a:cxnLst/>
+              <a:rect l="0" t="0" r="r" b="b"/>
+              <a:pathLst>
+                <a:path w="72" h="285">
+                  <a:moveTo>
+                    <a:pt x="6" y="285"/>
+                  </a:moveTo>
+                  <a:lnTo>
+                    <a:pt x="0" y="276"/>
+                  </a:lnTo>
+                  <a:lnTo>
+                    <a:pt x="60" y="216"/>
+                  </a:lnTo>
+                  <a:lnTo>
+                    <a:pt x="60" y="0"/>
+                  </a:lnTo>
+                  <a:lnTo>
+                    <a:pt x="72" y="0"/>
+                  </a:lnTo>
+                  <a:lnTo>
+                    <a:pt x="72" y="222"/>
+                  </a:lnTo>
+                  <a:lnTo>
+                    <a:pt x="6" y="285"/>
+                  </a:lnTo>
+                  <a:close/>
+                </a:path>
+              </a:pathLst>
+            </a:custGeom>
+            <a:grpFill/>
+            <a:ln>
+              <a:noFill/>
+            </a:ln>
+            <a:extLst>
+              <a:ext uri="{91240B29-F687-4f45-9708-019B960494DF}">
+                <a14:hiddenLine xmlns="" xmlns:a16="http://schemas.microsoft.com/office/drawing/2014/main" xmlns:p14="http://schemas.microsoft.com/office/powerpoint/2010/main" xmlns:a14="http://schemas.microsoft.com/office/drawing/2010/main" w="9525">
+                  <a:solidFill>
+                    <a:srgbClr val="000000"/>
+                  </a:solidFill>
+                  <a:round/>
+                  <a:headEnd/>
+                  <a:tailEnd/>
+                </a14:hiddenLine>
+              </a:ext>
+            </a:extLst>
+          </p:spPr>
+          <p:txBody>
+            <a:bodyPr/>
+            <a:lstStyle/>
+            <a:p>
+              <a:endParaRPr lang="en-US"/>
+            </a:p>
+          </p:txBody>
+        </p:sp>
+        <p:sp>
+          <p:nvSpPr>
+            <p:cNvPr id="50" name="Freeform 44">
+              <a:extLst>
+                <a:ext uri="{FF2B5EF4-FFF2-40B4-BE49-F238E27FC236}">
+                  <a16:creationId xmlns:a16="http://schemas.microsoft.com/office/drawing/2014/main" id="{B25FB320-9784-4EA9-B1AE-3BF9106E6E0B}"/>
+                </a:ext>
+                <a:ext uri="{C183D7F6-B498-43B3-948B-1728B52AA6E4}">
+                  <adec:decorative xmlns:adec="http://schemas.microsoft.com/office/drawing/2017/decorative" val="1"/>
+                </a:ext>
+              </a:extLst>
+            </p:cNvPr>
+            <p:cNvSpPr>
+              <a:spLocks noEditPoints="1"/>
+            </p:cNvSpPr>
+            <p:nvPr>
+              <p:extLst>
+                <p:ext uri="{386F3935-93C4-4BCD-93E2-E3B085C9AB24}">
+                  <p16:designElem xmlns:p16="http://schemas.microsoft.com/office/powerpoint/2015/main" val="1"/>
+                </p:ext>
+              </p:extLst>
+            </p:nvPr>
+          </p:nvSpPr>
+          <p:spPr bwMode="auto">
+            <a:xfrm>
+              <a:off x="52388" y="2066925"/>
+              <a:ext cx="109538" cy="109538"/>
+            </a:xfrm>
+            <a:custGeom>
+              <a:avLst/>
+              <a:gdLst/>
+              <a:ahLst/>
+              <a:cxnLst/>
+              <a:rect l="0" t="0" r="r" b="b"/>
+              <a:pathLst>
+                <a:path w="23" h="23">
+                  <a:moveTo>
+                    <a:pt x="12" y="23"/>
+                  </a:moveTo>
+                  <a:cubicBezTo>
+                    <a:pt x="5" y="23"/>
+                    <a:pt x="0" y="18"/>
+                    <a:pt x="0" y="12"/>
+                  </a:cubicBezTo>
+                  <a:cubicBezTo>
+                    <a:pt x="0" y="5"/>
+                    <a:pt x="5" y="0"/>
+                    <a:pt x="12" y="0"/>
+                  </a:cubicBezTo>
+                  <a:cubicBezTo>
+                    <a:pt x="18" y="0"/>
+                    <a:pt x="23" y="5"/>
+                    <a:pt x="23" y="12"/>
+                  </a:cubicBezTo>
+                  <a:cubicBezTo>
+                    <a:pt x="23" y="18"/>
+                    <a:pt x="18" y="23"/>
+                    <a:pt x="12" y="23"/>
+                  </a:cubicBezTo>
+                  <a:close/>
+                  <a:moveTo>
+                    <a:pt x="12" y="4"/>
+                  </a:moveTo>
+                  <a:cubicBezTo>
+                    <a:pt x="8" y="4"/>
+                    <a:pt x="4" y="8"/>
+                    <a:pt x="4" y="12"/>
+                  </a:cubicBezTo>
+                  <a:cubicBezTo>
+                    <a:pt x="4" y="16"/>
+                    <a:pt x="8" y="19"/>
+                    <a:pt x="12" y="19"/>
+                  </a:cubicBezTo>
+                  <a:cubicBezTo>
+                    <a:pt x="16" y="19"/>
+                    <a:pt x="19" y="16"/>
+                    <a:pt x="19" y="12"/>
+                  </a:cubicBezTo>
+                  <a:cubicBezTo>
+                    <a:pt x="19" y="8"/>
+                    <a:pt x="16" y="4"/>
+                    <a:pt x="12" y="4"/>
+                  </a:cubicBezTo>
+                  <a:close/>
+                </a:path>
+              </a:pathLst>
+            </a:custGeom>
+            <a:grpFill/>
+            <a:ln>
+              <a:noFill/>
+            </a:ln>
+            <a:extLst>
+              <a:ext uri="{91240B29-F687-4f45-9708-019B960494DF}">
+                <a14:hiddenLine xmlns="" xmlns:a16="http://schemas.microsoft.com/office/drawing/2014/main" xmlns:p14="http://schemas.microsoft.com/office/powerpoint/2010/main" xmlns:a14="http://schemas.microsoft.com/office/drawing/2010/main" w="9525">
+                  <a:solidFill>
+                    <a:srgbClr val="000000"/>
+                  </a:solidFill>
+                  <a:round/>
+                  <a:headEnd/>
+                  <a:tailEnd/>
+                </a14:hiddenLine>
+              </a:ext>
+            </a:extLst>
+          </p:spPr>
+          <p:txBody>
+            <a:bodyPr/>
+            <a:lstStyle/>
+            <a:p>
+              <a:endParaRPr lang="en-US"/>
+            </a:p>
+          </p:txBody>
+        </p:sp>
+        <p:sp>
+          <p:nvSpPr>
+            <p:cNvPr id="51" name="Rectangle 45">
+              <a:extLst>
+                <a:ext uri="{FF2B5EF4-FFF2-40B4-BE49-F238E27FC236}">
+                  <a16:creationId xmlns:a16="http://schemas.microsoft.com/office/drawing/2014/main" id="{C9EB05E6-5BE4-4EE1-9F0C-E8B57B362EA3}"/>
+                </a:ext>
+                <a:ext uri="{C183D7F6-B498-43B3-948B-1728B52AA6E4}">
+                  <adec:decorative xmlns:adec="http://schemas.microsoft.com/office/drawing/2017/decorative" val="1"/>
+                </a:ext>
+              </a:extLst>
+            </p:cNvPr>
+            <p:cNvSpPr>
+              <a:spLocks noChangeArrowheads="1"/>
+            </p:cNvSpPr>
+            <p:nvPr>
+              <p:extLst>
+                <p:ext uri="{386F3935-93C4-4BCD-93E2-E3B085C9AB24}">
+                  <p16:designElem xmlns:p16="http://schemas.microsoft.com/office/powerpoint/2015/main" val="1"/>
+                </p:ext>
+              </p:extLst>
+            </p:nvPr>
+          </p:nvSpPr>
+          <p:spPr bwMode="auto">
+            <a:xfrm>
+              <a:off x="1228725" y="4662488"/>
+              <a:ext cx="23813" cy="2181225"/>
+            </a:xfrm>
+            <a:prstGeom prst="rect">
+              <a:avLst/>
+            </a:prstGeom>
+            <a:grpFill/>
+            <a:ln>
+              <a:noFill/>
+            </a:ln>
+            <a:extLst>
+              <a:ext uri="{91240B29-F687-4f45-9708-019B960494DF}">
+                <a14:hiddenLine xmlns="" xmlns:a16="http://schemas.microsoft.com/office/drawing/2014/main" xmlns:p14="http://schemas.microsoft.com/office/powerpoint/2010/main" xmlns:a14="http://schemas.microsoft.com/office/drawing/2010/main" w="9525">
+                  <a:solidFill>
+                    <a:srgbClr val="000000"/>
+                  </a:solidFill>
+                  <a:miter lim="800000"/>
+                  <a:headEnd/>
+                  <a:tailEnd/>
+                </a14:hiddenLine>
+              </a:ext>
+            </a:extLst>
+          </p:spPr>
+          <p:txBody>
+            <a:bodyPr/>
+            <a:lstStyle/>
+            <a:p>
+              <a:endParaRPr lang="en-US"/>
+            </a:p>
+          </p:txBody>
+        </p:sp>
+        <p:sp>
+          <p:nvSpPr>
+            <p:cNvPr id="52" name="Freeform 46">
+              <a:extLst>
+                <a:ext uri="{FF2B5EF4-FFF2-40B4-BE49-F238E27FC236}">
+                  <a16:creationId xmlns:a16="http://schemas.microsoft.com/office/drawing/2014/main" id="{C66CAA98-15DB-4EF7-B2CA-54F523A3C765}"/>
+                </a:ext>
+                <a:ext uri="{C183D7F6-B498-43B3-948B-1728B52AA6E4}">
+                  <adec:decorative xmlns:adec="http://schemas.microsoft.com/office/drawing/2017/decorative" val="1"/>
+                </a:ext>
+              </a:extLst>
+            </p:cNvPr>
+            <p:cNvSpPr/>
+            <p:nvPr>
+              <p:extLst>
+                <p:ext uri="{386F3935-93C4-4BCD-93E2-E3B085C9AB24}">
+                  <p16:designElem xmlns:p16="http://schemas.microsoft.com/office/powerpoint/2015/main" val="1"/>
+                </p:ext>
+              </p:extLst>
+            </p:nvPr>
+          </p:nvSpPr>
+          <p:spPr bwMode="auto">
+            <a:xfrm>
+              <a:off x="1319213" y="5041900"/>
+              <a:ext cx="371475" cy="1801813"/>
+            </a:xfrm>
+            <a:custGeom>
+              <a:avLst/>
+              <a:gdLst/>
+              <a:ahLst/>
+              <a:cxnLst/>
+              <a:rect l="0" t="0" r="r" b="b"/>
+              <a:pathLst>
+                <a:path w="234" h="1135">
+                  <a:moveTo>
+                    <a:pt x="15" y="1135"/>
+                  </a:moveTo>
+                  <a:lnTo>
+                    <a:pt x="0" y="1135"/>
+                  </a:lnTo>
+                  <a:lnTo>
+                    <a:pt x="0" y="515"/>
+                  </a:lnTo>
+                  <a:lnTo>
+                    <a:pt x="0" y="512"/>
+                  </a:lnTo>
+                  <a:lnTo>
+                    <a:pt x="219" y="0"/>
+                  </a:lnTo>
+                  <a:lnTo>
+                    <a:pt x="234" y="6"/>
+                  </a:lnTo>
+                  <a:lnTo>
+                    <a:pt x="15" y="518"/>
+                  </a:lnTo>
+                  <a:lnTo>
+                    <a:pt x="15" y="1135"/>
+                  </a:lnTo>
+                  <a:close/>
+                </a:path>
+              </a:pathLst>
+            </a:custGeom>
+            <a:grpFill/>
+            <a:ln>
+              <a:noFill/>
+            </a:ln>
+            <a:extLst>
+              <a:ext uri="{91240B29-F687-4f45-9708-019B960494DF}">
+                <a14:hiddenLine xmlns="" xmlns:a16="http://schemas.microsoft.com/office/drawing/2014/main" xmlns:p14="http://schemas.microsoft.com/office/powerpoint/2010/main" xmlns:a14="http://schemas.microsoft.com/office/drawing/2010/main" w="9525">
+                  <a:solidFill>
+                    <a:srgbClr val="000000"/>
+                  </a:solidFill>
+                  <a:round/>
+                  <a:headEnd/>
+                  <a:tailEnd/>
+                </a14:hiddenLine>
+              </a:ext>
+            </a:extLst>
+          </p:spPr>
+          <p:txBody>
+            <a:bodyPr/>
+            <a:lstStyle/>
+            <a:p>
+              <a:endParaRPr lang="en-US"/>
+            </a:p>
+          </p:txBody>
+        </p:sp>
+        <p:sp>
+          <p:nvSpPr>
+            <p:cNvPr id="53" name="Freeform 47">
+              <a:extLst>
+                <a:ext uri="{FF2B5EF4-FFF2-40B4-BE49-F238E27FC236}">
+                  <a16:creationId xmlns:a16="http://schemas.microsoft.com/office/drawing/2014/main" id="{7A30C330-EB27-4D08-82D2-7311A8505E77}"/>
+                </a:ext>
+                <a:ext uri="{C183D7F6-B498-43B3-948B-1728B52AA6E4}">
+                  <adec:decorative xmlns:adec="http://schemas.microsoft.com/office/drawing/2017/decorative" val="1"/>
+                </a:ext>
+              </a:extLst>
+            </p:cNvPr>
+            <p:cNvSpPr>
+              <a:spLocks noEditPoints="1"/>
+            </p:cNvSpPr>
+            <p:nvPr>
+              <p:extLst>
+                <p:ext uri="{386F3935-93C4-4BCD-93E2-E3B085C9AB24}">
+                  <p16:designElem xmlns:p16="http://schemas.microsoft.com/office/powerpoint/2015/main" val="1"/>
+                </p:ext>
+              </p:extLst>
+            </p:nvPr>
+          </p:nvSpPr>
+          <p:spPr bwMode="auto">
+            <a:xfrm>
+              <a:off x="1147763" y="4481513"/>
+              <a:ext cx="190500" cy="190500"/>
+            </a:xfrm>
+            <a:custGeom>
+              <a:avLst/>
+              <a:gdLst/>
+              <a:ahLst/>
+              <a:cxnLst/>
+              <a:rect l="0" t="0" r="r" b="b"/>
+              <a:pathLst>
+                <a:path w="40" h="40">
+                  <a:moveTo>
+                    <a:pt x="20" y="40"/>
+                  </a:moveTo>
+                  <a:cubicBezTo>
+                    <a:pt x="9" y="40"/>
+                    <a:pt x="0" y="31"/>
+                    <a:pt x="0" y="20"/>
+                  </a:cubicBezTo>
+                  <a:cubicBezTo>
+                    <a:pt x="0" y="9"/>
+                    <a:pt x="9" y="0"/>
+                    <a:pt x="20" y="0"/>
+                  </a:cubicBezTo>
+                  <a:cubicBezTo>
+                    <a:pt x="31" y="0"/>
+                    <a:pt x="40" y="9"/>
+                    <a:pt x="40" y="20"/>
+                  </a:cubicBezTo>
+                  <a:cubicBezTo>
+                    <a:pt x="40" y="31"/>
+                    <a:pt x="31" y="40"/>
+                    <a:pt x="20" y="40"/>
+                  </a:cubicBezTo>
+                  <a:close/>
+                  <a:moveTo>
+                    <a:pt x="20" y="4"/>
+                  </a:moveTo>
+                  <a:cubicBezTo>
+                    <a:pt x="11" y="4"/>
+                    <a:pt x="4" y="11"/>
+                    <a:pt x="4" y="20"/>
+                  </a:cubicBezTo>
+                  <a:cubicBezTo>
+                    <a:pt x="4" y="29"/>
+                    <a:pt x="11" y="36"/>
+                    <a:pt x="20" y="36"/>
+                  </a:cubicBezTo>
+                  <a:cubicBezTo>
+                    <a:pt x="28" y="36"/>
+                    <a:pt x="36" y="29"/>
+                    <a:pt x="36" y="20"/>
+                  </a:cubicBezTo>
+                  <a:cubicBezTo>
+                    <a:pt x="36" y="11"/>
+                    <a:pt x="28" y="4"/>
+                    <a:pt x="20" y="4"/>
+                  </a:cubicBezTo>
+                  <a:close/>
+                </a:path>
+              </a:pathLst>
+            </a:custGeom>
+            <a:grpFill/>
+            <a:ln>
+              <a:noFill/>
+            </a:ln>
+            <a:extLst>
+              <a:ext uri="{91240B29-F687-4f45-9708-019B960494DF}">
+                <a14:hiddenLine xmlns="" xmlns:a16="http://schemas.microsoft.com/office/drawing/2014/main" xmlns:p14="http://schemas.microsoft.com/office/powerpoint/2010/main" xmlns:a14="http://schemas.microsoft.com/office/drawing/2010/main" w="9525">
+                  <a:solidFill>
+                    <a:srgbClr val="000000"/>
+                  </a:solidFill>
+                  <a:round/>
+                  <a:headEnd/>
+                  <a:tailEnd/>
+                </a14:hiddenLine>
+              </a:ext>
+            </a:extLst>
+          </p:spPr>
+          <p:txBody>
+            <a:bodyPr/>
+            <a:lstStyle/>
+            <a:p>
+              <a:endParaRPr lang="en-US"/>
+            </a:p>
+          </p:txBody>
+        </p:sp>
+        <p:sp>
+          <p:nvSpPr>
+            <p:cNvPr id="54" name="Freeform 48">
+              <a:extLst>
+                <a:ext uri="{FF2B5EF4-FFF2-40B4-BE49-F238E27FC236}">
+                  <a16:creationId xmlns:a16="http://schemas.microsoft.com/office/drawing/2014/main" id="{285C54D0-DCD8-43CD-AE6D-00487565C14E}"/>
+                </a:ext>
+                <a:ext uri="{C183D7F6-B498-43B3-948B-1728B52AA6E4}">
+                  <adec:decorative xmlns:adec="http://schemas.microsoft.com/office/drawing/2017/decorative" val="1"/>
+                </a:ext>
+              </a:extLst>
+            </p:cNvPr>
+            <p:cNvSpPr/>
+            <p:nvPr>
+              <p:extLst>
+                <p:ext uri="{386F3935-93C4-4BCD-93E2-E3B085C9AB24}">
+                  <p16:designElem xmlns:p16="http://schemas.microsoft.com/office/powerpoint/2015/main" val="1"/>
+                </p:ext>
+              </p:extLst>
+            </p:nvPr>
+          </p:nvSpPr>
+          <p:spPr bwMode="auto">
+            <a:xfrm>
+              <a:off x="819150" y="3983038"/>
+              <a:ext cx="347663" cy="2860675"/>
+            </a:xfrm>
+            <a:custGeom>
+              <a:avLst/>
+              <a:gdLst/>
+              <a:ahLst/>
+              <a:cxnLst/>
+              <a:rect l="0" t="0" r="r" b="b"/>
+              <a:pathLst>
+                <a:path w="219" h="1802">
+                  <a:moveTo>
+                    <a:pt x="219" y="1802"/>
+                  </a:moveTo>
+                  <a:lnTo>
+                    <a:pt x="201" y="1802"/>
+                  </a:lnTo>
+                  <a:lnTo>
+                    <a:pt x="201" y="1185"/>
+                  </a:lnTo>
+                  <a:lnTo>
+                    <a:pt x="0" y="3"/>
+                  </a:lnTo>
+                  <a:lnTo>
+                    <a:pt x="15" y="0"/>
+                  </a:lnTo>
+                  <a:lnTo>
+                    <a:pt x="219" y="1185"/>
+                  </a:lnTo>
+                  <a:lnTo>
+                    <a:pt x="219" y="1802"/>
+                  </a:lnTo>
+                  <a:close/>
+                </a:path>
+              </a:pathLst>
+            </a:custGeom>
+            <a:grpFill/>
+            <a:ln>
+              <a:noFill/>
+            </a:ln>
+            <a:extLst>
+              <a:ext uri="{91240B29-F687-4f45-9708-019B960494DF}">
+                <a14:hiddenLine xmlns="" xmlns:a16="http://schemas.microsoft.com/office/drawing/2014/main" xmlns:p14="http://schemas.microsoft.com/office/powerpoint/2010/main" xmlns:a14="http://schemas.microsoft.com/office/drawing/2010/main" w="9525">
+                  <a:solidFill>
+                    <a:srgbClr val="000000"/>
+                  </a:solidFill>
+                  <a:round/>
+                  <a:headEnd/>
+                  <a:tailEnd/>
+                </a14:hiddenLine>
+              </a:ext>
+            </a:extLst>
+          </p:spPr>
+          <p:txBody>
+            <a:bodyPr/>
+            <a:lstStyle/>
+            <a:p>
+              <a:endParaRPr lang="en-US"/>
+            </a:p>
+          </p:txBody>
+        </p:sp>
+        <p:sp>
+          <p:nvSpPr>
+            <p:cNvPr id="55" name="Freeform 49">
+              <a:extLst>
+                <a:ext uri="{FF2B5EF4-FFF2-40B4-BE49-F238E27FC236}">
+                  <a16:creationId xmlns:a16="http://schemas.microsoft.com/office/drawing/2014/main" id="{BC525C34-0A4A-4042-8FA3-F64A115AEA65}"/>
+                </a:ext>
+                <a:ext uri="{C183D7F6-B498-43B3-948B-1728B52AA6E4}">
+                  <adec:decorative xmlns:adec="http://schemas.microsoft.com/office/drawing/2017/decorative" val="1"/>
+                </a:ext>
+              </a:extLst>
+            </p:cNvPr>
+            <p:cNvSpPr>
+              <a:spLocks noEditPoints="1"/>
+            </p:cNvSpPr>
+            <p:nvPr>
+              <p:extLst>
+                <p:ext uri="{386F3935-93C4-4BCD-93E2-E3B085C9AB24}">
+                  <p16:designElem xmlns:p16="http://schemas.microsoft.com/office/powerpoint/2015/main" val="1"/>
+                </p:ext>
+              </p:extLst>
+            </p:nvPr>
+          </p:nvSpPr>
+          <p:spPr bwMode="auto">
+            <a:xfrm>
+              <a:off x="728663" y="3806825"/>
+              <a:ext cx="190500" cy="190500"/>
+            </a:xfrm>
+            <a:custGeom>
+              <a:avLst/>
+              <a:gdLst/>
+              <a:ahLst/>
+              <a:cxnLst/>
+              <a:rect l="0" t="0" r="r" b="b"/>
+              <a:pathLst>
+                <a:path w="40" h="40">
+                  <a:moveTo>
+                    <a:pt x="20" y="40"/>
+                  </a:moveTo>
+                  <a:cubicBezTo>
+                    <a:pt x="9" y="40"/>
+                    <a:pt x="0" y="31"/>
+                    <a:pt x="0" y="20"/>
+                  </a:cubicBezTo>
+                  <a:cubicBezTo>
+                    <a:pt x="0" y="9"/>
+                    <a:pt x="9" y="0"/>
+                    <a:pt x="20" y="0"/>
+                  </a:cubicBezTo>
+                  <a:cubicBezTo>
+                    <a:pt x="31" y="0"/>
+                    <a:pt x="40" y="9"/>
+                    <a:pt x="40" y="20"/>
+                  </a:cubicBezTo>
+                  <a:cubicBezTo>
+                    <a:pt x="40" y="31"/>
+                    <a:pt x="31" y="40"/>
+                    <a:pt x="20" y="40"/>
+                  </a:cubicBezTo>
+                  <a:close/>
+                  <a:moveTo>
+                    <a:pt x="20" y="4"/>
+                  </a:moveTo>
+                  <a:cubicBezTo>
+                    <a:pt x="11" y="4"/>
+                    <a:pt x="4" y="11"/>
+                    <a:pt x="4" y="20"/>
+                  </a:cubicBezTo>
+                  <a:cubicBezTo>
+                    <a:pt x="4" y="28"/>
+                    <a:pt x="11" y="36"/>
+                    <a:pt x="20" y="36"/>
+                  </a:cubicBezTo>
+                  <a:cubicBezTo>
+                    <a:pt x="29" y="36"/>
+                    <a:pt x="36" y="28"/>
+                    <a:pt x="36" y="20"/>
+                  </a:cubicBezTo>
+                  <a:cubicBezTo>
+                    <a:pt x="36" y="11"/>
+                    <a:pt x="29" y="4"/>
+                    <a:pt x="20" y="4"/>
+                  </a:cubicBezTo>
+                  <a:close/>
+                </a:path>
+              </a:pathLst>
+            </a:custGeom>
+            <a:grpFill/>
+            <a:ln>
+              <a:noFill/>
+            </a:ln>
+            <a:extLst>
+              <a:ext uri="{91240B29-F687-4f45-9708-019B960494DF}">
+                <a14:hiddenLine xmlns="" xmlns:a16="http://schemas.microsoft.com/office/drawing/2014/main" xmlns:p14="http://schemas.microsoft.com/office/powerpoint/2010/main" xmlns:a14="http://schemas.microsoft.com/office/drawing/2010/main" w="9525">
+                  <a:solidFill>
+                    <a:srgbClr val="000000"/>
+                  </a:solidFill>
+                  <a:round/>
+                  <a:headEnd/>
+                  <a:tailEnd/>
+                </a14:hiddenLine>
+              </a:ext>
+            </a:extLst>
+          </p:spPr>
+          <p:txBody>
+            <a:bodyPr/>
+            <a:lstStyle/>
+            <a:p>
+              <a:endParaRPr lang="en-US"/>
+            </a:p>
+          </p:txBody>
+        </p:sp>
+        <p:sp>
+          <p:nvSpPr>
+            <p:cNvPr id="56" name="Freeform 50">
+              <a:extLst>
+                <a:ext uri="{FF2B5EF4-FFF2-40B4-BE49-F238E27FC236}">
+                  <a16:creationId xmlns:a16="http://schemas.microsoft.com/office/drawing/2014/main" id="{870751A2-DBE9-4631-86D3-800E77491609}"/>
+                </a:ext>
+                <a:ext uri="{C183D7F6-B498-43B3-948B-1728B52AA6E4}">
+                  <adec:decorative xmlns:adec="http://schemas.microsoft.com/office/drawing/2017/decorative" val="1"/>
+                </a:ext>
+              </a:extLst>
+            </p:cNvPr>
+            <p:cNvSpPr>
+              <a:spLocks noEditPoints="1"/>
+            </p:cNvSpPr>
+            <p:nvPr>
+              <p:extLst>
+                <p:ext uri="{386F3935-93C4-4BCD-93E2-E3B085C9AB24}">
+                  <p16:designElem xmlns:p16="http://schemas.microsoft.com/office/powerpoint/2015/main" val="1"/>
+                </p:ext>
+              </p:extLst>
+            </p:nvPr>
+          </p:nvSpPr>
+          <p:spPr bwMode="auto">
+            <a:xfrm>
+              <a:off x="1624013" y="4867275"/>
+              <a:ext cx="190500" cy="188913"/>
+            </a:xfrm>
+            <a:custGeom>
+              <a:avLst/>
+              <a:gdLst/>
+              <a:ahLst/>
+              <a:cxnLst/>
+              <a:rect l="0" t="0" r="r" b="b"/>
+              <a:pathLst>
+                <a:path w="40" h="40">
+                  <a:moveTo>
+                    <a:pt x="20" y="40"/>
+                  </a:moveTo>
+                  <a:cubicBezTo>
+                    <a:pt x="9" y="40"/>
+                    <a:pt x="0" y="31"/>
+                    <a:pt x="0" y="20"/>
+                  </a:cubicBezTo>
+                  <a:cubicBezTo>
+                    <a:pt x="0" y="9"/>
+                    <a:pt x="9" y="0"/>
+                    <a:pt x="20" y="0"/>
+                  </a:cubicBezTo>
+                  <a:cubicBezTo>
+                    <a:pt x="31" y="0"/>
+                    <a:pt x="40" y="9"/>
+                    <a:pt x="40" y="20"/>
+                  </a:cubicBezTo>
+                  <a:cubicBezTo>
+                    <a:pt x="40" y="31"/>
+                    <a:pt x="31" y="40"/>
+                    <a:pt x="20" y="40"/>
+                  </a:cubicBezTo>
+                  <a:close/>
+                  <a:moveTo>
+                    <a:pt x="20" y="4"/>
+                  </a:moveTo>
+                  <a:cubicBezTo>
+                    <a:pt x="11" y="4"/>
+                    <a:pt x="4" y="11"/>
+                    <a:pt x="4" y="20"/>
+                  </a:cubicBezTo>
+                  <a:cubicBezTo>
+                    <a:pt x="4" y="29"/>
+                    <a:pt x="11" y="36"/>
+                    <a:pt x="20" y="36"/>
+                  </a:cubicBezTo>
+                  <a:cubicBezTo>
+                    <a:pt x="28" y="36"/>
+                    <a:pt x="36" y="29"/>
+                    <a:pt x="36" y="20"/>
+                  </a:cubicBezTo>
+                  <a:cubicBezTo>
+                    <a:pt x="36" y="11"/>
+                    <a:pt x="28" y="4"/>
+                    <a:pt x="20" y="4"/>
+                  </a:cubicBezTo>
+                  <a:close/>
+                </a:path>
+              </a:pathLst>
+            </a:custGeom>
+            <a:grpFill/>
+            <a:ln>
+              <a:noFill/>
+            </a:ln>
+            <a:extLst>
+              <a:ext uri="{91240B29-F687-4f45-9708-019B960494DF}">
+                <a14:hiddenLine xmlns="" xmlns:a16="http://schemas.microsoft.com/office/drawing/2014/main" xmlns:p14="http://schemas.microsoft.com/office/powerpoint/2010/main" xmlns:a14="http://schemas.microsoft.com/office/drawing/2010/main" w="9525">
+                  <a:solidFill>
+                    <a:srgbClr val="000000"/>
+                  </a:solidFill>
+                  <a:round/>
+                  <a:headEnd/>
+                  <a:tailEnd/>
+                </a14:hiddenLine>
+              </a:ext>
+            </a:extLst>
+          </p:spPr>
+          <p:txBody>
+            <a:bodyPr/>
+            <a:lstStyle/>
+            <a:p>
+              <a:endParaRPr lang="en-US"/>
+            </a:p>
+          </p:txBody>
+        </p:sp>
+        <p:sp>
+          <p:nvSpPr>
+            <p:cNvPr id="57" name="Freeform 51">
+              <a:extLst>
+                <a:ext uri="{FF2B5EF4-FFF2-40B4-BE49-F238E27FC236}">
+                  <a16:creationId xmlns:a16="http://schemas.microsoft.com/office/drawing/2014/main" id="{ED6D7806-3E23-488D-80ED-281D3DA72025}"/>
+                </a:ext>
+                <a:ext uri="{C183D7F6-B498-43B3-948B-1728B52AA6E4}">
+                  <adec:decorative xmlns:adec="http://schemas.microsoft.com/office/drawing/2017/decorative" val="1"/>
+                </a:ext>
+              </a:extLst>
+            </p:cNvPr>
+            <p:cNvSpPr/>
+            <p:nvPr>
+              <p:extLst>
+                <p:ext uri="{386F3935-93C4-4BCD-93E2-E3B085C9AB24}">
+                  <p16:designElem xmlns:p16="http://schemas.microsoft.com/office/powerpoint/2015/main" val="1"/>
+                </p:ext>
+              </p:extLst>
+            </p:nvPr>
+          </p:nvSpPr>
+          <p:spPr bwMode="auto">
+            <a:xfrm>
+              <a:off x="1404938" y="5422900"/>
+              <a:ext cx="371475" cy="1425575"/>
+            </a:xfrm>
+            <a:custGeom>
+              <a:avLst/>
+              <a:gdLst/>
+              <a:ahLst/>
+              <a:cxnLst/>
+              <a:rect l="0" t="0" r="r" b="b"/>
+              <a:pathLst>
+                <a:path w="234" h="898">
+                  <a:moveTo>
+                    <a:pt x="18" y="898"/>
+                  </a:moveTo>
+                  <a:lnTo>
+                    <a:pt x="0" y="898"/>
+                  </a:lnTo>
+                  <a:lnTo>
+                    <a:pt x="0" y="515"/>
+                  </a:lnTo>
+                  <a:lnTo>
+                    <a:pt x="0" y="512"/>
+                  </a:lnTo>
+                  <a:lnTo>
+                    <a:pt x="222" y="0"/>
+                  </a:lnTo>
+                  <a:lnTo>
+                    <a:pt x="234" y="6"/>
+                  </a:lnTo>
+                  <a:lnTo>
+                    <a:pt x="18" y="518"/>
+                  </a:lnTo>
+                  <a:lnTo>
+                    <a:pt x="18" y="898"/>
+                  </a:lnTo>
+                  <a:close/>
+                </a:path>
+              </a:pathLst>
+            </a:custGeom>
+            <a:grpFill/>
+            <a:ln>
+              <a:noFill/>
+            </a:ln>
+            <a:extLst>
+              <a:ext uri="{91240B29-F687-4f45-9708-019B960494DF}">
+                <a14:hiddenLine xmlns="" xmlns:a16="http://schemas.microsoft.com/office/drawing/2014/main" xmlns:p14="http://schemas.microsoft.com/office/powerpoint/2010/main" xmlns:a14="http://schemas.microsoft.com/office/drawing/2010/main" w="9525">
+                  <a:solidFill>
+                    <a:srgbClr val="000000"/>
+                  </a:solidFill>
+                  <a:round/>
+                  <a:headEnd/>
+                  <a:tailEnd/>
+                </a14:hiddenLine>
+              </a:ext>
+            </a:extLst>
+          </p:spPr>
+          <p:txBody>
+            <a:bodyPr/>
+            <a:lstStyle/>
+            <a:p>
+              <a:endParaRPr lang="en-US"/>
+            </a:p>
+          </p:txBody>
+        </p:sp>
+        <p:sp>
+          <p:nvSpPr>
+            <p:cNvPr id="58" name="Freeform 52">
+              <a:extLst>
+                <a:ext uri="{FF2B5EF4-FFF2-40B4-BE49-F238E27FC236}">
+                  <a16:creationId xmlns:a16="http://schemas.microsoft.com/office/drawing/2014/main" id="{170E0895-F9C9-44BA-AF81-F7938C7E4F2D}"/>
+                </a:ext>
+                <a:ext uri="{C183D7F6-B498-43B3-948B-1728B52AA6E4}">
+                  <adec:decorative xmlns:adec="http://schemas.microsoft.com/office/drawing/2017/decorative" val="1"/>
+                </a:ext>
+              </a:extLst>
+            </p:cNvPr>
+            <p:cNvSpPr/>
+            <p:nvPr>
+              <p:extLst>
+                <p:ext uri="{386F3935-93C4-4BCD-93E2-E3B085C9AB24}">
+                  <p16:designElem xmlns:p16="http://schemas.microsoft.com/office/powerpoint/2015/main" val="1"/>
+                </p:ext>
+              </p:extLst>
+            </p:nvPr>
+          </p:nvSpPr>
+          <p:spPr bwMode="auto">
+            <a:xfrm>
+              <a:off x="1666875" y="5945188"/>
+              <a:ext cx="152400" cy="912813"/>
+            </a:xfrm>
+            <a:custGeom>
+              <a:avLst/>
+              <a:gdLst/>
+              <a:ahLst/>
+              <a:cxnLst/>
+              <a:rect l="0" t="0" r="r" b="b"/>
+              <a:pathLst>
+                <a:path w="96" h="575">
+                  <a:moveTo>
+                    <a:pt x="15" y="575"/>
+                  </a:moveTo>
+                  <a:lnTo>
+                    <a:pt x="0" y="569"/>
+                  </a:lnTo>
+                  <a:lnTo>
+                    <a:pt x="81" y="383"/>
+                  </a:lnTo>
+                  <a:lnTo>
+                    <a:pt x="81" y="0"/>
+                  </a:lnTo>
+                  <a:lnTo>
+                    <a:pt x="96" y="0"/>
+                  </a:lnTo>
+                  <a:lnTo>
+                    <a:pt x="96" y="386"/>
+                  </a:lnTo>
+                  <a:lnTo>
+                    <a:pt x="15" y="575"/>
+                  </a:lnTo>
+                  <a:close/>
+                </a:path>
+              </a:pathLst>
+            </a:custGeom>
+            <a:grpFill/>
+            <a:ln>
+              <a:noFill/>
+            </a:ln>
+            <a:extLst>
+              <a:ext uri="{91240B29-F687-4f45-9708-019B960494DF}">
+                <a14:hiddenLine xmlns="" xmlns:a16="http://schemas.microsoft.com/office/drawing/2014/main" xmlns:p14="http://schemas.microsoft.com/office/powerpoint/2010/main" xmlns:a14="http://schemas.microsoft.com/office/drawing/2010/main" w="9525">
+                  <a:solidFill>
+                    <a:srgbClr val="000000"/>
+                  </a:solidFill>
+                  <a:round/>
+                  <a:headEnd/>
+                  <a:tailEnd/>
+                </a14:hiddenLine>
+              </a:ext>
+            </a:extLst>
+          </p:spPr>
+          <p:txBody>
+            <a:bodyPr/>
+            <a:lstStyle/>
+            <a:p>
+              <a:endParaRPr lang="en-US"/>
+            </a:p>
+          </p:txBody>
+        </p:sp>
+        <p:sp>
+          <p:nvSpPr>
+            <p:cNvPr id="59" name="Freeform 53">
+              <a:extLst>
+                <a:ext uri="{FF2B5EF4-FFF2-40B4-BE49-F238E27FC236}">
+                  <a16:creationId xmlns:a16="http://schemas.microsoft.com/office/drawing/2014/main" id="{75AD3DD3-BD4A-4DD9-9AC1-C60E34174401}"/>
+                </a:ext>
+                <a:ext uri="{C183D7F6-B498-43B3-948B-1728B52AA6E4}">
+                  <adec:decorative xmlns:adec="http://schemas.microsoft.com/office/drawing/2017/decorative" val="1"/>
+                </a:ext>
+              </a:extLst>
+            </p:cNvPr>
+            <p:cNvSpPr>
+              <a:spLocks noEditPoints="1"/>
+            </p:cNvSpPr>
+            <p:nvPr>
+              <p:extLst>
+                <p:ext uri="{386F3935-93C4-4BCD-93E2-E3B085C9AB24}">
+                  <p16:designElem xmlns:p16="http://schemas.microsoft.com/office/powerpoint/2015/main" val="1"/>
+                </p:ext>
+              </p:extLst>
+            </p:nvPr>
+          </p:nvSpPr>
+          <p:spPr bwMode="auto">
+            <a:xfrm>
+              <a:off x="1709738" y="5246688"/>
+              <a:ext cx="190500" cy="190500"/>
+            </a:xfrm>
+            <a:custGeom>
+              <a:avLst/>
+              <a:gdLst/>
+              <a:ahLst/>
+              <a:cxnLst/>
+              <a:rect l="0" t="0" r="r" b="b"/>
+              <a:pathLst>
+                <a:path w="40" h="40">
+                  <a:moveTo>
+                    <a:pt x="20" y="40"/>
+                  </a:moveTo>
+                  <a:cubicBezTo>
+                    <a:pt x="9" y="40"/>
+                    <a:pt x="0" y="31"/>
+                    <a:pt x="0" y="20"/>
+                  </a:cubicBezTo>
+                  <a:cubicBezTo>
+                    <a:pt x="0" y="9"/>
+                    <a:pt x="9" y="0"/>
+                    <a:pt x="20" y="0"/>
+                  </a:cubicBezTo>
+                  <a:cubicBezTo>
+                    <a:pt x="31" y="0"/>
+                    <a:pt x="40" y="9"/>
+                    <a:pt x="40" y="20"/>
+                  </a:cubicBezTo>
+                  <a:cubicBezTo>
+                    <a:pt x="40" y="31"/>
+                    <a:pt x="31" y="40"/>
+                    <a:pt x="20" y="40"/>
+                  </a:cubicBezTo>
+                  <a:close/>
+                  <a:moveTo>
+                    <a:pt x="20" y="4"/>
+                  </a:moveTo>
+                  <a:cubicBezTo>
+                    <a:pt x="11" y="4"/>
+                    <a:pt x="4" y="11"/>
+                    <a:pt x="4" y="20"/>
+                  </a:cubicBezTo>
+                  <a:cubicBezTo>
+                    <a:pt x="4" y="29"/>
+                    <a:pt x="11" y="36"/>
+                    <a:pt x="20" y="36"/>
+                  </a:cubicBezTo>
+                  <a:cubicBezTo>
+                    <a:pt x="29" y="36"/>
+                    <a:pt x="36" y="29"/>
+                    <a:pt x="36" y="20"/>
+                  </a:cubicBezTo>
+                  <a:cubicBezTo>
+                    <a:pt x="36" y="11"/>
+                    <a:pt x="29" y="4"/>
+                    <a:pt x="20" y="4"/>
+                  </a:cubicBezTo>
+                  <a:close/>
+                </a:path>
+              </a:pathLst>
+            </a:custGeom>
+            <a:grpFill/>
+            <a:ln>
+              <a:noFill/>
+            </a:ln>
+            <a:extLst>
+              <a:ext uri="{91240B29-F687-4f45-9708-019B960494DF}">
+                <a14:hiddenLine xmlns="" xmlns:a16="http://schemas.microsoft.com/office/drawing/2014/main" xmlns:p14="http://schemas.microsoft.com/office/powerpoint/2010/main" xmlns:a14="http://schemas.microsoft.com/office/drawing/2010/main" w="9525">
+                  <a:solidFill>
+                    <a:srgbClr val="000000"/>
+                  </a:solidFill>
+                  <a:round/>
+                  <a:headEnd/>
+                  <a:tailEnd/>
+                </a14:hiddenLine>
+              </a:ext>
+            </a:extLst>
+          </p:spPr>
+          <p:txBody>
+            <a:bodyPr/>
+            <a:lstStyle/>
+            <a:p>
+              <a:endParaRPr lang="en-US"/>
+            </a:p>
+          </p:txBody>
+        </p:sp>
+        <p:sp>
+          <p:nvSpPr>
+            <p:cNvPr id="60" name="Freeform 54">
+              <a:extLst>
+                <a:ext uri="{FF2B5EF4-FFF2-40B4-BE49-F238E27FC236}">
+                  <a16:creationId xmlns:a16="http://schemas.microsoft.com/office/drawing/2014/main" id="{D047B55E-0847-4696-8101-A643C3C7E911}"/>
+                </a:ext>
+                <a:ext uri="{C183D7F6-B498-43B3-948B-1728B52AA6E4}">
+                  <adec:decorative xmlns:adec="http://schemas.microsoft.com/office/drawing/2017/decorative" val="1"/>
+                </a:ext>
+              </a:extLst>
+            </p:cNvPr>
+            <p:cNvSpPr>
+              <a:spLocks noEditPoints="1"/>
+            </p:cNvSpPr>
+            <p:nvPr>
+              <p:extLst>
+                <p:ext uri="{386F3935-93C4-4BCD-93E2-E3B085C9AB24}">
+                  <p16:designElem xmlns:p16="http://schemas.microsoft.com/office/powerpoint/2015/main" val="1"/>
+                </p:ext>
+              </p:extLst>
+            </p:nvPr>
+          </p:nvSpPr>
+          <p:spPr bwMode="auto">
+            <a:xfrm>
+              <a:off x="1709738" y="5764213"/>
+              <a:ext cx="190500" cy="190500"/>
+            </a:xfrm>
+            <a:custGeom>
+              <a:avLst/>
+              <a:gdLst/>
+              <a:ahLst/>
+              <a:cxnLst/>
+              <a:rect l="0" t="0" r="r" b="b"/>
+              <a:pathLst>
+                <a:path w="40" h="40">
+                  <a:moveTo>
+                    <a:pt x="20" y="40"/>
+                  </a:moveTo>
+                  <a:cubicBezTo>
+                    <a:pt x="9" y="40"/>
+                    <a:pt x="0" y="31"/>
+                    <a:pt x="0" y="20"/>
+                  </a:cubicBezTo>
+                  <a:cubicBezTo>
+                    <a:pt x="0" y="9"/>
+                    <a:pt x="9" y="0"/>
+                    <a:pt x="20" y="0"/>
+                  </a:cubicBezTo>
+                  <a:cubicBezTo>
+                    <a:pt x="31" y="0"/>
+                    <a:pt x="40" y="9"/>
+                    <a:pt x="40" y="20"/>
+                  </a:cubicBezTo>
+                  <a:cubicBezTo>
+                    <a:pt x="40" y="31"/>
+                    <a:pt x="31" y="40"/>
+                    <a:pt x="20" y="40"/>
+                  </a:cubicBezTo>
+                  <a:close/>
+                  <a:moveTo>
+                    <a:pt x="20" y="4"/>
+                  </a:moveTo>
+                  <a:cubicBezTo>
+                    <a:pt x="11" y="4"/>
+                    <a:pt x="4" y="11"/>
+                    <a:pt x="4" y="20"/>
+                  </a:cubicBezTo>
+                  <a:cubicBezTo>
+                    <a:pt x="4" y="29"/>
+                    <a:pt x="11" y="36"/>
+                    <a:pt x="20" y="36"/>
+                  </a:cubicBezTo>
+                  <a:cubicBezTo>
+                    <a:pt x="29" y="36"/>
+                    <a:pt x="36" y="29"/>
+                    <a:pt x="36" y="20"/>
+                  </a:cubicBezTo>
+                  <a:cubicBezTo>
+                    <a:pt x="36" y="11"/>
+                    <a:pt x="29" y="4"/>
+                    <a:pt x="20" y="4"/>
+                  </a:cubicBezTo>
+                  <a:close/>
+                </a:path>
+              </a:pathLst>
+            </a:custGeom>
+            <a:grpFill/>
+            <a:ln>
+              <a:noFill/>
+            </a:ln>
+            <a:extLst>
+              <a:ext uri="{91240B29-F687-4f45-9708-019B960494DF}">
+                <a14:hiddenLine xmlns="" xmlns:a16="http://schemas.microsoft.com/office/drawing/2014/main" xmlns:p14="http://schemas.microsoft.com/office/powerpoint/2010/main" xmlns:a14="http://schemas.microsoft.com/office/drawing/2010/main" w="9525">
+                  <a:solidFill>
+                    <a:srgbClr val="000000"/>
+                  </a:solidFill>
+                  <a:round/>
+                  <a:headEnd/>
+                  <a:tailEnd/>
+                </a14:hiddenLine>
+              </a:ext>
+            </a:extLst>
+          </p:spPr>
+          <p:txBody>
+            <a:bodyPr/>
+            <a:lstStyle/>
+            <a:p>
+              <a:endParaRPr lang="en-US"/>
+            </a:p>
+          </p:txBody>
+        </p:sp>
+        <p:sp>
+          <p:nvSpPr>
+            <p:cNvPr id="61" name="Freeform 55">
+              <a:extLst>
+                <a:ext uri="{FF2B5EF4-FFF2-40B4-BE49-F238E27FC236}">
+                  <a16:creationId xmlns:a16="http://schemas.microsoft.com/office/drawing/2014/main" id="{CB3EF1DB-37BD-463B-A542-7AA57DC9FE88}"/>
+                </a:ext>
+                <a:ext uri="{C183D7F6-B498-43B3-948B-1728B52AA6E4}">
+                  <adec:decorative xmlns:adec="http://schemas.microsoft.com/office/drawing/2017/decorative" val="1"/>
+                </a:ext>
+              </a:extLst>
+            </p:cNvPr>
+            <p:cNvSpPr/>
+            <p:nvPr>
+              <p:extLst>
+                <p:ext uri="{386F3935-93C4-4BCD-93E2-E3B085C9AB24}">
+                  <p16:designElem xmlns:p16="http://schemas.microsoft.com/office/powerpoint/2015/main" val="1"/>
+                </p:ext>
+              </p:extLst>
+            </p:nvPr>
+          </p:nvSpPr>
+          <p:spPr bwMode="auto">
+            <a:xfrm>
+              <a:off x="1766888" y="6330950"/>
+              <a:ext cx="419100" cy="527050"/>
+            </a:xfrm>
+            <a:custGeom>
+              <a:avLst/>
+              <a:gdLst/>
+              <a:ahLst/>
+              <a:cxnLst/>
+              <a:rect l="0" t="0" r="r" b="b"/>
+              <a:pathLst>
+                <a:path w="264" h="332">
+                  <a:moveTo>
+                    <a:pt x="12" y="332"/>
+                  </a:moveTo>
+                  <a:lnTo>
+                    <a:pt x="0" y="326"/>
+                  </a:lnTo>
+                  <a:lnTo>
+                    <a:pt x="45" y="206"/>
+                  </a:lnTo>
+                  <a:lnTo>
+                    <a:pt x="255" y="0"/>
+                  </a:lnTo>
+                  <a:lnTo>
+                    <a:pt x="264" y="12"/>
+                  </a:lnTo>
+                  <a:lnTo>
+                    <a:pt x="60" y="215"/>
+                  </a:lnTo>
+                  <a:lnTo>
+                    <a:pt x="12" y="332"/>
+                  </a:lnTo>
+                  <a:close/>
+                </a:path>
+              </a:pathLst>
+            </a:custGeom>
+            <a:grpFill/>
+            <a:ln>
+              <a:noFill/>
+            </a:ln>
+            <a:extLst>
+              <a:ext uri="{91240B29-F687-4f45-9708-019B960494DF}">
+                <a14:hiddenLine xmlns="" xmlns:a16="http://schemas.microsoft.com/office/drawing/2014/main" xmlns:p14="http://schemas.microsoft.com/office/powerpoint/2010/main" xmlns:a14="http://schemas.microsoft.com/office/drawing/2010/main" w="9525">
+                  <a:solidFill>
+                    <a:srgbClr val="000000"/>
+                  </a:solidFill>
+                  <a:round/>
+                  <a:headEnd/>
+                  <a:tailEnd/>
+                </a14:hiddenLine>
+              </a:ext>
+            </a:extLst>
+          </p:spPr>
+          <p:txBody>
+            <a:bodyPr/>
+            <a:lstStyle/>
+            <a:p>
+              <a:endParaRPr lang="en-US"/>
+            </a:p>
+          </p:txBody>
+        </p:sp>
+        <p:sp>
+          <p:nvSpPr>
+            <p:cNvPr id="62" name="Freeform 56">
+              <a:extLst>
+                <a:ext uri="{FF2B5EF4-FFF2-40B4-BE49-F238E27FC236}">
+                  <a16:creationId xmlns:a16="http://schemas.microsoft.com/office/drawing/2014/main" id="{95D0E013-2F18-4248-9D83-3BFF25A05CDB}"/>
+                </a:ext>
+                <a:ext uri="{C183D7F6-B498-43B3-948B-1728B52AA6E4}">
+                  <adec:decorative xmlns:adec="http://schemas.microsoft.com/office/drawing/2017/decorative" val="1"/>
+                </a:ext>
+              </a:extLst>
+            </p:cNvPr>
+            <p:cNvSpPr>
+              <a:spLocks noEditPoints="1"/>
+            </p:cNvSpPr>
+            <p:nvPr>
+              <p:extLst>
+                <p:ext uri="{386F3935-93C4-4BCD-93E2-E3B085C9AB24}">
+                  <p16:designElem xmlns:p16="http://schemas.microsoft.com/office/powerpoint/2015/main" val="1"/>
+                </p:ext>
+              </p:extLst>
+            </p:nvPr>
+          </p:nvSpPr>
+          <p:spPr bwMode="auto">
+            <a:xfrm>
+              <a:off x="2147888" y="6221413"/>
+              <a:ext cx="157163" cy="147638"/>
+            </a:xfrm>
+            <a:custGeom>
+              <a:avLst/>
+              <a:gdLst/>
+              <a:ahLst/>
+              <a:cxnLst/>
+              <a:rect l="0" t="0" r="r" b="b"/>
+              <a:pathLst>
+                <a:path w="33" h="31">
+                  <a:moveTo>
+                    <a:pt x="16" y="31"/>
+                  </a:moveTo>
+                  <a:cubicBezTo>
+                    <a:pt x="12" y="31"/>
+                    <a:pt x="8" y="29"/>
+                    <a:pt x="5" y="26"/>
+                  </a:cubicBezTo>
+                  <a:cubicBezTo>
+                    <a:pt x="2" y="24"/>
+                    <a:pt x="0" y="20"/>
+                    <a:pt x="0" y="15"/>
+                  </a:cubicBezTo>
+                  <a:cubicBezTo>
+                    <a:pt x="0" y="11"/>
+                    <a:pt x="2" y="7"/>
+                    <a:pt x="5" y="4"/>
+                  </a:cubicBezTo>
+                  <a:cubicBezTo>
+                    <a:pt x="8" y="1"/>
+                    <a:pt x="12" y="0"/>
+                    <a:pt x="16" y="0"/>
+                  </a:cubicBezTo>
+                  <a:cubicBezTo>
+                    <a:pt x="20" y="0"/>
+                    <a:pt x="24" y="1"/>
+                    <a:pt x="27" y="4"/>
+                  </a:cubicBezTo>
+                  <a:cubicBezTo>
+                    <a:pt x="33" y="10"/>
+                    <a:pt x="33" y="20"/>
+                    <a:pt x="27" y="26"/>
+                  </a:cubicBezTo>
+                  <a:cubicBezTo>
+                    <a:pt x="24" y="29"/>
+                    <a:pt x="20" y="31"/>
+                    <a:pt x="16" y="31"/>
+                  </a:cubicBezTo>
+                  <a:close/>
+                  <a:moveTo>
+                    <a:pt x="16" y="4"/>
+                  </a:moveTo>
+                  <a:cubicBezTo>
+                    <a:pt x="13" y="4"/>
+                    <a:pt x="10" y="5"/>
+                    <a:pt x="8" y="7"/>
+                  </a:cubicBezTo>
+                  <a:cubicBezTo>
+                    <a:pt x="6" y="9"/>
+                    <a:pt x="4" y="12"/>
+                    <a:pt x="4" y="15"/>
+                  </a:cubicBezTo>
+                  <a:cubicBezTo>
+                    <a:pt x="4" y="19"/>
+                    <a:pt x="6" y="21"/>
+                    <a:pt x="8" y="24"/>
+                  </a:cubicBezTo>
+                  <a:cubicBezTo>
+                    <a:pt x="10" y="26"/>
+                    <a:pt x="13" y="27"/>
+                    <a:pt x="16" y="27"/>
+                  </a:cubicBezTo>
+                  <a:cubicBezTo>
+                    <a:pt x="19" y="27"/>
+                    <a:pt x="22" y="26"/>
+                    <a:pt x="24" y="24"/>
+                  </a:cubicBezTo>
+                  <a:cubicBezTo>
+                    <a:pt x="29" y="19"/>
+                    <a:pt x="29" y="12"/>
+                    <a:pt x="24" y="7"/>
+                  </a:cubicBezTo>
+                  <a:cubicBezTo>
+                    <a:pt x="22" y="5"/>
+                    <a:pt x="19" y="4"/>
+                    <a:pt x="16" y="4"/>
+                  </a:cubicBezTo>
+                  <a:close/>
+                </a:path>
+              </a:pathLst>
+            </a:custGeom>
+            <a:grpFill/>
+            <a:ln>
+              <a:noFill/>
+            </a:ln>
+            <a:extLst>
+              <a:ext uri="{91240B29-F687-4f45-9708-019B960494DF}">
+                <a14:hiddenLine xmlns="" xmlns:a16="http://schemas.microsoft.com/office/drawing/2014/main" xmlns:p14="http://schemas.microsoft.com/office/powerpoint/2010/main" xmlns:a14="http://schemas.microsoft.com/office/drawing/2010/main" w="9525">
+                  <a:solidFill>
+                    <a:srgbClr val="000000"/>
+                  </a:solidFill>
+                  <a:round/>
+                  <a:headEnd/>
+                  <a:tailEnd/>
+                </a14:hiddenLine>
+              </a:ext>
+            </a:extLst>
+          </p:spPr>
+          <p:txBody>
+            <a:bodyPr/>
+            <a:lstStyle/>
+            <a:p>
+              <a:endParaRPr lang="en-US"/>
+            </a:p>
+          </p:txBody>
+        </p:sp>
+        <p:sp>
+          <p:nvSpPr>
+            <p:cNvPr id="63" name="Freeform 57">
+              <a:extLst>
+                <a:ext uri="{FF2B5EF4-FFF2-40B4-BE49-F238E27FC236}">
+                  <a16:creationId xmlns:a16="http://schemas.microsoft.com/office/drawing/2014/main" id="{E7D95722-3A1F-4917-8C16-D4D409941656}"/>
+                </a:ext>
+                <a:ext uri="{C183D7F6-B498-43B3-948B-1728B52AA6E4}">
+                  <adec:decorative xmlns:adec="http://schemas.microsoft.com/office/drawing/2017/decorative" val="1"/>
+                </a:ext>
+              </a:extLst>
+            </p:cNvPr>
+            <p:cNvSpPr/>
+            <p:nvPr>
+              <p:extLst>
+                <p:ext uri="{386F3935-93C4-4BCD-93E2-E3B085C9AB24}">
+                  <p16:designElem xmlns:p16="http://schemas.microsoft.com/office/powerpoint/2015/main" val="1"/>
+                </p:ext>
+              </p:extLst>
+            </p:nvPr>
+          </p:nvSpPr>
+          <p:spPr bwMode="auto">
+            <a:xfrm>
+              <a:off x="504825" y="9525"/>
+              <a:ext cx="233363" cy="5103813"/>
+            </a:xfrm>
+            <a:custGeom>
+              <a:avLst/>
+              <a:gdLst/>
+              <a:ahLst/>
+              <a:cxnLst/>
+              <a:rect l="0" t="0" r="r" b="b"/>
+              <a:pathLst>
+                <a:path w="147" h="3215">
+                  <a:moveTo>
+                    <a:pt x="132" y="3215"/>
+                  </a:moveTo>
+                  <a:lnTo>
+                    <a:pt x="129" y="2754"/>
+                  </a:lnTo>
+                  <a:lnTo>
+                    <a:pt x="0" y="1901"/>
+                  </a:lnTo>
+                  <a:lnTo>
+                    <a:pt x="0" y="0"/>
+                  </a:lnTo>
+                  <a:lnTo>
+                    <a:pt x="15" y="0"/>
+                  </a:lnTo>
+                  <a:lnTo>
+                    <a:pt x="15" y="1898"/>
+                  </a:lnTo>
+                  <a:lnTo>
+                    <a:pt x="144" y="2754"/>
+                  </a:lnTo>
+                  <a:lnTo>
+                    <a:pt x="147" y="3215"/>
+                  </a:lnTo>
+                  <a:lnTo>
+                    <a:pt x="132" y="3215"/>
+                  </a:lnTo>
+                  <a:close/>
+                </a:path>
+              </a:pathLst>
+            </a:custGeom>
+            <a:grpFill/>
+            <a:ln>
+              <a:noFill/>
+            </a:ln>
+            <a:extLst>
+              <a:ext uri="{91240B29-F687-4f45-9708-019B960494DF}">
+                <a14:hiddenLine xmlns="" xmlns:a16="http://schemas.microsoft.com/office/drawing/2014/main" xmlns:p14="http://schemas.microsoft.com/office/powerpoint/2010/main" xmlns:a14="http://schemas.microsoft.com/office/drawing/2010/main" w="9525">
+                  <a:solidFill>
+                    <a:srgbClr val="000000"/>
+                  </a:solidFill>
+                  <a:round/>
+                  <a:headEnd/>
+                  <a:tailEnd/>
+                </a14:hiddenLine>
+              </a:ext>
+            </a:extLst>
+          </p:spPr>
+          <p:txBody>
+            <a:bodyPr/>
+            <a:lstStyle/>
+            <a:p>
+              <a:endParaRPr lang="en-US"/>
+            </a:p>
+          </p:txBody>
+        </p:sp>
+        <p:sp>
+          <p:nvSpPr>
+            <p:cNvPr id="64" name="Freeform 58">
+              <a:extLst>
+                <a:ext uri="{FF2B5EF4-FFF2-40B4-BE49-F238E27FC236}">
+                  <a16:creationId xmlns:a16="http://schemas.microsoft.com/office/drawing/2014/main" id="{A54912BE-A961-4720-992C-09A2D13DE2B1}"/>
+                </a:ext>
+                <a:ext uri="{C183D7F6-B498-43B3-948B-1728B52AA6E4}">
+                  <adec:decorative xmlns:adec="http://schemas.microsoft.com/office/drawing/2017/decorative" val="1"/>
+                </a:ext>
+              </a:extLst>
+            </p:cNvPr>
+            <p:cNvSpPr>
+              <a:spLocks noEditPoints="1"/>
+            </p:cNvSpPr>
+            <p:nvPr>
+              <p:extLst>
+                <p:ext uri="{386F3935-93C4-4BCD-93E2-E3B085C9AB24}">
+                  <p16:designElem xmlns:p16="http://schemas.microsoft.com/office/powerpoint/2015/main" val="1"/>
+                </p:ext>
+              </p:extLst>
+            </p:nvPr>
+          </p:nvSpPr>
+          <p:spPr bwMode="auto">
+            <a:xfrm>
+              <a:off x="633413" y="5103813"/>
+              <a:ext cx="185738" cy="185738"/>
+            </a:xfrm>
+            <a:custGeom>
+              <a:avLst/>
+              <a:gdLst/>
+              <a:ahLst/>
+              <a:cxnLst/>
+              <a:rect l="0" t="0" r="r" b="b"/>
+              <a:pathLst>
+                <a:path w="39" h="39">
+                  <a:moveTo>
+                    <a:pt x="20" y="39"/>
+                  </a:moveTo>
+                  <a:cubicBezTo>
+                    <a:pt x="9" y="39"/>
+                    <a:pt x="0" y="30"/>
+                    <a:pt x="0" y="19"/>
+                  </a:cubicBezTo>
+                  <a:cubicBezTo>
+                    <a:pt x="0" y="9"/>
+                    <a:pt x="9" y="0"/>
+                    <a:pt x="20" y="0"/>
+                  </a:cubicBezTo>
+                  <a:cubicBezTo>
+                    <a:pt x="30" y="0"/>
+                    <a:pt x="39" y="9"/>
+                    <a:pt x="39" y="19"/>
+                  </a:cubicBezTo>
+                  <a:cubicBezTo>
+                    <a:pt x="39" y="30"/>
+                    <a:pt x="30" y="39"/>
+                    <a:pt x="20" y="39"/>
+                  </a:cubicBezTo>
+                  <a:close/>
+                  <a:moveTo>
+                    <a:pt x="20" y="4"/>
+                  </a:moveTo>
+                  <a:cubicBezTo>
+                    <a:pt x="11" y="4"/>
+                    <a:pt x="4" y="11"/>
+                    <a:pt x="4" y="19"/>
+                  </a:cubicBezTo>
+                  <a:cubicBezTo>
+                    <a:pt x="4" y="28"/>
+                    <a:pt x="11" y="35"/>
+                    <a:pt x="20" y="35"/>
+                  </a:cubicBezTo>
+                  <a:cubicBezTo>
+                    <a:pt x="28" y="35"/>
+                    <a:pt x="35" y="28"/>
+                    <a:pt x="35" y="19"/>
+                  </a:cubicBezTo>
+                  <a:cubicBezTo>
+                    <a:pt x="35" y="11"/>
+                    <a:pt x="28" y="4"/>
+                    <a:pt x="20" y="4"/>
+                  </a:cubicBezTo>
+                  <a:close/>
+                </a:path>
+              </a:pathLst>
+            </a:custGeom>
+            <a:grpFill/>
+            <a:ln>
+              <a:noFill/>
+            </a:ln>
+            <a:extLst>
+              <a:ext uri="{91240B29-F687-4f45-9708-019B960494DF}">
+                <a14:hiddenLine xmlns="" xmlns:a16="http://schemas.microsoft.com/office/drawing/2014/main" xmlns:p14="http://schemas.microsoft.com/office/powerpoint/2010/main" xmlns:a14="http://schemas.microsoft.com/office/drawing/2010/main" w="9525">
+                  <a:solidFill>
+                    <a:srgbClr val="000000"/>
+                  </a:solidFill>
+                  <a:round/>
+                  <a:headEnd/>
+                  <a:tailEnd/>
+                </a14:hiddenLine>
+              </a:ext>
+            </a:extLst>
+          </p:spPr>
+          <p:txBody>
+            <a:bodyPr/>
+            <a:lstStyle/>
+            <a:p>
+              <a:endParaRPr lang="en-US"/>
+            </a:p>
+          </p:txBody>
+        </p:sp>
+      </p:grpSp>
+      <p:sp useBgFill="1">
+        <p:nvSpPr>
+          <p:cNvPr id="66" name="Round Diagonal Corner Rectangle 7">
+            <a:extLst>
+              <a:ext uri="{FF2B5EF4-FFF2-40B4-BE49-F238E27FC236}">
+                <a16:creationId xmlns:a16="http://schemas.microsoft.com/office/drawing/2014/main" id="{FF5E4228-419E-44B9-B090-94A9540E5B3F}"/>
+              </a:ext>
+              <a:ext uri="{C183D7F6-B498-43B3-948B-1728B52AA6E4}">
+                <adec:decorative xmlns:adec="http://schemas.microsoft.com/office/drawing/2017/decorative" val="1"/>
+              </a:ext>
+            </a:extLst>
+          </p:cNvPr>
+          <p:cNvSpPr>
+            <a:spLocks noGrp="1" noRot="1" noChangeAspect="1" noMove="1" noResize="1" noEditPoints="1" noAdjustHandles="1" noChangeArrowheads="1" noChangeShapeType="1" noTextEdit="1"/>
+          </p:cNvSpPr>
+          <p:nvPr>
+            <p:extLst>
+              <p:ext uri="{386F3935-93C4-4BCD-93E2-E3B085C9AB24}">
+                <p16:designElem xmlns:p16="http://schemas.microsoft.com/office/powerpoint/2015/main" val="1"/>
+              </p:ext>
+            </p:extLst>
+          </p:nvPr>
+        </p:nvSpPr>
+        <p:spPr>
+          <a:xfrm>
+            <a:off x="4059079" y="0"/>
+            <a:ext cx="8132922" cy="6848476"/>
+          </a:xfrm>
+          <a:prstGeom prst="round2DiagRect">
+            <a:avLst>
+              <a:gd name="adj1" fmla="val 0"/>
+              <a:gd name="adj2" fmla="val 0"/>
+            </a:avLst>
+          </a:prstGeom>
+          <a:ln w="19050" cap="sq">
+            <a:noFill/>
+            <a:miter lim="800000"/>
+          </a:ln>
+          <a:effectLst/>
+        </p:spPr>
+        <p:style>
+          <a:lnRef idx="1">
+            <a:schemeClr val="accent1"/>
+          </a:lnRef>
+          <a:fillRef idx="3">
+            <a:schemeClr val="accent1"/>
+          </a:fillRef>
+          <a:effectRef idx="2">
+            <a:schemeClr val="accent1"/>
+          </a:effectRef>
+          <a:fontRef idx="minor">
+            <a:schemeClr val="lt1"/>
+          </a:fontRef>
+        </p:style>
+        <p:txBody>
+          <a:bodyPr rtlCol="0" anchor="ctr"/>
+          <a:lstStyle/>
+          <a:p>
+            <a:pPr algn="ctr"/>
+            <a:endParaRPr lang="en-US"/>
+          </a:p>
+        </p:txBody>
+      </p:sp>
+      <p:sp>
+        <p:nvSpPr>
           <p:cNvPr id="2" name="Title 1">
             <a:extLst>
               <a:ext uri="{FF2B5EF4-FFF2-40B4-BE49-F238E27FC236}">
@@ -12371,20 +17796,22 @@
             <p:ph type="ctrTitle"/>
           </p:nvPr>
         </p:nvSpPr>
-        <p:spPr/>
+        <p:spPr>
+          <a:xfrm>
+            <a:off x="4654296" y="963613"/>
+            <a:ext cx="6013703" cy="4149724"/>
+          </a:xfrm>
+        </p:spPr>
         <p:txBody>
-          <a:bodyPr/>
+          <a:bodyPr anchor="ctr">
+            <a:normAutofit/>
+          </a:bodyPr>
           <a:lstStyle/>
           <a:p>
             <a:r>
-              <a:rPr lang="en-US" dirty="0"/>
-              <a:t>Data Visualization and Reports with </a:t>
+              <a:rPr lang="en-US" sz="5600"/>
+              <a:t>Data Visualization and Reports with Rmarkdown</a:t>
             </a:r>
-            <a:r>
-              <a:rPr lang="en-US" dirty="0" err="1"/>
-              <a:t>Rmarkdown</a:t>
-            </a:r>
-            <a:endParaRPr lang="en-US" dirty="0"/>
           </a:p>
         </p:txBody>
       </p:sp>
@@ -12404,13 +17831,25 @@
             <p:ph type="subTitle" idx="1"/>
           </p:nvPr>
         </p:nvSpPr>
-        <p:spPr/>
+        <p:spPr>
+          <a:xfrm>
+            <a:off x="1180571" y="963612"/>
+            <a:ext cx="2502269" cy="4149725"/>
+          </a:xfrm>
+        </p:spPr>
         <p:txBody>
-          <a:bodyPr/>
+          <a:bodyPr anchor="ctr">
+            <a:normAutofit/>
+          </a:bodyPr>
           <a:lstStyle/>
           <a:p>
+            <a:pPr algn="r"/>
             <a:r>
-              <a:rPr lang="en-US" dirty="0"/>
+              <a:rPr lang="en-US">
+                <a:solidFill>
+                  <a:schemeClr val="tx1"/>
+                </a:solidFill>
+              </a:rPr>
               <a:t>SERC Summer Data Science Series</a:t>
             </a:r>
           </a:p>
@@ -12797,7 +18236,7 @@
           <a:p>
             <a:r>
               <a:rPr lang="en-US" dirty="0"/>
-              <a:t>Supports a variety of shareable static and dynamic output formats: PDFs, HTML, shiny apps, books (</a:t>
+              <a:t>Access! Supports a variety of shareable static and dynamic output formats: PDFs, HTML, shiny apps, books (</a:t>
             </a:r>
             <a:r>
               <a:rPr lang="en-US" dirty="0" err="1"/>
